--- a/docs/slides/deck_week.pptx
+++ b/docs/slides/deck_week.pptx
@@ -7,26 +7,26 @@
   <p:sldIdLst>
     <p:sldId id="256" r:id="rId7"/>
     <p:sldId id="257" r:id="rId8"/>
-    <p:sldId id="258" r:id="rId9"/>
-    <p:sldId id="259" r:id="rId10"/>
-    <p:sldId id="260" r:id="rId11"/>
-    <p:sldId id="261" r:id="rId12"/>
-    <p:sldId id="262" r:id="rId13"/>
-    <p:sldId id="263" r:id="rId14"/>
-    <p:sldId id="264" r:id="rId15"/>
-    <p:sldId id="265" r:id="rId16"/>
-    <p:sldId id="266" r:id="rId17"/>
-    <p:sldId id="267" r:id="rId18"/>
-    <p:sldId id="268" r:id="rId19"/>
-    <p:sldId id="269" r:id="rId20"/>
-    <p:sldId id="270" r:id="rId21"/>
-    <p:sldId id="271" r:id="rId22"/>
-    <p:sldId id="272" r:id="rId23"/>
-    <p:sldId id="273" r:id="rId24"/>
-    <p:sldId id="274" r:id="rId25"/>
-    <p:sldId id="275" r:id="rId26"/>
-    <p:sldId id="276" r:id="rId27"/>
-    <p:sldId id="277" r:id="rId28"/>
+    <p:sldId id="258" r:id="rId10"/>
+    <p:sldId id="259" r:id="rId11"/>
+    <p:sldId id="260" r:id="rId12"/>
+    <p:sldId id="261" r:id="rId13"/>
+    <p:sldId id="262" r:id="rId14"/>
+    <p:sldId id="263" r:id="rId15"/>
+    <p:sldId id="264" r:id="rId16"/>
+    <p:sldId id="265" r:id="rId17"/>
+    <p:sldId id="266" r:id="rId18"/>
+    <p:sldId id="267" r:id="rId19"/>
+    <p:sldId id="268" r:id="rId20"/>
+    <p:sldId id="269" r:id="rId21"/>
+    <p:sldId id="270" r:id="rId22"/>
+    <p:sldId id="271" r:id="rId23"/>
+    <p:sldId id="272" r:id="rId24"/>
+    <p:sldId id="273" r:id="rId25"/>
+    <p:sldId id="274" r:id="rId26"/>
+    <p:sldId id="275" r:id="rId27"/>
+    <p:sldId id="276" r:id="rId28"/>
+    <p:sldId id="277" r:id="rId29"/>
   </p:sldIdLst>
   <p:sldSz cx="12188952" cy="6858000" type="screen4x3"/>
   <p:notesSz cx="6858000" cy="9144000"/>
@@ -126,6 +126,1826 @@
     </a:lvl9pPr>
   </p:defaultTextStyle>
 </p:presentation>
+</file>
+
+<file path=ppt/notesMasters/notesMaster1.xml><?xml version="1.0" encoding="utf-8"?>
+<p:notesMaster xmlns:a="http://schemas.openxmlformats.org/drawingml/2006/main" xmlns:p="http://schemas.openxmlformats.org/presentationml/2006/main" xmlns:r="http://schemas.openxmlformats.org/officeDocument/2006/relationships">
+  <p:cSld>
+    <p:bg>
+      <p:bgRef idx="1001">
+        <a:schemeClr val="bg1"/>
+      </p:bgRef>
+    </p:bg>
+    <p:spTree>
+      <p:nvGrpSpPr>
+        <p:cNvPr id="1" name=""/>
+        <p:cNvGrpSpPr/>
+        <p:nvPr/>
+      </p:nvGrpSpPr>
+      <p:grpSpPr>
+        <a:xfrm>
+          <a:off x="0" y="0"/>
+          <a:ext cx="0" cy="0"/>
+          <a:chOff x="0" y="0"/>
+          <a:chExt cx="0" cy="0"/>
+        </a:xfrm>
+      </p:grpSpPr>
+      <p:sp>
+        <p:nvSpPr>
+          <p:cNvPr id="2" name="Header Placeholder 1"/>
+          <p:cNvSpPr>
+            <a:spLocks noGrp="1"/>
+          </p:cNvSpPr>
+          <p:nvPr>
+            <p:ph type="hdr" sz="quarter"/>
+          </p:nvPr>
+        </p:nvSpPr>
+        <p:spPr>
+          <a:xfrm>
+            <a:off x="0" y="0"/>
+            <a:ext cx="2971800" cy="457200"/>
+          </a:xfrm>
+          <a:prstGeom prst="rect">
+            <a:avLst/>
+          </a:prstGeom>
+        </p:spPr>
+        <p:txBody>
+          <a:bodyPr vert="horz" lIns="91440" tIns="45720" rIns="91440" bIns="45720" rtlCol="0"/>
+          <a:lstStyle>
+            <a:lvl1pPr algn="l">
+              <a:defRPr sz="1200"/>
+            </a:lvl1pPr>
+          </a:lstStyle>
+          <a:p>
+            <a:endParaRPr lang="en-US"/>
+          </a:p>
+        </p:txBody>
+      </p:sp>
+      <p:sp>
+        <p:nvSpPr>
+          <p:cNvPr id="3" name="Date Placeholder 2"/>
+          <p:cNvSpPr>
+            <a:spLocks noGrp="1"/>
+          </p:cNvSpPr>
+          <p:nvPr>
+            <p:ph type="dt" idx="1"/>
+          </p:nvPr>
+        </p:nvSpPr>
+        <p:spPr>
+          <a:xfrm>
+            <a:off x="3884613" y="0"/>
+            <a:ext cx="2971800" cy="457200"/>
+          </a:xfrm>
+          <a:prstGeom prst="rect">
+            <a:avLst/>
+          </a:prstGeom>
+        </p:spPr>
+        <p:txBody>
+          <a:bodyPr vert="horz" lIns="91440" tIns="45720" rIns="91440" bIns="45720" rtlCol="0"/>
+          <a:lstStyle>
+            <a:lvl1pPr algn="r">
+              <a:defRPr sz="1200"/>
+            </a:lvl1pPr>
+          </a:lstStyle>
+          <a:p>
+            <a:fld id="{0F89C1C7-3DCD-1040-A9CF-14679D8B5DDD}" type="datetimeFigureOut">
+              <a:rPr lang="en-US" smtClean="0"/>
+              <a:t>10/17/16</a:t>
+            </a:fld>
+            <a:endParaRPr lang="en-US"/>
+          </a:p>
+        </p:txBody>
+      </p:sp>
+      <p:sp>
+        <p:nvSpPr>
+          <p:cNvPr id="4" name="Slide Image Placeholder 3"/>
+          <p:cNvSpPr>
+            <a:spLocks noGrp="1" noRot="1" noChangeAspect="1"/>
+          </p:cNvSpPr>
+          <p:nvPr>
+            <p:ph type="sldImg" idx="2"/>
+          </p:nvPr>
+        </p:nvSpPr>
+        <p:spPr>
+          <a:xfrm>
+            <a:off x="1143000" y="685800"/>
+            <a:ext cx="4572000" cy="3429000"/>
+          </a:xfrm>
+          <a:prstGeom prst="rect">
+            <a:avLst/>
+          </a:prstGeom>
+          <a:noFill/>
+          <a:ln w="12700">
+            <a:solidFill>
+              <a:prstClr val="black"/>
+            </a:solidFill>
+          </a:ln>
+        </p:spPr>
+        <p:txBody>
+          <a:bodyPr vert="horz" lIns="91440" tIns="45720" rIns="91440" bIns="45720" rtlCol="0" anchor="ctr"/>
+          <a:lstStyle/>
+          <a:p>
+            <a:endParaRPr lang="en-US"/>
+          </a:p>
+        </p:txBody>
+      </p:sp>
+      <p:sp>
+        <p:nvSpPr>
+          <p:cNvPr id="5" name="Notes Placeholder 4"/>
+          <p:cNvSpPr>
+            <a:spLocks noGrp="1"/>
+          </p:cNvSpPr>
+          <p:nvPr>
+            <p:ph type="body" sz="quarter" idx="3"/>
+          </p:nvPr>
+        </p:nvSpPr>
+        <p:spPr>
+          <a:xfrm>
+            <a:off x="685800" y="4343400"/>
+            <a:ext cx="5486400" cy="4114800"/>
+          </a:xfrm>
+          <a:prstGeom prst="rect">
+            <a:avLst/>
+          </a:prstGeom>
+        </p:spPr>
+        <p:txBody>
+          <a:bodyPr vert="horz" lIns="91440" tIns="45720" rIns="91440" bIns="45720" rtlCol="0"/>
+          <a:lstStyle/>
+          <a:p>
+            <a:pPr lvl="0"/>
+            <a:r>
+              <a:rPr lang="en-US" smtClean="0"/>
+              <a:t>Click to edit Master text styles</a:t>
+            </a:r>
+          </a:p>
+          <a:p>
+            <a:pPr lvl="1"/>
+            <a:r>
+              <a:rPr lang="en-US" smtClean="0"/>
+              <a:t>Second level</a:t>
+            </a:r>
+          </a:p>
+          <a:p>
+            <a:pPr lvl="2"/>
+            <a:r>
+              <a:rPr lang="en-US" smtClean="0"/>
+              <a:t>Third level</a:t>
+            </a:r>
+          </a:p>
+          <a:p>
+            <a:pPr lvl="3"/>
+            <a:r>
+              <a:rPr lang="en-US" smtClean="0"/>
+              <a:t>Fourth level</a:t>
+            </a:r>
+          </a:p>
+          <a:p>
+            <a:pPr lvl="4"/>
+            <a:r>
+              <a:rPr lang="en-US" smtClean="0"/>
+              <a:t>Fifth level</a:t>
+            </a:r>
+            <a:endParaRPr lang="en-US"/>
+          </a:p>
+        </p:txBody>
+      </p:sp>
+      <p:sp>
+        <p:nvSpPr>
+          <p:cNvPr id="6" name="Footer Placeholder 5"/>
+          <p:cNvSpPr>
+            <a:spLocks noGrp="1"/>
+          </p:cNvSpPr>
+          <p:nvPr>
+            <p:ph type="ftr" sz="quarter" idx="4"/>
+          </p:nvPr>
+        </p:nvSpPr>
+        <p:spPr>
+          <a:xfrm>
+            <a:off x="0" y="8685213"/>
+            <a:ext cx="2971800" cy="457200"/>
+          </a:xfrm>
+          <a:prstGeom prst="rect">
+            <a:avLst/>
+          </a:prstGeom>
+        </p:spPr>
+        <p:txBody>
+          <a:bodyPr vert="horz" lIns="91440" tIns="45720" rIns="91440" bIns="45720" rtlCol="0" anchor="b"/>
+          <a:lstStyle>
+            <a:lvl1pPr algn="l">
+              <a:defRPr sz="1200"/>
+            </a:lvl1pPr>
+          </a:lstStyle>
+          <a:p>
+            <a:endParaRPr lang="en-US"/>
+          </a:p>
+        </p:txBody>
+      </p:sp>
+      <p:sp>
+        <p:nvSpPr>
+          <p:cNvPr id="7" name="Slide Number Placeholder 6"/>
+          <p:cNvSpPr>
+            <a:spLocks noGrp="1"/>
+          </p:cNvSpPr>
+          <p:nvPr>
+            <p:ph type="sldNum" sz="quarter" idx="5"/>
+          </p:nvPr>
+        </p:nvSpPr>
+        <p:spPr>
+          <a:xfrm>
+            <a:off x="3884613" y="8685213"/>
+            <a:ext cx="2971800" cy="457200"/>
+          </a:xfrm>
+          <a:prstGeom prst="rect">
+            <a:avLst/>
+          </a:prstGeom>
+        </p:spPr>
+        <p:txBody>
+          <a:bodyPr vert="horz" lIns="91440" tIns="45720" rIns="91440" bIns="45720" rtlCol="0" anchor="b"/>
+          <a:lstStyle>
+            <a:lvl1pPr algn="r">
+              <a:defRPr sz="1200"/>
+            </a:lvl1pPr>
+          </a:lstStyle>
+          <a:p>
+            <a:fld id="{BB5E49A5-4136-284D-997B-48E1D791AD67}" type="slidenum">
+              <a:rPr lang="en-US" smtClean="0"/>
+              <a:t>‹#›</a:t>
+            </a:fld>
+            <a:endParaRPr lang="en-US"/>
+          </a:p>
+        </p:txBody>
+      </p:sp>
+    </p:spTree>
+    <p:extLst>
+      <p:ext uri="{BB962C8B-B14F-4D97-AF65-F5344CB8AC3E}">
+        <p14:creationId xmlns:p14="http://schemas.microsoft.com/office/powerpoint/2010/main" val="2623252185"/>
+      </p:ext>
+    </p:extLst>
+  </p:cSld>
+  <p:clrMap bg1="lt1" tx1="dk1" bg2="lt2" tx2="dk2" accent1="accent1" accent2="accent2" accent3="accent3" accent4="accent4" accent5="accent5" accent6="accent6" hlink="hlink" folHlink="folHlink"/>
+  <p:notesStyle>
+    <a:lvl1pPr marL="0" algn="l" defTabSz="457200" rtl="0" eaLnBrk="1" latinLnBrk="0" hangingPunct="1">
+      <a:defRPr sz="1200" kern="1200">
+        <a:solidFill>
+          <a:schemeClr val="tx1"/>
+        </a:solidFill>
+        <a:latin typeface="+mn-lt"/>
+        <a:ea typeface="+mn-ea"/>
+        <a:cs typeface="+mn-cs"/>
+      </a:defRPr>
+    </a:lvl1pPr>
+    <a:lvl2pPr marL="457200" algn="l" defTabSz="457200" rtl="0" eaLnBrk="1" latinLnBrk="0" hangingPunct="1">
+      <a:defRPr sz="1200" kern="1200">
+        <a:solidFill>
+          <a:schemeClr val="tx1"/>
+        </a:solidFill>
+        <a:latin typeface="+mn-lt"/>
+        <a:ea typeface="+mn-ea"/>
+        <a:cs typeface="+mn-cs"/>
+      </a:defRPr>
+    </a:lvl2pPr>
+    <a:lvl3pPr marL="914400" algn="l" defTabSz="457200" rtl="0" eaLnBrk="1" latinLnBrk="0" hangingPunct="1">
+      <a:defRPr sz="1200" kern="1200">
+        <a:solidFill>
+          <a:schemeClr val="tx1"/>
+        </a:solidFill>
+        <a:latin typeface="+mn-lt"/>
+        <a:ea typeface="+mn-ea"/>
+        <a:cs typeface="+mn-cs"/>
+      </a:defRPr>
+    </a:lvl3pPr>
+    <a:lvl4pPr marL="1371600" algn="l" defTabSz="457200" rtl="0" eaLnBrk="1" latinLnBrk="0" hangingPunct="1">
+      <a:defRPr sz="1200" kern="1200">
+        <a:solidFill>
+          <a:schemeClr val="tx1"/>
+        </a:solidFill>
+        <a:latin typeface="+mn-lt"/>
+        <a:ea typeface="+mn-ea"/>
+        <a:cs typeface="+mn-cs"/>
+      </a:defRPr>
+    </a:lvl4pPr>
+    <a:lvl5pPr marL="1828800" algn="l" defTabSz="457200" rtl="0" eaLnBrk="1" latinLnBrk="0" hangingPunct="1">
+      <a:defRPr sz="1200" kern="1200">
+        <a:solidFill>
+          <a:schemeClr val="tx1"/>
+        </a:solidFill>
+        <a:latin typeface="+mn-lt"/>
+        <a:ea typeface="+mn-ea"/>
+        <a:cs typeface="+mn-cs"/>
+      </a:defRPr>
+    </a:lvl5pPr>
+    <a:lvl6pPr marL="2286000" algn="l" defTabSz="457200" rtl="0" eaLnBrk="1" latinLnBrk="0" hangingPunct="1">
+      <a:defRPr sz="1200" kern="1200">
+        <a:solidFill>
+          <a:schemeClr val="tx1"/>
+        </a:solidFill>
+        <a:latin typeface="+mn-lt"/>
+        <a:ea typeface="+mn-ea"/>
+        <a:cs typeface="+mn-cs"/>
+      </a:defRPr>
+    </a:lvl6pPr>
+    <a:lvl7pPr marL="2743200" algn="l" defTabSz="457200" rtl="0" eaLnBrk="1" latinLnBrk="0" hangingPunct="1">
+      <a:defRPr sz="1200" kern="1200">
+        <a:solidFill>
+          <a:schemeClr val="tx1"/>
+        </a:solidFill>
+        <a:latin typeface="+mn-lt"/>
+        <a:ea typeface="+mn-ea"/>
+        <a:cs typeface="+mn-cs"/>
+      </a:defRPr>
+    </a:lvl7pPr>
+    <a:lvl8pPr marL="3200400" algn="l" defTabSz="457200" rtl="0" eaLnBrk="1" latinLnBrk="0" hangingPunct="1">
+      <a:defRPr sz="1200" kern="1200">
+        <a:solidFill>
+          <a:schemeClr val="tx1"/>
+        </a:solidFill>
+        <a:latin typeface="+mn-lt"/>
+        <a:ea typeface="+mn-ea"/>
+        <a:cs typeface="+mn-cs"/>
+      </a:defRPr>
+    </a:lvl8pPr>
+    <a:lvl9pPr marL="3657600" algn="l" defTabSz="457200" rtl="0" eaLnBrk="1" latinLnBrk="0" hangingPunct="1">
+      <a:defRPr sz="1200" kern="1200">
+        <a:solidFill>
+          <a:schemeClr val="tx1"/>
+        </a:solidFill>
+        <a:latin typeface="+mn-lt"/>
+        <a:ea typeface="+mn-ea"/>
+        <a:cs typeface="+mn-cs"/>
+      </a:defRPr>
+    </a:lvl9pPr>
+  </p:notesStyle>
+</p:notesMaster>
+</file>
+
+<file path=ppt/notesSlides/notesSlide1.xml><?xml version="1.0" encoding="utf-8"?>
+<p:notes xmlns:a="http://schemas.openxmlformats.org/drawingml/2006/main" xmlns:p="http://schemas.openxmlformats.org/presentationml/2006/main" xmlns:r="http://schemas.openxmlformats.org/officeDocument/2006/relationships">
+  <p:cSld>
+    <p:spTree>
+      <p:nvGrpSpPr>
+        <p:cNvPr id="1" name=""/>
+        <p:cNvGrpSpPr/>
+        <p:nvPr/>
+      </p:nvGrpSpPr>
+      <p:grpSpPr>
+        <a:xfrm>
+          <a:off x="0" y="0"/>
+          <a:ext cx="0" cy="0"/>
+          <a:chOff x="0" y="0"/>
+          <a:chExt cx="0" cy="0"/>
+        </a:xfrm>
+      </p:grpSpPr>
+      <p:sp>
+        <p:nvSpPr>
+          <p:cNvPr id="2" name="Slide Image Placeholder 1"/>
+          <p:cNvSpPr>
+            <a:spLocks noGrp="1"/>
+          </p:cNvSpPr>
+          <p:nvPr>
+            <p:ph type="sldImg" idx="2"/>
+          </p:nvPr>
+        </p:nvSpPr>
+        <p:spPr/>
+      </p:sp>
+      <p:sp>
+        <p:nvSpPr>
+          <p:cNvPr id="3" name="Notes Placeholder 2"/>
+          <p:cNvSpPr>
+            <a:spLocks noGrp="1"/>
+          </p:cNvSpPr>
+          <p:nvPr>
+            <p:ph type="body" idx="3" sz="quarter"/>
+          </p:nvPr>
+        </p:nvSpPr>
+        <p:spPr/>
+        <p:txBody>
+          <a:bodyPr/>
+          <a:lstStyle/>
+          <a:p>
+            <a:r>
+              <a:t>Play flat, then expressive. Same bars, sine synthesis, so timing and dynamics carry the contrast. Not transcription: the score is known.</a:t>
+            </a:r>
+          </a:p>
+        </p:txBody>
+      </p:sp>
+      <p:sp>
+        <p:nvSpPr>
+          <p:cNvPr id="4" name="Slide Number Placeholder 3"/>
+          <p:cNvSpPr>
+            <a:spLocks noGrp="1"/>
+          </p:cNvSpPr>
+          <p:nvPr>
+            <p:ph type="sldNum" idx="5" sz="quarter"/>
+          </p:nvPr>
+        </p:nvSpPr>
+        <p:spPr/>
+      </p:sp>
+    </p:spTree>
+  </p:cSld>
+  <p:clrMapOvr>
+    <a:masterClrMapping/>
+  </p:clrMapOvr>
+</p:notes>
+</file>
+
+<file path=ppt/notesSlides/notesSlide10.xml><?xml version="1.0" encoding="utf-8"?>
+<p:notes xmlns:a="http://schemas.openxmlformats.org/drawingml/2006/main" xmlns:p="http://schemas.openxmlformats.org/presentationml/2006/main" xmlns:r="http://schemas.openxmlformats.org/officeDocument/2006/relationships">
+  <p:cSld>
+    <p:spTree>
+      <p:nvGrpSpPr>
+        <p:cNvPr id="1" name=""/>
+        <p:cNvGrpSpPr/>
+        <p:nvPr/>
+      </p:nvGrpSpPr>
+      <p:grpSpPr>
+        <a:xfrm>
+          <a:off x="0" y="0"/>
+          <a:ext cx="0" cy="0"/>
+          <a:chOff x="0" y="0"/>
+          <a:chExt cx="0" cy="0"/>
+        </a:xfrm>
+      </p:grpSpPr>
+      <p:sp>
+        <p:nvSpPr>
+          <p:cNvPr id="2" name="Slide Image Placeholder 1"/>
+          <p:cNvSpPr>
+            <a:spLocks noGrp="1"/>
+          </p:cNvSpPr>
+          <p:nvPr>
+            <p:ph type="sldImg" idx="2"/>
+          </p:nvPr>
+        </p:nvSpPr>
+        <p:spPr/>
+      </p:sp>
+      <p:sp>
+        <p:nvSpPr>
+          <p:cNvPr id="3" name="Notes Placeholder 2"/>
+          <p:cNvSpPr>
+            <a:spLocks noGrp="1"/>
+          </p:cNvSpPr>
+          <p:nvPr>
+            <p:ph type="body" idx="3" sz="quarter"/>
+          </p:nvPr>
+        </p:nvSpPr>
+        <p:spPr/>
+        <p:txBody>
+          <a:bodyPr/>
+          <a:lstStyle/>
+          <a:p>
+            <a:r>
+              <a:t>GT = corrected pYIN on isolated stems (46 ms / 10 ms), gross errors hand-fixed; hence 'quasi-truth'.</a:t>
+            </a:r>
+          </a:p>
+        </p:txBody>
+      </p:sp>
+      <p:sp>
+        <p:nvSpPr>
+          <p:cNvPr id="4" name="Slide Number Placeholder 3"/>
+          <p:cNvSpPr>
+            <a:spLocks noGrp="1"/>
+          </p:cNvSpPr>
+          <p:nvPr>
+            <p:ph type="sldNum" idx="5" sz="quarter"/>
+          </p:nvPr>
+        </p:nvSpPr>
+        <p:spPr/>
+      </p:sp>
+    </p:spTree>
+  </p:cSld>
+  <p:clrMapOvr>
+    <a:masterClrMapping/>
+  </p:clrMapOvr>
+</p:notes>
+</file>
+
+<file path=ppt/notesSlides/notesSlide11.xml><?xml version="1.0" encoding="utf-8"?>
+<p:notes xmlns:a="http://schemas.openxmlformats.org/drawingml/2006/main" xmlns:p="http://schemas.openxmlformats.org/presentationml/2006/main" xmlns:r="http://schemas.openxmlformats.org/officeDocument/2006/relationships">
+  <p:cSld>
+    <p:spTree>
+      <p:nvGrpSpPr>
+        <p:cNvPr id="1" name=""/>
+        <p:cNvGrpSpPr/>
+        <p:nvPr/>
+      </p:nvGrpSpPr>
+      <p:grpSpPr>
+        <a:xfrm>
+          <a:off x="0" y="0"/>
+          <a:ext cx="0" cy="0"/>
+          <a:chOff x="0" y="0"/>
+          <a:chExt cx="0" cy="0"/>
+        </a:xfrm>
+      </p:grpSpPr>
+      <p:sp>
+        <p:nvSpPr>
+          <p:cNvPr id="2" name="Slide Image Placeholder 1"/>
+          <p:cNvSpPr>
+            <a:spLocks noGrp="1"/>
+          </p:cNvSpPr>
+          <p:nvPr>
+            <p:ph type="sldImg" idx="2"/>
+          </p:nvPr>
+        </p:nvSpPr>
+        <p:spPr/>
+      </p:sp>
+      <p:sp>
+        <p:nvSpPr>
+          <p:cNvPr id="3" name="Notes Placeholder 2"/>
+          <p:cNvSpPr>
+            <a:spLocks noGrp="1"/>
+          </p:cNvSpPr>
+          <p:nvPr>
+            <p:ph type="body" idx="3" sz="quarter"/>
+          </p:nvPr>
+        </p:nvSpPr>
+        <p:spPr/>
+        <p:txBody>
+          <a:bodyPr/>
+          <a:lstStyle/>
+          <a:p>
+            <a:r>
+              <a:t>Logs: positive quantities, multiplicative errors.</a:t>
+            </a:r>
+          </a:p>
+        </p:txBody>
+      </p:sp>
+      <p:sp>
+        <p:nvSpPr>
+          <p:cNvPr id="4" name="Slide Number Placeholder 3"/>
+          <p:cNvSpPr>
+            <a:spLocks noGrp="1"/>
+          </p:cNvSpPr>
+          <p:nvPr>
+            <p:ph type="sldNum" idx="5" sz="quarter"/>
+          </p:nvPr>
+        </p:nvSpPr>
+        <p:spPr/>
+      </p:sp>
+    </p:spTree>
+  </p:cSld>
+  <p:clrMapOvr>
+    <a:masterClrMapping/>
+  </p:clrMapOvr>
+</p:notes>
+</file>
+
+<file path=ppt/notesSlides/notesSlide12.xml><?xml version="1.0" encoding="utf-8"?>
+<p:notes xmlns:a="http://schemas.openxmlformats.org/drawingml/2006/main" xmlns:p="http://schemas.openxmlformats.org/presentationml/2006/main" xmlns:r="http://schemas.openxmlformats.org/officeDocument/2006/relationships">
+  <p:cSld>
+    <p:spTree>
+      <p:nvGrpSpPr>
+        <p:cNvPr id="1" name=""/>
+        <p:cNvGrpSpPr/>
+        <p:nvPr/>
+      </p:nvGrpSpPr>
+      <p:grpSpPr>
+        <a:xfrm>
+          <a:off x="0" y="0"/>
+          <a:ext cx="0" cy="0"/>
+          <a:chOff x="0" y="0"/>
+          <a:chExt cx="0" cy="0"/>
+        </a:xfrm>
+      </p:grpSpPr>
+      <p:sp>
+        <p:nvSpPr>
+          <p:cNvPr id="2" name="Slide Image Placeholder 1"/>
+          <p:cNvSpPr>
+            <a:spLocks noGrp="1"/>
+          </p:cNvSpPr>
+          <p:nvPr>
+            <p:ph type="sldImg" idx="2"/>
+          </p:nvPr>
+        </p:nvSpPr>
+        <p:spPr/>
+      </p:sp>
+      <p:sp>
+        <p:nvSpPr>
+          <p:cNvPr id="3" name="Notes Placeholder 2"/>
+          <p:cNvSpPr>
+            <a:spLocks noGrp="1"/>
+          </p:cNvSpPr>
+          <p:nvPr>
+            <p:ph type="body" idx="3" sz="quarter"/>
+          </p:nvPr>
+        </p:nvSpPr>
+        <p:spPr/>
+        <p:txBody>
+          <a:bodyPr/>
+          <a:lstStyle/>
+          <a:p>
+            <a:r>
+              <a:t>Real development notes, no fits drawn.</a:t>
+            </a:r>
+          </a:p>
+        </p:txBody>
+      </p:sp>
+      <p:sp>
+        <p:nvSpPr>
+          <p:cNvPr id="4" name="Slide Number Placeholder 3"/>
+          <p:cNvSpPr>
+            <a:spLocks noGrp="1"/>
+          </p:cNvSpPr>
+          <p:nvPr>
+            <p:ph type="sldNum" idx="5" sz="quarter"/>
+          </p:nvPr>
+        </p:nvSpPr>
+        <p:spPr/>
+      </p:sp>
+    </p:spTree>
+  </p:cSld>
+  <p:clrMapOvr>
+    <a:masterClrMapping/>
+  </p:clrMapOvr>
+</p:notes>
+</file>
+
+<file path=ppt/notesSlides/notesSlide13.xml><?xml version="1.0" encoding="utf-8"?>
+<p:notes xmlns:a="http://schemas.openxmlformats.org/drawingml/2006/main" xmlns:p="http://schemas.openxmlformats.org/presentationml/2006/main" xmlns:r="http://schemas.openxmlformats.org/officeDocument/2006/relationships">
+  <p:cSld>
+    <p:spTree>
+      <p:nvGrpSpPr>
+        <p:cNvPr id="1" name=""/>
+        <p:cNvGrpSpPr/>
+        <p:nvPr/>
+      </p:nvGrpSpPr>
+      <p:grpSpPr>
+        <a:xfrm>
+          <a:off x="0" y="0"/>
+          <a:ext cx="0" cy="0"/>
+          <a:chOff x="0" y="0"/>
+          <a:chExt cx="0" cy="0"/>
+        </a:xfrm>
+      </p:grpSpPr>
+      <p:sp>
+        <p:nvSpPr>
+          <p:cNvPr id="2" name="Slide Image Placeholder 1"/>
+          <p:cNvSpPr>
+            <a:spLocks noGrp="1"/>
+          </p:cNvSpPr>
+          <p:nvPr>
+            <p:ph type="sldImg" idx="2"/>
+          </p:nvPr>
+        </p:nvSpPr>
+        <p:spPr/>
+      </p:sp>
+      <p:sp>
+        <p:nvSpPr>
+          <p:cNvPr id="3" name="Notes Placeholder 2"/>
+          <p:cNvSpPr>
+            <a:spLocks noGrp="1"/>
+          </p:cNvSpPr>
+          <p:nvPr>
+            <p:ph type="body" idx="3" sz="quarter"/>
+          </p:nvPr>
+        </p:nvSpPr>
+        <p:spPr/>
+        <p:txBody>
+          <a:bodyPr/>
+          <a:lstStyle/>
+          <a:p>
+            <a:r>
+              <a:t>Naming, say once: the kernel is a special case of the SM kernel; the method is ours (structure imposed). We also ran the SM method as intended on 9,804 notes: exact tie at curve level, vibrato band found unaided on 18%. The structure must be imposed and costs nothing.</a:t>
+            </a:r>
+          </a:p>
+        </p:txBody>
+      </p:sp>
+      <p:sp>
+        <p:nvSpPr>
+          <p:cNvPr id="4" name="Slide Number Placeholder 3"/>
+          <p:cNvSpPr>
+            <a:spLocks noGrp="1"/>
+          </p:cNvSpPr>
+          <p:nvPr>
+            <p:ph type="sldNum" idx="5" sz="quarter"/>
+          </p:nvPr>
+        </p:nvSpPr>
+        <p:spPr/>
+      </p:sp>
+    </p:spTree>
+  </p:cSld>
+  <p:clrMapOvr>
+    <a:masterClrMapping/>
+  </p:clrMapOvr>
+</p:notes>
+</file>
+
+<file path=ppt/notesSlides/notesSlide14.xml><?xml version="1.0" encoding="utf-8"?>
+<p:notes xmlns:a="http://schemas.openxmlformats.org/drawingml/2006/main" xmlns:p="http://schemas.openxmlformats.org/presentationml/2006/main" xmlns:r="http://schemas.openxmlformats.org/officeDocument/2006/relationships">
+  <p:cSld>
+    <p:spTree>
+      <p:nvGrpSpPr>
+        <p:cNvPr id="1" name=""/>
+        <p:cNvGrpSpPr/>
+        <p:nvPr/>
+      </p:nvGrpSpPr>
+      <p:grpSpPr>
+        <a:xfrm>
+          <a:off x="0" y="0"/>
+          <a:ext cx="0" cy="0"/>
+          <a:chOff x="0" y="0"/>
+          <a:chExt cx="0" cy="0"/>
+        </a:xfrm>
+      </p:grpSpPr>
+      <p:sp>
+        <p:nvSpPr>
+          <p:cNvPr id="2" name="Slide Image Placeholder 1"/>
+          <p:cNvSpPr>
+            <a:spLocks noGrp="1"/>
+          </p:cNvSpPr>
+          <p:nvPr>
+            <p:ph type="sldImg" idx="2"/>
+          </p:nvPr>
+        </p:nvSpPr>
+        <p:spPr/>
+      </p:sp>
+      <p:sp>
+        <p:nvSpPr>
+          <p:cNvPr id="3" name="Notes Placeholder 2"/>
+          <p:cNvSpPr>
+            <a:spLocks noGrp="1"/>
+          </p:cNvSpPr>
+          <p:nvPr>
+            <p:ph type="body" idx="3" sz="quarter"/>
+          </p:nvPr>
+        </p:nvSpPr>
+        <p:spPr/>
+        <p:txBody>
+          <a:bodyPr/>
+          <a:lstStyle/>
+          <a:p>
+            <a:r>
+              <a:t>The split IS the channel read-out.</a:t>
+            </a:r>
+          </a:p>
+        </p:txBody>
+      </p:sp>
+      <p:sp>
+        <p:nvSpPr>
+          <p:cNvPr id="4" name="Slide Number Placeholder 3"/>
+          <p:cNvSpPr>
+            <a:spLocks noGrp="1"/>
+          </p:cNvSpPr>
+          <p:nvPr>
+            <p:ph type="sldNum" idx="5" sz="quarter"/>
+          </p:nvPr>
+        </p:nvSpPr>
+        <p:spPr/>
+      </p:sp>
+    </p:spTree>
+  </p:cSld>
+  <p:clrMapOvr>
+    <a:masterClrMapping/>
+  </p:clrMapOvr>
+</p:notes>
+</file>
+
+<file path=ppt/notesSlides/notesSlide15.xml><?xml version="1.0" encoding="utf-8"?>
+<p:notes xmlns:a="http://schemas.openxmlformats.org/drawingml/2006/main" xmlns:p="http://schemas.openxmlformats.org/presentationml/2006/main" xmlns:r="http://schemas.openxmlformats.org/officeDocument/2006/relationships">
+  <p:cSld>
+    <p:spTree>
+      <p:nvGrpSpPr>
+        <p:cNvPr id="1" name=""/>
+        <p:cNvGrpSpPr/>
+        <p:nvPr/>
+      </p:nvGrpSpPr>
+      <p:grpSpPr>
+        <a:xfrm>
+          <a:off x="0" y="0"/>
+          <a:ext cx="0" cy="0"/>
+          <a:chOff x="0" y="0"/>
+          <a:chExt cx="0" cy="0"/>
+        </a:xfrm>
+      </p:grpSpPr>
+      <p:sp>
+        <p:nvSpPr>
+          <p:cNvPr id="2" name="Slide Image Placeholder 1"/>
+          <p:cNvSpPr>
+            <a:spLocks noGrp="1"/>
+          </p:cNvSpPr>
+          <p:nvPr>
+            <p:ph type="sldImg" idx="2"/>
+          </p:nvPr>
+        </p:nvSpPr>
+        <p:spPr/>
+      </p:sp>
+      <p:sp>
+        <p:nvSpPr>
+          <p:cNvPr id="3" name="Notes Placeholder 2"/>
+          <p:cNvSpPr>
+            <a:spLocks noGrp="1"/>
+          </p:cNvSpPr>
+          <p:nvPr>
+            <p:ph type="body" idx="3" sz="quarter"/>
+          </p:nvPr>
+        </p:nvSpPr>
+        <p:spPr/>
+        <p:txBody>
+          <a:bodyPr/>
+          <a:lstStyle/>
+          <a:p>
+            <a:r>
+              <a:t>Same prior as piano, unchanged.</a:t>
+            </a:r>
+          </a:p>
+        </p:txBody>
+      </p:sp>
+      <p:sp>
+        <p:nvSpPr>
+          <p:cNvPr id="4" name="Slide Number Placeholder 3"/>
+          <p:cNvSpPr>
+            <a:spLocks noGrp="1"/>
+          </p:cNvSpPr>
+          <p:nvPr>
+            <p:ph type="sldNum" idx="5" sz="quarter"/>
+          </p:nvPr>
+        </p:nvSpPr>
+        <p:spPr/>
+      </p:sp>
+    </p:spTree>
+  </p:cSld>
+  <p:clrMapOvr>
+    <a:masterClrMapping/>
+  </p:clrMapOvr>
+</p:notes>
+</file>
+
+<file path=ppt/notesSlides/notesSlide16.xml><?xml version="1.0" encoding="utf-8"?>
+<p:notes xmlns:a="http://schemas.openxmlformats.org/drawingml/2006/main" xmlns:p="http://schemas.openxmlformats.org/presentationml/2006/main" xmlns:r="http://schemas.openxmlformats.org/officeDocument/2006/relationships">
+  <p:cSld>
+    <p:spTree>
+      <p:nvGrpSpPr>
+        <p:cNvPr id="1" name=""/>
+        <p:cNvGrpSpPr/>
+        <p:nvPr/>
+      </p:nvGrpSpPr>
+      <p:grpSpPr>
+        <a:xfrm>
+          <a:off x="0" y="0"/>
+          <a:ext cx="0" cy="0"/>
+          <a:chOff x="0" y="0"/>
+          <a:chExt cx="0" cy="0"/>
+        </a:xfrm>
+      </p:grpSpPr>
+      <p:sp>
+        <p:nvSpPr>
+          <p:cNvPr id="2" name="Slide Image Placeholder 1"/>
+          <p:cNvSpPr>
+            <a:spLocks noGrp="1"/>
+          </p:cNvSpPr>
+          <p:nvPr>
+            <p:ph type="sldImg" idx="2"/>
+          </p:nvPr>
+        </p:nvSpPr>
+        <p:spPr/>
+      </p:sp>
+      <p:sp>
+        <p:nvSpPr>
+          <p:cNvPr id="3" name="Notes Placeholder 2"/>
+          <p:cNvSpPr>
+            <a:spLocks noGrp="1"/>
+          </p:cNvSpPr>
+          <p:nvPr>
+            <p:ph type="body" idx="3" sz="quarter"/>
+          </p:nvPr>
+        </p:nvSpPr>
+        <p:spPr/>
+        <p:txBody>
+          <a:bodyPr/>
+          <a:lstStyle/>
+          <a:p>
+            <a:r>
+              <a:t>x: audio samples; z: pitch deviations; a: amplitudes, never estimated.</a:t>
+            </a:r>
+          </a:p>
+        </p:txBody>
+      </p:sp>
+      <p:sp>
+        <p:nvSpPr>
+          <p:cNvPr id="4" name="Slide Number Placeholder 3"/>
+          <p:cNvSpPr>
+            <a:spLocks noGrp="1"/>
+          </p:cNvSpPr>
+          <p:nvPr>
+            <p:ph type="sldNum" idx="5" sz="quarter"/>
+          </p:nvPr>
+        </p:nvSpPr>
+        <p:spPr/>
+      </p:sp>
+    </p:spTree>
+  </p:cSld>
+  <p:clrMapOvr>
+    <a:masterClrMapping/>
+  </p:clrMapOvr>
+</p:notes>
+</file>
+
+<file path=ppt/notesSlides/notesSlide17.xml><?xml version="1.0" encoding="utf-8"?>
+<p:notes xmlns:a="http://schemas.openxmlformats.org/drawingml/2006/main" xmlns:p="http://schemas.openxmlformats.org/presentationml/2006/main" xmlns:r="http://schemas.openxmlformats.org/officeDocument/2006/relationships">
+  <p:cSld>
+    <p:spTree>
+      <p:nvGrpSpPr>
+        <p:cNvPr id="1" name=""/>
+        <p:cNvGrpSpPr/>
+        <p:nvPr/>
+      </p:nvGrpSpPr>
+      <p:grpSpPr>
+        <a:xfrm>
+          <a:off x="0" y="0"/>
+          <a:ext cx="0" cy="0"/>
+          <a:chOff x="0" y="0"/>
+          <a:chExt cx="0" cy="0"/>
+        </a:xfrm>
+      </p:grpSpPr>
+      <p:sp>
+        <p:nvSpPr>
+          <p:cNvPr id="2" name="Slide Image Placeholder 1"/>
+          <p:cNvSpPr>
+            <a:spLocks noGrp="1"/>
+          </p:cNvSpPr>
+          <p:nvPr>
+            <p:ph type="sldImg" idx="2"/>
+          </p:nvPr>
+        </p:nvSpPr>
+        <p:spPr/>
+      </p:sp>
+      <p:sp>
+        <p:nvSpPr>
+          <p:cNvPr id="3" name="Notes Placeholder 2"/>
+          <p:cNvSpPr>
+            <a:spLocks noGrp="1"/>
+          </p:cNvSpPr>
+          <p:nvPr>
+            <p:ph type="body" idx="3" sz="quarter"/>
+          </p:nvPr>
+        </p:nvSpPr>
+        <p:spPr/>
+        <p:txBody>
+          <a:bodyPr/>
+          <a:lstStyle/>
+          <a:p>
+            <a:r>
+              <a:t>Do not cut. Violin 2.5 vs pYIN 3.4 cents, clarinet 1.0 vs 4.6, cello 4.8 vs 2.7 (the miss, say it plainly). Knots must beat Nyquist for 5-6 Hz vibrato: 16 knots/s.</a:t>
+            </a:r>
+          </a:p>
+        </p:txBody>
+      </p:sp>
+      <p:sp>
+        <p:nvSpPr>
+          <p:cNvPr id="4" name="Slide Number Placeholder 3"/>
+          <p:cNvSpPr>
+            <a:spLocks noGrp="1"/>
+          </p:cNvSpPr>
+          <p:nvPr>
+            <p:ph type="sldNum" idx="5" sz="quarter"/>
+          </p:nvPr>
+        </p:nvSpPr>
+        <p:spPr/>
+      </p:sp>
+    </p:spTree>
+  </p:cSld>
+  <p:clrMapOvr>
+    <a:masterClrMapping/>
+  </p:clrMapOvr>
+</p:notes>
+</file>
+
+<file path=ppt/notesSlides/notesSlide18.xml><?xml version="1.0" encoding="utf-8"?>
+<p:notes xmlns:a="http://schemas.openxmlformats.org/drawingml/2006/main" xmlns:p="http://schemas.openxmlformats.org/presentationml/2006/main" xmlns:r="http://schemas.openxmlformats.org/officeDocument/2006/relationships">
+  <p:cSld>
+    <p:spTree>
+      <p:nvGrpSpPr>
+        <p:cNvPr id="1" name=""/>
+        <p:cNvGrpSpPr/>
+        <p:nvPr/>
+      </p:nvGrpSpPr>
+      <p:grpSpPr>
+        <a:xfrm>
+          <a:off x="0" y="0"/>
+          <a:ext cx="0" cy="0"/>
+          <a:chOff x="0" y="0"/>
+          <a:chExt cx="0" cy="0"/>
+        </a:xfrm>
+      </p:grpSpPr>
+      <p:sp>
+        <p:nvSpPr>
+          <p:cNvPr id="2" name="Slide Image Placeholder 1"/>
+          <p:cNvSpPr>
+            <a:spLocks noGrp="1"/>
+          </p:cNvSpPr>
+          <p:nvPr>
+            <p:ph type="sldImg" idx="2"/>
+          </p:nvPr>
+        </p:nvSpPr>
+        <p:spPr/>
+      </p:sp>
+      <p:sp>
+        <p:nvSpPr>
+          <p:cNvPr id="3" name="Notes Placeholder 2"/>
+          <p:cNvSpPr>
+            <a:spLocks noGrp="1"/>
+          </p:cNvSpPr>
+          <p:nvPr>
+            <p:ph type="body" idx="3" sz="quarter"/>
+          </p:nvPr>
+        </p:nvSpPr>
+        <p:spPr/>
+        <p:txBody>
+          <a:bodyPr/>
+          <a:lstStyle/>
+          <a:p>
+            <a:r>
+              <a:t>Say 'correlated timing noise across notes', never bare 'AR(1)'.</a:t>
+            </a:r>
+          </a:p>
+        </p:txBody>
+      </p:sp>
+      <p:sp>
+        <p:nvSpPr>
+          <p:cNvPr id="4" name="Slide Number Placeholder 3"/>
+          <p:cNvSpPr>
+            <a:spLocks noGrp="1"/>
+          </p:cNvSpPr>
+          <p:nvPr>
+            <p:ph type="sldNum" idx="5" sz="quarter"/>
+          </p:nvPr>
+        </p:nvSpPr>
+        <p:spPr/>
+      </p:sp>
+    </p:spTree>
+  </p:cSld>
+  <p:clrMapOvr>
+    <a:masterClrMapping/>
+  </p:clrMapOvr>
+</p:notes>
+</file>
+
+<file path=ppt/notesSlides/notesSlide19.xml><?xml version="1.0" encoding="utf-8"?>
+<p:notes xmlns:a="http://schemas.openxmlformats.org/drawingml/2006/main" xmlns:p="http://schemas.openxmlformats.org/presentationml/2006/main" xmlns:r="http://schemas.openxmlformats.org/officeDocument/2006/relationships">
+  <p:cSld>
+    <p:spTree>
+      <p:nvGrpSpPr>
+        <p:cNvPr id="1" name=""/>
+        <p:cNvGrpSpPr/>
+        <p:nvPr/>
+      </p:nvGrpSpPr>
+      <p:grpSpPr>
+        <a:xfrm>
+          <a:off x="0" y="0"/>
+          <a:ext cx="0" cy="0"/>
+          <a:chOff x="0" y="0"/>
+          <a:chExt cx="0" cy="0"/>
+        </a:xfrm>
+      </p:grpSpPr>
+      <p:sp>
+        <p:nvSpPr>
+          <p:cNvPr id="2" name="Slide Image Placeholder 1"/>
+          <p:cNvSpPr>
+            <a:spLocks noGrp="1"/>
+          </p:cNvSpPr>
+          <p:nvPr>
+            <p:ph type="sldImg" idx="2"/>
+          </p:nvPr>
+        </p:nvSpPr>
+        <p:spPr/>
+      </p:sp>
+      <p:sp>
+        <p:nvSpPr>
+          <p:cNvPr id="3" name="Notes Placeholder 2"/>
+          <p:cNvSpPr>
+            <a:spLocks noGrp="1"/>
+          </p:cNvSpPr>
+          <p:nvPr>
+            <p:ph type="body" idx="3" sz="quarter"/>
+          </p:nvPr>
+        </p:nvSpPr>
+        <p:spPr/>
+        <p:txBody>
+          <a:bodyPr/>
+          <a:lstStyle/>
+          <a:p>
+            <a:r>
+              <a:t>A neighbour's warp error predicts yours; the correlated row lets the model subtract it.</a:t>
+            </a:r>
+          </a:p>
+        </p:txBody>
+      </p:sp>
+      <p:sp>
+        <p:nvSpPr>
+          <p:cNvPr id="4" name="Slide Number Placeholder 3"/>
+          <p:cNvSpPr>
+            <a:spLocks noGrp="1"/>
+          </p:cNvSpPr>
+          <p:nvPr>
+            <p:ph type="sldNum" idx="5" sz="quarter"/>
+          </p:nvPr>
+        </p:nvSpPr>
+        <p:spPr/>
+      </p:sp>
+    </p:spTree>
+  </p:cSld>
+  <p:clrMapOvr>
+    <a:masterClrMapping/>
+  </p:clrMapOvr>
+</p:notes>
+</file>
+
+<file path=ppt/notesSlides/notesSlide2.xml><?xml version="1.0" encoding="utf-8"?>
+<p:notes xmlns:a="http://schemas.openxmlformats.org/drawingml/2006/main" xmlns:p="http://schemas.openxmlformats.org/presentationml/2006/main" xmlns:r="http://schemas.openxmlformats.org/officeDocument/2006/relationships">
+  <p:cSld>
+    <p:spTree>
+      <p:nvGrpSpPr>
+        <p:cNvPr id="1" name=""/>
+        <p:cNvGrpSpPr/>
+        <p:nvPr/>
+      </p:nvGrpSpPr>
+      <p:grpSpPr>
+        <a:xfrm>
+          <a:off x="0" y="0"/>
+          <a:ext cx="0" cy="0"/>
+          <a:chOff x="0" y="0"/>
+          <a:chExt cx="0" cy="0"/>
+        </a:xfrm>
+      </p:grpSpPr>
+      <p:sp>
+        <p:nvSpPr>
+          <p:cNvPr id="2" name="Slide Image Placeholder 1"/>
+          <p:cNvSpPr>
+            <a:spLocks noGrp="1"/>
+          </p:cNvSpPr>
+          <p:nvPr>
+            <p:ph type="sldImg" idx="2"/>
+          </p:nvPr>
+        </p:nvSpPr>
+        <p:spPr/>
+      </p:sp>
+      <p:sp>
+        <p:nvSpPr>
+          <p:cNvPr id="3" name="Notes Placeholder 2"/>
+          <p:cNvSpPr>
+            <a:spLocks noGrp="1"/>
+          </p:cNvSpPr>
+          <p:nvPr>
+            <p:ph type="body" idx="3" sz="quarter"/>
+          </p:nvPr>
+        </p:nvSpPr>
+        <p:spPr/>
+        <p:txBody>
+          <a:bodyPr/>
+          <a:lstStyle/>
+          <a:p>
+            <a:r>
+              <a:t>Say the thesis sentence verbatim. One problem per phase; every later slide answers one of the three.</a:t>
+            </a:r>
+          </a:p>
+        </p:txBody>
+      </p:sp>
+      <p:sp>
+        <p:nvSpPr>
+          <p:cNvPr id="4" name="Slide Number Placeholder 3"/>
+          <p:cNvSpPr>
+            <a:spLocks noGrp="1"/>
+          </p:cNvSpPr>
+          <p:nvPr>
+            <p:ph type="sldNum" idx="5" sz="quarter"/>
+          </p:nvPr>
+        </p:nvSpPr>
+        <p:spPr/>
+      </p:sp>
+    </p:spTree>
+  </p:cSld>
+  <p:clrMapOvr>
+    <a:masterClrMapping/>
+  </p:clrMapOvr>
+</p:notes>
+</file>
+
+<file path=ppt/notesSlides/notesSlide20.xml><?xml version="1.0" encoding="utf-8"?>
+<p:notes xmlns:a="http://schemas.openxmlformats.org/drawingml/2006/main" xmlns:p="http://schemas.openxmlformats.org/presentationml/2006/main" xmlns:r="http://schemas.openxmlformats.org/officeDocument/2006/relationships">
+  <p:cSld>
+    <p:spTree>
+      <p:nvGrpSpPr>
+        <p:cNvPr id="1" name=""/>
+        <p:cNvGrpSpPr/>
+        <p:nvPr/>
+      </p:nvGrpSpPr>
+      <p:grpSpPr>
+        <a:xfrm>
+          <a:off x="0" y="0"/>
+          <a:ext cx="0" cy="0"/>
+          <a:chOff x="0" y="0"/>
+          <a:chExt cx="0" cy="0"/>
+        </a:xfrm>
+      </p:grpSpPr>
+      <p:sp>
+        <p:nvSpPr>
+          <p:cNvPr id="2" name="Slide Image Placeholder 1"/>
+          <p:cNvSpPr>
+            <a:spLocks noGrp="1"/>
+          </p:cNvSpPr>
+          <p:nvPr>
+            <p:ph type="sldImg" idx="2"/>
+          </p:nvPr>
+        </p:nvSpPr>
+        <p:spPr/>
+      </p:sp>
+      <p:sp>
+        <p:nvSpPr>
+          <p:cNvPr id="3" name="Notes Placeholder 2"/>
+          <p:cNvSpPr>
+            <a:spLocks noGrp="1"/>
+          </p:cNvSpPr>
+          <p:nvPr>
+            <p:ph type="body" idx="3" sz="quarter"/>
+          </p:nvPr>
+        </p:nvSpPr>
+        <p:spPr/>
+        <p:txBody>
+          <a:bodyPr/>
+          <a:lstStyle/>
+          <a:p>
+            <a:r>
+              <a:t>Sequencing, not dates; gated by the open questions.</a:t>
+            </a:r>
+          </a:p>
+        </p:txBody>
+      </p:sp>
+      <p:sp>
+        <p:nvSpPr>
+          <p:cNvPr id="4" name="Slide Number Placeholder 3"/>
+          <p:cNvSpPr>
+            <a:spLocks noGrp="1"/>
+          </p:cNvSpPr>
+          <p:nvPr>
+            <p:ph type="sldNum" idx="5" sz="quarter"/>
+          </p:nvPr>
+        </p:nvSpPr>
+        <p:spPr/>
+      </p:sp>
+    </p:spTree>
+  </p:cSld>
+  <p:clrMapOvr>
+    <a:masterClrMapping/>
+  </p:clrMapOvr>
+</p:notes>
+</file>
+
+<file path=ppt/notesSlides/notesSlide21.xml><?xml version="1.0" encoding="utf-8"?>
+<p:notes xmlns:a="http://schemas.openxmlformats.org/drawingml/2006/main" xmlns:p="http://schemas.openxmlformats.org/presentationml/2006/main" xmlns:r="http://schemas.openxmlformats.org/officeDocument/2006/relationships">
+  <p:cSld>
+    <p:spTree>
+      <p:nvGrpSpPr>
+        <p:cNvPr id="1" name=""/>
+        <p:cNvGrpSpPr/>
+        <p:nvPr/>
+      </p:nvGrpSpPr>
+      <p:grpSpPr>
+        <a:xfrm>
+          <a:off x="0" y="0"/>
+          <a:ext cx="0" cy="0"/>
+          <a:chOff x="0" y="0"/>
+          <a:chExt cx="0" cy="0"/>
+        </a:xfrm>
+      </p:grpSpPr>
+      <p:sp>
+        <p:nvSpPr>
+          <p:cNvPr id="2" name="Slide Image Placeholder 1"/>
+          <p:cNvSpPr>
+            <a:spLocks noGrp="1"/>
+          </p:cNvSpPr>
+          <p:nvPr>
+            <p:ph type="sldImg" idx="2"/>
+          </p:nvPr>
+        </p:nvSpPr>
+        <p:spPr/>
+      </p:sp>
+      <p:sp>
+        <p:nvSpPr>
+          <p:cNvPr id="3" name="Notes Placeholder 2"/>
+          <p:cNvSpPr>
+            <a:spLocks noGrp="1"/>
+          </p:cNvSpPr>
+          <p:nvPr>
+            <p:ph type="body" idx="3" sz="quarter"/>
+          </p:nvPr>
+        </p:nvSpPr>
+        <p:spPr/>
+        <p:txBody>
+          <a:bodyPr/>
+          <a:lstStyle/>
+          <a:p>
+            <a:r>
+              <a:t>End here; invite discussion.</a:t>
+            </a:r>
+          </a:p>
+        </p:txBody>
+      </p:sp>
+      <p:sp>
+        <p:nvSpPr>
+          <p:cNvPr id="4" name="Slide Number Placeholder 3"/>
+          <p:cNvSpPr>
+            <a:spLocks noGrp="1"/>
+          </p:cNvSpPr>
+          <p:nvPr>
+            <p:ph type="sldNum" idx="5" sz="quarter"/>
+          </p:nvPr>
+        </p:nvSpPr>
+        <p:spPr/>
+      </p:sp>
+    </p:spTree>
+  </p:cSld>
+  <p:clrMapOvr>
+    <a:masterClrMapping/>
+  </p:clrMapOvr>
+</p:notes>
+</file>
+
+<file path=ppt/notesSlides/notesSlide3.xml><?xml version="1.0" encoding="utf-8"?>
+<p:notes xmlns:a="http://schemas.openxmlformats.org/drawingml/2006/main" xmlns:p="http://schemas.openxmlformats.org/presentationml/2006/main" xmlns:r="http://schemas.openxmlformats.org/officeDocument/2006/relationships">
+  <p:cSld>
+    <p:spTree>
+      <p:nvGrpSpPr>
+        <p:cNvPr id="1" name=""/>
+        <p:cNvGrpSpPr/>
+        <p:nvPr/>
+      </p:nvGrpSpPr>
+      <p:grpSpPr>
+        <a:xfrm>
+          <a:off x="0" y="0"/>
+          <a:ext cx="0" cy="0"/>
+          <a:chOff x="0" y="0"/>
+          <a:chExt cx="0" cy="0"/>
+        </a:xfrm>
+      </p:grpSpPr>
+      <p:sp>
+        <p:nvSpPr>
+          <p:cNvPr id="2" name="Slide Image Placeholder 1"/>
+          <p:cNvSpPr>
+            <a:spLocks noGrp="1"/>
+          </p:cNvSpPr>
+          <p:nvPr>
+            <p:ph type="sldImg" idx="2"/>
+          </p:nvPr>
+        </p:nvSpPr>
+        <p:spPr/>
+      </p:sp>
+      <p:sp>
+        <p:nvSpPr>
+          <p:cNvPr id="3" name="Notes Placeholder 2"/>
+          <p:cNvSpPr>
+            <a:spLocks noGrp="1"/>
+          </p:cNvSpPr>
+          <p:nvPr>
+            <p:ph type="body" idx="3" sz="quarter"/>
+          </p:nvPr>
+        </p:nvSpPr>
+        <p:spPr/>
+        <p:txBody>
+          <a:bodyPr/>
+          <a:lstStyle/>
+          <a:p>
+            <a:r>
+              <a:t>The shared prior with three swappable likelihood blocks; badges show status.</a:t>
+            </a:r>
+          </a:p>
+        </p:txBody>
+      </p:sp>
+      <p:sp>
+        <p:nvSpPr>
+          <p:cNvPr id="4" name="Slide Number Placeholder 3"/>
+          <p:cNvSpPr>
+            <a:spLocks noGrp="1"/>
+          </p:cNvSpPr>
+          <p:nvPr>
+            <p:ph type="sldNum" idx="5" sz="quarter"/>
+          </p:nvPr>
+        </p:nvSpPr>
+        <p:spPr/>
+      </p:sp>
+    </p:spTree>
+  </p:cSld>
+  <p:clrMapOvr>
+    <a:masterClrMapping/>
+  </p:clrMapOvr>
+</p:notes>
+</file>
+
+<file path=ppt/notesSlides/notesSlide4.xml><?xml version="1.0" encoding="utf-8"?>
+<p:notes xmlns:a="http://schemas.openxmlformats.org/drawingml/2006/main" xmlns:p="http://schemas.openxmlformats.org/presentationml/2006/main" xmlns:r="http://schemas.openxmlformats.org/officeDocument/2006/relationships">
+  <p:cSld>
+    <p:spTree>
+      <p:nvGrpSpPr>
+        <p:cNvPr id="1" name=""/>
+        <p:cNvGrpSpPr/>
+        <p:nvPr/>
+      </p:nvGrpSpPr>
+      <p:grpSpPr>
+        <a:xfrm>
+          <a:off x="0" y="0"/>
+          <a:ext cx="0" cy="0"/>
+          <a:chOff x="0" y="0"/>
+          <a:chExt cx="0" cy="0"/>
+        </a:xfrm>
+      </p:grpSpPr>
+      <p:sp>
+        <p:nvSpPr>
+          <p:cNvPr id="2" name="Slide Image Placeholder 1"/>
+          <p:cNvSpPr>
+            <a:spLocks noGrp="1"/>
+          </p:cNvSpPr>
+          <p:nvPr>
+            <p:ph type="sldImg" idx="2"/>
+          </p:nvPr>
+        </p:nvSpPr>
+        <p:spPr/>
+      </p:sp>
+      <p:sp>
+        <p:nvSpPr>
+          <p:cNvPr id="3" name="Notes Placeholder 2"/>
+          <p:cNvSpPr>
+            <a:spLocks noGrp="1"/>
+          </p:cNvSpPr>
+          <p:nvPr>
+            <p:ph type="body" idx="3" sz="quarter"/>
+          </p:nvPr>
+        </p:nvSpPr>
+        <p:spPr/>
+        <p:txBody>
+          <a:bodyPr/>
+          <a:lstStyle/>
+          <a:p>
+            <a:r>
+              <a:t>L_G is the graph Laplacian; it carries the score geometry.</a:t>
+            </a:r>
+          </a:p>
+        </p:txBody>
+      </p:sp>
+      <p:sp>
+        <p:nvSpPr>
+          <p:cNvPr id="4" name="Slide Number Placeholder 3"/>
+          <p:cNvSpPr>
+            <a:spLocks noGrp="1"/>
+          </p:cNvSpPr>
+          <p:nvPr>
+            <p:ph type="sldNum" idx="5" sz="quarter"/>
+          </p:nvPr>
+        </p:nvSpPr>
+        <p:spPr/>
+      </p:sp>
+    </p:spTree>
+  </p:cSld>
+  <p:clrMapOvr>
+    <a:masterClrMapping/>
+  </p:clrMapOvr>
+</p:notes>
+</file>
+
+<file path=ppt/notesSlides/notesSlide5.xml><?xml version="1.0" encoding="utf-8"?>
+<p:notes xmlns:a="http://schemas.openxmlformats.org/drawingml/2006/main" xmlns:p="http://schemas.openxmlformats.org/presentationml/2006/main" xmlns:r="http://schemas.openxmlformats.org/officeDocument/2006/relationships">
+  <p:cSld>
+    <p:spTree>
+      <p:nvGrpSpPr>
+        <p:cNvPr id="1" name=""/>
+        <p:cNvGrpSpPr/>
+        <p:nvPr/>
+      </p:nvGrpSpPr>
+      <p:grpSpPr>
+        <a:xfrm>
+          <a:off x="0" y="0"/>
+          <a:ext cx="0" cy="0"/>
+          <a:chOff x="0" y="0"/>
+          <a:chExt cx="0" cy="0"/>
+        </a:xfrm>
+      </p:grpSpPr>
+      <p:sp>
+        <p:nvSpPr>
+          <p:cNvPr id="2" name="Slide Image Placeholder 1"/>
+          <p:cNvSpPr>
+            <a:spLocks noGrp="1"/>
+          </p:cNvSpPr>
+          <p:nvPr>
+            <p:ph type="sldImg" idx="2"/>
+          </p:nvPr>
+        </p:nvSpPr>
+        <p:spPr/>
+      </p:sp>
+      <p:sp>
+        <p:nvSpPr>
+          <p:cNvPr id="3" name="Notes Placeholder 2"/>
+          <p:cNvSpPr>
+            <a:spLocks noGrp="1"/>
+          </p:cNvSpPr>
+          <p:nvPr>
+            <p:ph type="body" idx="3" sz="quarter"/>
+          </p:nvPr>
+        </p:nvSpPr>
+        <p:spPr/>
+        <p:txBody>
+          <a:bodyPr/>
+          <a:lstStyle/>
+          <a:p>
+            <a:r>
+              <a:t>U, nu: eigenvectors/values of the Laplacian. B is learned per piece.</a:t>
+            </a:r>
+          </a:p>
+        </p:txBody>
+      </p:sp>
+      <p:sp>
+        <p:nvSpPr>
+          <p:cNvPr id="4" name="Slide Number Placeholder 3"/>
+          <p:cNvSpPr>
+            <a:spLocks noGrp="1"/>
+          </p:cNvSpPr>
+          <p:nvPr>
+            <p:ph type="sldNum" idx="5" sz="quarter"/>
+          </p:nvPr>
+        </p:nvSpPr>
+        <p:spPr/>
+      </p:sp>
+    </p:spTree>
+  </p:cSld>
+  <p:clrMapOvr>
+    <a:masterClrMapping/>
+  </p:clrMapOvr>
+</p:notes>
+</file>
+
+<file path=ppt/notesSlides/notesSlide6.xml><?xml version="1.0" encoding="utf-8"?>
+<p:notes xmlns:a="http://schemas.openxmlformats.org/drawingml/2006/main" xmlns:p="http://schemas.openxmlformats.org/presentationml/2006/main" xmlns:r="http://schemas.openxmlformats.org/officeDocument/2006/relationships">
+  <p:cSld>
+    <p:spTree>
+      <p:nvGrpSpPr>
+        <p:cNvPr id="1" name=""/>
+        <p:cNvGrpSpPr/>
+        <p:nvPr/>
+      </p:nvGrpSpPr>
+      <p:grpSpPr>
+        <a:xfrm>
+          <a:off x="0" y="0"/>
+          <a:ext cx="0" cy="0"/>
+          <a:chOff x="0" y="0"/>
+          <a:chExt cx="0" cy="0"/>
+        </a:xfrm>
+      </p:grpSpPr>
+      <p:sp>
+        <p:nvSpPr>
+          <p:cNvPr id="2" name="Slide Image Placeholder 1"/>
+          <p:cNvSpPr>
+            <a:spLocks noGrp="1"/>
+          </p:cNvSpPr>
+          <p:nvPr>
+            <p:ph type="sldImg" idx="2"/>
+          </p:nvPr>
+        </p:nvSpPr>
+        <p:spPr/>
+      </p:sp>
+      <p:sp>
+        <p:nvSpPr>
+          <p:cNvPr id="3" name="Notes Placeholder 2"/>
+          <p:cNvSpPr>
+            <a:spLocks noGrp="1"/>
+          </p:cNvSpPr>
+          <p:nvPr>
+            <p:ph type="body" idx="3" sz="quarter"/>
+          </p:nvPr>
+        </p:nvSpPr>
+        <p:spPr/>
+        <p:txBody>
+          <a:bodyPr/>
+          <a:lstStyle/>
+          <a:p>
+            <a:r>
+              <a:t>X_f: per-note features (score descriptors, music-model embeddings). Baselines are exact special cases.</a:t>
+            </a:r>
+          </a:p>
+        </p:txBody>
+      </p:sp>
+      <p:sp>
+        <p:nvSpPr>
+          <p:cNvPr id="4" name="Slide Number Placeholder 3"/>
+          <p:cNvSpPr>
+            <a:spLocks noGrp="1"/>
+          </p:cNvSpPr>
+          <p:nvPr>
+            <p:ph type="sldNum" idx="5" sz="quarter"/>
+          </p:nvPr>
+        </p:nvSpPr>
+        <p:spPr/>
+      </p:sp>
+    </p:spTree>
+  </p:cSld>
+  <p:clrMapOvr>
+    <a:masterClrMapping/>
+  </p:clrMapOvr>
+</p:notes>
+</file>
+
+<file path=ppt/notesSlides/notesSlide7.xml><?xml version="1.0" encoding="utf-8"?>
+<p:notes xmlns:a="http://schemas.openxmlformats.org/drawingml/2006/main" xmlns:p="http://schemas.openxmlformats.org/presentationml/2006/main" xmlns:r="http://schemas.openxmlformats.org/officeDocument/2006/relationships">
+  <p:cSld>
+    <p:spTree>
+      <p:nvGrpSpPr>
+        <p:cNvPr id="1" name=""/>
+        <p:cNvGrpSpPr/>
+        <p:nvPr/>
+      </p:nvGrpSpPr>
+      <p:grpSpPr>
+        <a:xfrm>
+          <a:off x="0" y="0"/>
+          <a:ext cx="0" cy="0"/>
+          <a:chOff x="0" y="0"/>
+          <a:chExt cx="0" cy="0"/>
+        </a:xfrm>
+      </p:grpSpPr>
+      <p:sp>
+        <p:nvSpPr>
+          <p:cNvPr id="2" name="Slide Image Placeholder 1"/>
+          <p:cNvSpPr>
+            <a:spLocks noGrp="1"/>
+          </p:cNvSpPr>
+          <p:nvPr>
+            <p:ph type="sldImg" idx="2"/>
+          </p:nvPr>
+        </p:nvSpPr>
+        <p:spPr/>
+      </p:sp>
+      <p:sp>
+        <p:nvSpPr>
+          <p:cNvPr id="3" name="Notes Placeholder 2"/>
+          <p:cNvSpPr>
+            <a:spLocks noGrp="1"/>
+          </p:cNvSpPr>
+          <p:nvPr>
+            <p:ph type="body" idx="3" sz="quarter"/>
+          </p:nvPr>
+        </p:nvSpPr>
+        <p:spPr/>
+        <p:txBody>
+          <a:bodyPr/>
+          <a:lstStyle/>
+          <a:p>
+            <a:r>
+              <a:t>Walk the colors left to right.</a:t>
+            </a:r>
+          </a:p>
+        </p:txBody>
+      </p:sp>
+      <p:sp>
+        <p:nvSpPr>
+          <p:cNvPr id="4" name="Slide Number Placeholder 3"/>
+          <p:cNvSpPr>
+            <a:spLocks noGrp="1"/>
+          </p:cNvSpPr>
+          <p:nvPr>
+            <p:ph type="sldNum" idx="5" sz="quarter"/>
+          </p:nvPr>
+        </p:nvSpPr>
+        <p:spPr/>
+      </p:sp>
+    </p:spTree>
+  </p:cSld>
+  <p:clrMapOvr>
+    <a:masterClrMapping/>
+  </p:clrMapOvr>
+</p:notes>
+</file>
+
+<file path=ppt/notesSlides/notesSlide8.xml><?xml version="1.0" encoding="utf-8"?>
+<p:notes xmlns:a="http://schemas.openxmlformats.org/drawingml/2006/main" xmlns:p="http://schemas.openxmlformats.org/presentationml/2006/main" xmlns:r="http://schemas.openxmlformats.org/officeDocument/2006/relationships">
+  <p:cSld>
+    <p:spTree>
+      <p:nvGrpSpPr>
+        <p:cNvPr id="1" name=""/>
+        <p:cNvGrpSpPr/>
+        <p:nvPr/>
+      </p:nvGrpSpPr>
+      <p:grpSpPr>
+        <a:xfrm>
+          <a:off x="0" y="0"/>
+          <a:ext cx="0" cy="0"/>
+          <a:chOff x="0" y="0"/>
+          <a:chExt cx="0" cy="0"/>
+        </a:xfrm>
+      </p:grpSpPr>
+      <p:sp>
+        <p:nvSpPr>
+          <p:cNvPr id="2" name="Slide Image Placeholder 1"/>
+          <p:cNvSpPr>
+            <a:spLocks noGrp="1"/>
+          </p:cNvSpPr>
+          <p:nvPr>
+            <p:ph type="sldImg" idx="2"/>
+          </p:nvPr>
+        </p:nvSpPr>
+        <p:spPr/>
+      </p:sp>
+      <p:sp>
+        <p:nvSpPr>
+          <p:cNvPr id="3" name="Notes Placeholder 2"/>
+          <p:cNvSpPr>
+            <a:spLocks noGrp="1"/>
+          </p:cNvSpPr>
+          <p:nvPr>
+            <p:ph type="body" idx="3" sz="quarter"/>
+          </p:nvPr>
+        </p:nvSpPr>
+        <p:spPr/>
+        <p:txBody>
+          <a:bodyPr/>
+          <a:lstStyle/>
+          <a:p>
+            <a:r>
+              <a:t>The concept picture was exactly this data.</a:t>
+            </a:r>
+          </a:p>
+        </p:txBody>
+      </p:sp>
+      <p:sp>
+        <p:nvSpPr>
+          <p:cNvPr id="4" name="Slide Number Placeholder 3"/>
+          <p:cNvSpPr>
+            <a:spLocks noGrp="1"/>
+          </p:cNvSpPr>
+          <p:nvPr>
+            <p:ph type="sldNum" idx="5" sz="quarter"/>
+          </p:nvPr>
+        </p:nvSpPr>
+        <p:spPr/>
+      </p:sp>
+    </p:spTree>
+  </p:cSld>
+  <p:clrMapOvr>
+    <a:masterClrMapping/>
+  </p:clrMapOvr>
+</p:notes>
+</file>
+
+<file path=ppt/notesSlides/notesSlide9.xml><?xml version="1.0" encoding="utf-8"?>
+<p:notes xmlns:a="http://schemas.openxmlformats.org/drawingml/2006/main" xmlns:p="http://schemas.openxmlformats.org/presentationml/2006/main" xmlns:r="http://schemas.openxmlformats.org/officeDocument/2006/relationships">
+  <p:cSld>
+    <p:spTree>
+      <p:nvGrpSpPr>
+        <p:cNvPr id="1" name=""/>
+        <p:cNvGrpSpPr/>
+        <p:nvPr/>
+      </p:nvGrpSpPr>
+      <p:grpSpPr>
+        <a:xfrm>
+          <a:off x="0" y="0"/>
+          <a:ext cx="0" cy="0"/>
+          <a:chOff x="0" y="0"/>
+          <a:chExt cx="0" cy="0"/>
+        </a:xfrm>
+      </p:grpSpPr>
+      <p:sp>
+        <p:nvSpPr>
+          <p:cNvPr id="2" name="Slide Image Placeholder 1"/>
+          <p:cNvSpPr>
+            <a:spLocks noGrp="1"/>
+          </p:cNvSpPr>
+          <p:nvPr>
+            <p:ph type="sldImg" idx="2"/>
+          </p:nvPr>
+        </p:nvSpPr>
+        <p:spPr/>
+      </p:sp>
+      <p:sp>
+        <p:nvSpPr>
+          <p:cNvPr id="3" name="Notes Placeholder 2"/>
+          <p:cNvSpPr>
+            <a:spLocks noGrp="1"/>
+          </p:cNvSpPr>
+          <p:nvPr>
+            <p:ph type="body" idx="3" sz="quarter"/>
+          </p:nvPr>
+        </p:nvSpPr>
+        <p:spPr/>
+        <p:txBody>
+          <a:bodyPr/>
+          <a:lstStyle/>
+          <a:p>
+            <a:r>
+              <a:t>One-shot discipline: the test set was never touched during development.</a:t>
+            </a:r>
+          </a:p>
+        </p:txBody>
+      </p:sp>
+      <p:sp>
+        <p:nvSpPr>
+          <p:cNvPr id="4" name="Slide Number Placeholder 3"/>
+          <p:cNvSpPr>
+            <a:spLocks noGrp="1"/>
+          </p:cNvSpPr>
+          <p:nvPr>
+            <p:ph type="sldNum" idx="5" sz="quarter"/>
+          </p:nvPr>
+        </p:nvSpPr>
+        <p:spPr/>
+      </p:sp>
+    </p:spTree>
+  </p:cSld>
+  <p:clrMapOvr>
+    <a:masterClrMapping/>
+  </p:clrMapOvr>
+</p:notes>
 </file>
 
 <file path=ppt/slideLayouts/slideLayout1.xml><?xml version="1.0" encoding="utf-8"?>
@@ -3109,30 +4929,53 @@
         <p:nvPr/>
       </p:nvGrpSpPr>
       <p:grpSpPr/>
-      <p:pic>
-        <p:nvPicPr>
-          <p:cNvPr id="2" name="Picture 1" descr="slide-01.png"/>
-          <p:cNvPicPr>
-            <a:picLocks noChangeAspect="1"/>
-          </p:cNvPicPr>
+      <p:sp>
+        <p:nvSpPr>
+          <p:cNvPr id="2" name="TextBox 1"/>
+          <p:cNvSpPr txBox="1"/>
           <p:nvPr/>
-        </p:nvPicPr>
-        <p:blipFill>
-          <a:blip r:embed="rId2"/>
-          <a:stretch>
-            <a:fillRect/>
-          </a:stretch>
-        </p:blipFill>
-        <p:spPr>
-          <a:xfrm>
-            <a:off x="0" y="0"/>
-            <a:ext cx="12188952" cy="6858000"/>
+        </p:nvSpPr>
+        <p:spPr>
+          <a:xfrm>
+            <a:off x="914400" y="2377440"/>
+            <a:ext cx="10332720" cy="1645920"/>
           </a:xfrm>
           <a:prstGeom prst="rect">
             <a:avLst/>
           </a:prstGeom>
-        </p:spPr>
-      </p:pic>
+          <a:noFill/>
+        </p:spPr>
+        <p:txBody>
+          <a:bodyPr wrap="none">
+            <a:spAutoFit/>
+          </a:bodyPr>
+          <a:lstStyle/>
+          <a:p>
+            <a:pPr>
+              <a:defRPr sz="3200" b="1">
+                <a:solidFill>
+                  <a:srgbClr val="1A1A1A"/>
+                </a:solidFill>
+              </a:defRPr>
+            </a:pPr>
+            <a:r>
+              <a:t>Expressive Performance as a Gaussian Process on a Musical Score Graph</a:t>
+            </a:r>
+          </a:p>
+          <a:p>
+            <a:pPr>
+              <a:defRPr sz="1800" b="0">
+                <a:solidFill>
+                  <a:srgbClr val="1A1A1A"/>
+                </a:solidFill>
+              </a:defRPr>
+            </a:pPr>
+            <a:r>
+              <a:t>Raynaldi Lalang — Kyoto University — October 2026</a:t>
+            </a:r>
+          </a:p>
+        </p:txBody>
+      </p:sp>
     </p:spTree>
   </p:cSld>
   <p:clrMapOvr>
@@ -3151,30 +4994,124 @@
         <p:nvPr/>
       </p:nvGrpSpPr>
       <p:grpSpPr/>
-      <p:pic>
-        <p:nvPicPr>
-          <p:cNvPr id="2" name="Picture 1" descr="slide-10.png"/>
-          <p:cNvPicPr>
-            <a:picLocks noChangeAspect="1"/>
-          </p:cNvPicPr>
+      <p:sp>
+        <p:nvSpPr>
+          <p:cNvPr id="2" name="TextBox 1"/>
+          <p:cNvSpPr txBox="1"/>
           <p:nvPr/>
-        </p:nvPicPr>
-        <p:blipFill>
-          <a:blip r:embed="rId2"/>
-          <a:stretch>
-            <a:fillRect/>
-          </a:stretch>
-        </p:blipFill>
-        <p:spPr>
-          <a:xfrm>
-            <a:off x="0" y="0"/>
-            <a:ext cx="12188952" cy="6858000"/>
+        </p:nvSpPr>
+        <p:spPr>
+          <a:xfrm>
+            <a:off x="411480" y="228600"/>
+            <a:ext cx="11338560" cy="685800"/>
           </a:xfrm>
           <a:prstGeom prst="rect">
             <a:avLst/>
           </a:prstGeom>
-        </p:spPr>
-      </p:pic>
+          <a:noFill/>
+        </p:spPr>
+        <p:txBody>
+          <a:bodyPr wrap="none">
+            <a:spAutoFit/>
+          </a:bodyPr>
+          <a:lstStyle/>
+          <a:p>
+            <a:pPr>
+              <a:defRPr sz="2800" b="1">
+                <a:solidFill>
+                  <a:srgbClr val="1A1A1A"/>
+                </a:solidFill>
+              </a:defRPr>
+            </a:pPr>
+            <a:r>
+              <a:t>Phase 1: results (piano, ASAP)</a:t>
+            </a:r>
+          </a:p>
+        </p:txBody>
+      </p:sp>
+      <p:sp>
+        <p:nvSpPr>
+          <p:cNvPr id="3" name="TextBox 2"/>
+          <p:cNvSpPr txBox="1"/>
+          <p:nvPr/>
+        </p:nvSpPr>
+        <p:spPr>
+          <a:xfrm>
+            <a:off x="822960" y="1097280"/>
+            <a:ext cx="10607040" cy="4389120"/>
+          </a:xfrm>
+          <a:prstGeom prst="rect">
+            <a:avLst/>
+          </a:prstGeom>
+          <a:noFill/>
+        </p:spPr>
+        <p:txBody>
+          <a:bodyPr wrap="square">
+            <a:spAutoFit/>
+          </a:bodyPr>
+          <a:lstStyle/>
+          <a:p>
+            <a:pPr>
+              <a:spcAft>
+                <a:spcPts val="800"/>
+              </a:spcAft>
+              <a:defRPr sz="2000">
+                <a:solidFill>
+                  <a:srgbClr val="1A1A1A"/>
+                </a:solidFill>
+              </a:defRPr>
+            </a:pPr>
+            <a:r>
+              <a:t>• Preregistered, scored once on 20 untouched pieces, against the two-stage pipeline the model contains.</a:t>
+            </a:r>
+          </a:p>
+          <a:p>
+            <a:pPr>
+              <a:spcAft>
+                <a:spcPts val="800"/>
+              </a:spcAft>
+              <a:defRPr sz="2000">
+                <a:solidFill>
+                  <a:srgbClr val="1A1A1A"/>
+                </a:solidFill>
+              </a:defRPr>
+            </a:pPr>
+            <a:r>
+              <a:t>• Accuracy: RMSE 0.376 vs 0.393 (pooled over the three channels), paired per-piece difference significant.</a:t>
+            </a:r>
+          </a:p>
+          <a:p>
+            <a:pPr>
+              <a:spcAft>
+                <a:spcPts val="800"/>
+              </a:spcAft>
+              <a:defRPr sz="2000">
+                <a:solidFill>
+                  <a:srgbClr val="1A1A1A"/>
+                </a:solidFill>
+              </a:defRPr>
+            </a:pPr>
+            <a:r>
+              <a:t>• Calibration: the graph's log-score contribution significant; coverage 0.925 at nominal 0.90.</a:t>
+            </a:r>
+          </a:p>
+          <a:p>
+            <a:pPr>
+              <a:spcAft>
+                <a:spcPts val="800"/>
+              </a:spcAft>
+              <a:defRPr sz="2000">
+                <a:solidFill>
+                  <a:srgbClr val="1A1A1A"/>
+                </a:solidFill>
+              </a:defRPr>
+            </a:pPr>
+            <a:r>
+              <a:t>• Attribution: the features carry the mean, the graph carries the calibration.</a:t>
+            </a:r>
+          </a:p>
+        </p:txBody>
+      </p:sp>
     </p:spTree>
   </p:cSld>
   <p:clrMapOvr>
@@ -3193,30 +5130,144 @@
         <p:nvPr/>
       </p:nvGrpSpPr>
       <p:grpSpPr/>
-      <p:pic>
-        <p:nvPicPr>
-          <p:cNvPr id="2" name="Picture 1" descr="slide-11.png"/>
-          <p:cNvPicPr>
-            <a:picLocks noChangeAspect="1"/>
-          </p:cNvPicPr>
+      <p:sp>
+        <p:nvSpPr>
+          <p:cNvPr id="2" name="TextBox 1"/>
+          <p:cNvSpPr txBox="1"/>
           <p:nvPr/>
-        </p:nvPicPr>
-        <p:blipFill>
-          <a:blip r:embed="rId2"/>
-          <a:stretch>
-            <a:fillRect/>
-          </a:stretch>
-        </p:blipFill>
-        <p:spPr>
-          <a:xfrm>
-            <a:off x="0" y="0"/>
-            <a:ext cx="12188952" cy="6858000"/>
+        </p:nvSpPr>
+        <p:spPr>
+          <a:xfrm>
+            <a:off x="411480" y="228600"/>
+            <a:ext cx="11338560" cy="685800"/>
           </a:xfrm>
           <a:prstGeom prst="rect">
             <a:avLst/>
           </a:prstGeom>
-        </p:spPr>
-      </p:pic>
+          <a:noFill/>
+        </p:spPr>
+        <p:txBody>
+          <a:bodyPr wrap="none">
+            <a:spAutoFit/>
+          </a:bodyPr>
+          <a:lstStyle/>
+          <a:p>
+            <a:pPr>
+              <a:defRPr sz="2800" b="1">
+                <a:solidFill>
+                  <a:srgbClr val="1A1A1A"/>
+                </a:solidFill>
+              </a:defRPr>
+            </a:pPr>
+            <a:r>
+              <a:t>Phase 2: from audio to the cents curve</a:t>
+            </a:r>
+          </a:p>
+        </p:txBody>
+      </p:sp>
+      <p:sp>
+        <p:nvSpPr>
+          <p:cNvPr id="3" name="TextBox 2"/>
+          <p:cNvSpPr txBox="1"/>
+          <p:nvPr/>
+        </p:nvSpPr>
+        <p:spPr>
+          <a:xfrm>
+            <a:off x="822960" y="1097280"/>
+            <a:ext cx="10515600" cy="640080"/>
+          </a:xfrm>
+          <a:prstGeom prst="rect">
+            <a:avLst/>
+          </a:prstGeom>
+          <a:noFill/>
+        </p:spPr>
+        <p:txBody>
+          <a:bodyPr wrap="none">
+            <a:spAutoFit/>
+          </a:bodyPr>
+          <a:lstStyle/>
+          <a:p>
+            <a:pPr>
+              <a:defRPr sz="2000">
+                <a:solidFill>
+                  <a:srgbClr val="0072B2"/>
+                </a:solidFill>
+              </a:defRPr>
+            </a:pPr>
+            <a:r>
+              <a:t>xⱼ = 1200 log₂(f₀ⱼ/440) − 100(pᵢ−69)   (deviation from equal temperament)</a:t>
+            </a:r>
+          </a:p>
+        </p:txBody>
+      </p:sp>
+      <p:sp>
+        <p:nvSpPr>
+          <p:cNvPr id="4" name="TextBox 3"/>
+          <p:cNvSpPr txBox="1"/>
+          <p:nvPr/>
+        </p:nvSpPr>
+        <p:spPr>
+          <a:xfrm>
+            <a:off x="822960" y="1874519"/>
+            <a:ext cx="10607040" cy="4389120"/>
+          </a:xfrm>
+          <a:prstGeom prst="rect">
+            <a:avLst/>
+          </a:prstGeom>
+          <a:noFill/>
+        </p:spPr>
+        <p:txBody>
+          <a:bodyPr wrap="square">
+            <a:spAutoFit/>
+          </a:bodyPr>
+          <a:lstStyle/>
+          <a:p>
+            <a:pPr>
+              <a:spcAft>
+                <a:spcPts val="800"/>
+              </a:spcAft>
+              <a:defRPr sz="2000">
+                <a:solidFill>
+                  <a:srgbClr val="1A1A1A"/>
+                </a:solidFill>
+              </a:defRPr>
+            </a:pPr>
+            <a:r>
+              <a:t>• A pitch tracker gives frames: time, f₀, voicing confidence.</a:t>
+            </a:r>
+          </a:p>
+          <a:p>
+            <a:pPr>
+              <a:spcAft>
+                <a:spcPts val="800"/>
+              </a:spcAft>
+              <a:defRPr sz="2000">
+                <a:solidFill>
+                  <a:srgbClr val="1A1A1A"/>
+                </a:solidFill>
+              </a:defRPr>
+            </a:pPr>
+            <a:r>
+              <a:t>• Frame rule: voiced, confidence above the track's lowest quintile, at least 4 frames per note.</a:t>
+            </a:r>
+          </a:p>
+          <a:p>
+            <a:pPr>
+              <a:spcAft>
+                <a:spcPts val="800"/>
+              </a:spcAft>
+              <a:defRPr sz="2000">
+                <a:solidFill>
+                  <a:srgbClr val="1A1A1A"/>
+                </a:solidFill>
+              </a:defRPr>
+            </a:pPr>
+            <a:r>
+              <a:t>• Two curves per note — tracked: pYIN, run by us; ground truth: the corpus's own annotation of the same stem. Cleaner, but still a measurement.</a:t>
+            </a:r>
+          </a:p>
+        </p:txBody>
+      </p:sp>
     </p:spTree>
   </p:cSld>
   <p:clrMapOvr>
@@ -3235,30 +5286,139 @@
         <p:nvPr/>
       </p:nvGrpSpPr>
       <p:grpSpPr/>
-      <p:pic>
-        <p:nvPicPr>
-          <p:cNvPr id="2" name="Picture 1" descr="slide-12.png"/>
-          <p:cNvPicPr>
-            <a:picLocks noChangeAspect="1"/>
-          </p:cNvPicPr>
+      <p:sp>
+        <p:nvSpPr>
+          <p:cNvPr id="2" name="TextBox 1"/>
+          <p:cNvSpPr txBox="1"/>
           <p:nvPr/>
-        </p:nvPicPr>
-        <p:blipFill>
-          <a:blip r:embed="rId2"/>
-          <a:stretch>
-            <a:fillRect/>
-          </a:stretch>
-        </p:blipFill>
-        <p:spPr>
-          <a:xfrm>
-            <a:off x="0" y="0"/>
-            <a:ext cx="12188952" cy="6858000"/>
+        </p:nvSpPr>
+        <p:spPr>
+          <a:xfrm>
+            <a:off x="411480" y="228600"/>
+            <a:ext cx="11338560" cy="685800"/>
           </a:xfrm>
           <a:prstGeom prst="rect">
             <a:avLst/>
           </a:prstGeom>
-        </p:spPr>
-      </p:pic>
+          <a:noFill/>
+        </p:spPr>
+        <p:txBody>
+          <a:bodyPr wrap="none">
+            <a:spAutoFit/>
+          </a:bodyPr>
+          <a:lstStyle/>
+          <a:p>
+            <a:pPr>
+              <a:defRPr sz="2800" b="1">
+                <a:solidFill>
+                  <a:srgbClr val="1A1A1A"/>
+                </a:solidFill>
+              </a:defRPr>
+            </a:pPr>
+            <a:r>
+              <a:t>Phase 2: the pitch-curve channels</a:t>
+            </a:r>
+          </a:p>
+        </p:txBody>
+      </p:sp>
+      <p:sp>
+        <p:nvSpPr>
+          <p:cNvPr id="3" name="TextBox 2"/>
+          <p:cNvSpPr txBox="1"/>
+          <p:nvPr/>
+        </p:nvSpPr>
+        <p:spPr>
+          <a:xfrm>
+            <a:off x="822960" y="1097280"/>
+            <a:ext cx="10607040" cy="4389120"/>
+          </a:xfrm>
+          <a:prstGeom prst="rect">
+            <a:avLst/>
+          </a:prstGeom>
+          <a:noFill/>
+        </p:spPr>
+        <p:txBody>
+          <a:bodyPr wrap="square">
+            <a:spAutoFit/>
+          </a:bodyPr>
+          <a:lstStyle/>
+          <a:p>
+            <a:pPr>
+              <a:spcAft>
+                <a:spcPts val="800"/>
+              </a:spcAft>
+              <a:defRPr sz="2000">
+                <a:solidFill>
+                  <a:srgbClr val="1A1A1A"/>
+                </a:solidFill>
+              </a:defRPr>
+            </a:pPr>
+            <a:r>
+              <a:t>• Within one note: a sustained level plus one oscillation. Three numbers describe it.</a:t>
+            </a:r>
+          </a:p>
+          <a:p>
+            <a:pPr>
+              <a:spcAft>
+                <a:spcPts val="800"/>
+              </a:spcAft>
+              <a:defRPr sz="2000">
+                <a:solidFill>
+                  <a:srgbClr val="1A1A1A"/>
+                </a:solidFill>
+              </a:defRPr>
+            </a:pPr>
+            <a:r>
+              <a:t>• Intonation c (cents): the sustained offset from the written pitch. c &gt; 0 sharp; 100 = a semitone.</a:t>
+            </a:r>
+          </a:p>
+          <a:p>
+            <a:pPr>
+              <a:spcAft>
+                <a:spcPts val="800"/>
+              </a:spcAft>
+              <a:defRPr sz="2000">
+                <a:solidFill>
+                  <a:srgbClr val="1A1A1A"/>
+                </a:solidFill>
+              </a:defRPr>
+            </a:pPr>
+            <a:r>
+              <a:t>• Vibrato extent γ (cents): the oscillation's amplitude.</a:t>
+            </a:r>
+          </a:p>
+          <a:p>
+            <a:pPr>
+              <a:spcAft>
+                <a:spcPts val="800"/>
+              </a:spcAft>
+              <a:defRPr sz="2000">
+                <a:solidFill>
+                  <a:srgbClr val="1A1A1A"/>
+                </a:solidFill>
+              </a:defRPr>
+            </a:pPr>
+            <a:r>
+              <a:t>• Vibrato rate f (Hz): its frequency; vibrato lives at roughly 4–8 Hz.</a:t>
+            </a:r>
+          </a:p>
+          <a:p>
+            <a:pPr>
+              <a:spcAft>
+                <a:spcPts val="800"/>
+              </a:spcAft>
+              <a:defRPr sz="2000">
+                <a:solidFill>
+                  <a:srgbClr val="1A1A1A"/>
+                </a:solidFill>
+              </a:defRPr>
+            </a:pPr>
+            <a:r>
+              <a:t>• The bundle carries log γ, log f. No oscillation found: those cells are missing, c remains.</a:t>
+            </a:r>
+          </a:p>
+        </p:txBody>
+      </p:sp>
     </p:spTree>
   </p:cSld>
   <p:clrMapOvr>
@@ -3277,9 +5437,44 @@
         <p:nvPr/>
       </p:nvGrpSpPr>
       <p:grpSpPr/>
+      <p:sp>
+        <p:nvSpPr>
+          <p:cNvPr id="2" name="TextBox 1"/>
+          <p:cNvSpPr txBox="1"/>
+          <p:nvPr/>
+        </p:nvSpPr>
+        <p:spPr>
+          <a:xfrm>
+            <a:off x="411480" y="228600"/>
+            <a:ext cx="11338560" cy="685800"/>
+          </a:xfrm>
+          <a:prstGeom prst="rect">
+            <a:avLst/>
+          </a:prstGeom>
+          <a:noFill/>
+        </p:spPr>
+        <p:txBody>
+          <a:bodyPr wrap="none">
+            <a:spAutoFit/>
+          </a:bodyPr>
+          <a:lstStyle/>
+          <a:p>
+            <a:pPr>
+              <a:defRPr sz="2800" b="1">
+                <a:solidFill>
+                  <a:srgbClr val="1A1A1A"/>
+                </a:solidFill>
+              </a:defRPr>
+            </a:pPr>
+            <a:r>
+              <a:t>Phase 2: what the data looks like</a:t>
+            </a:r>
+          </a:p>
+        </p:txBody>
+      </p:sp>
       <p:pic>
         <p:nvPicPr>
-          <p:cNvPr id="2" name="Picture 1" descr="slide-13.png"/>
+          <p:cNvPr id="3" name="Picture 2" descr="phase2_frames_intro.png"/>
           <p:cNvPicPr>
             <a:picLocks noChangeAspect="1"/>
           </p:cNvPicPr>
@@ -3293,14 +5488,49 @@
         </p:blipFill>
         <p:spPr>
           <a:xfrm>
-            <a:off x="0" y="0"/>
-            <a:ext cx="12188952" cy="6858000"/>
+            <a:off x="790956" y="1097280"/>
+            <a:ext cx="10607040" cy="2940469"/>
           </a:xfrm>
           <a:prstGeom prst="rect">
             <a:avLst/>
           </a:prstGeom>
         </p:spPr>
       </p:pic>
+      <p:sp>
+        <p:nvSpPr>
+          <p:cNvPr id="4" name="TextBox 3"/>
+          <p:cNvSpPr txBox="1"/>
+          <p:nvPr/>
+        </p:nvSpPr>
+        <p:spPr>
+          <a:xfrm>
+            <a:off x="822960" y="6126480"/>
+            <a:ext cx="10607040" cy="640080"/>
+          </a:xfrm>
+          <a:prstGeom prst="rect">
+            <a:avLst/>
+          </a:prstGeom>
+          <a:noFill/>
+        </p:spPr>
+        <p:txBody>
+          <a:bodyPr wrap="square">
+            <a:spAutoFit/>
+          </a:bodyPr>
+          <a:lstStyle/>
+          <a:p>
+            <a:pPr>
+              <a:defRPr sz="1300">
+                <a:solidFill>
+                  <a:srgbClr val="6B7280"/>
+                </a:solidFill>
+              </a:defRPr>
+            </a:pPr>
+            <a:r>
+              <a:t>A: the tracker quantizes and drops frames; the ground truth shows the oscillation underneath. B: identifiable. C: refused, cells missing.</a:t>
+            </a:r>
+          </a:p>
+        </p:txBody>
+      </p:sp>
     </p:spTree>
   </p:cSld>
   <p:clrMapOvr>
@@ -3319,30 +5549,159 @@
         <p:nvPr/>
       </p:nvGrpSpPr>
       <p:grpSpPr/>
-      <p:pic>
-        <p:nvPicPr>
-          <p:cNvPr id="2" name="Picture 1" descr="slide-14.png"/>
-          <p:cNvPicPr>
-            <a:picLocks noChangeAspect="1"/>
-          </p:cNvPicPr>
+      <p:sp>
+        <p:nvSpPr>
+          <p:cNvPr id="2" name="TextBox 1"/>
+          <p:cNvSpPr txBox="1"/>
           <p:nvPr/>
-        </p:nvPicPr>
-        <p:blipFill>
-          <a:blip r:embed="rId2"/>
-          <a:stretch>
-            <a:fillRect/>
-          </a:stretch>
-        </p:blipFill>
-        <p:spPr>
-          <a:xfrm>
-            <a:off x="0" y="0"/>
-            <a:ext cx="12188952" cy="6858000"/>
+        </p:nvSpPr>
+        <p:spPr>
+          <a:xfrm>
+            <a:off x="411480" y="228600"/>
+            <a:ext cx="11338560" cy="685800"/>
           </a:xfrm>
           <a:prstGeom prst="rect">
             <a:avLst/>
           </a:prstGeom>
-        </p:spPr>
-      </p:pic>
+          <a:noFill/>
+        </p:spPr>
+        <p:txBody>
+          <a:bodyPr wrap="none">
+            <a:spAutoFit/>
+          </a:bodyPr>
+          <a:lstStyle/>
+          <a:p>
+            <a:pPr>
+              <a:defRPr sz="2800" b="1">
+                <a:solidFill>
+                  <a:srgbClr val="1A1A1A"/>
+                </a:solidFill>
+              </a:defRPr>
+            </a:pPr>
+            <a:r>
+              <a:t>Estimating the channels with a Gaussian process</a:t>
+            </a:r>
+          </a:p>
+        </p:txBody>
+      </p:sp>
+      <p:sp>
+        <p:nvSpPr>
+          <p:cNvPr id="3" name="TextBox 2"/>
+          <p:cNvSpPr txBox="1"/>
+          <p:nvPr/>
+        </p:nvSpPr>
+        <p:spPr>
+          <a:xfrm>
+            <a:off x="822960" y="1097280"/>
+            <a:ext cx="10515600" cy="640080"/>
+          </a:xfrm>
+          <a:prstGeom prst="rect">
+            <a:avLst/>
+          </a:prstGeom>
+          <a:noFill/>
+        </p:spPr>
+        <p:txBody>
+          <a:bodyPr wrap="none">
+            <a:spAutoFit/>
+          </a:bodyPr>
+          <a:lstStyle/>
+          <a:p>
+            <a:pPr>
+              <a:defRPr sz="2000">
+                <a:solidFill>
+                  <a:srgbClr val="0072B2"/>
+                </a:solidFill>
+              </a:defRPr>
+            </a:pPr>
+            <a:r>
+              <a:t>k(Δt) = w₁ e^(−2π²v₁Δt²) cos(2πμ₁Δt) + w₂ e^(−2π²v₂Δt²)</a:t>
+            </a:r>
+          </a:p>
+        </p:txBody>
+      </p:sp>
+      <p:sp>
+        <p:nvSpPr>
+          <p:cNvPr id="4" name="TextBox 3"/>
+          <p:cNvSpPr txBox="1"/>
+          <p:nvPr/>
+        </p:nvSpPr>
+        <p:spPr>
+          <a:xfrm>
+            <a:off x="822960" y="1874519"/>
+            <a:ext cx="10607040" cy="4389120"/>
+          </a:xfrm>
+          <a:prstGeom prst="rect">
+            <a:avLst/>
+          </a:prstGeom>
+          <a:noFill/>
+        </p:spPr>
+        <p:txBody>
+          <a:bodyPr wrap="square">
+            <a:spAutoFit/>
+          </a:bodyPr>
+          <a:lstStyle/>
+          <a:p>
+            <a:pPr>
+              <a:spcAft>
+                <a:spcPts val="800"/>
+              </a:spcAft>
+              <a:defRPr sz="2000">
+                <a:solidFill>
+                  <a:srgbClr val="1A1A1A"/>
+                </a:solidFill>
+              </a:defRPr>
+            </a:pPr>
+            <a:r>
+              <a:t>• The cents curve as a Gaussian process, two components: a damped cosine at the vibrato rate, plus a slow drift (a special case of the spectral mixture kernel, Wilson and Adams 2013).</a:t>
+            </a:r>
+          </a:p>
+          <a:p>
+            <a:pPr>
+              <a:spcAft>
+                <a:spcPts val="800"/>
+              </a:spcAft>
+              <a:defRPr sz="2000">
+                <a:solidFill>
+                  <a:srgbClr val="1A1A1A"/>
+                </a:solidFill>
+              </a:defRPr>
+            </a:pPr>
+            <a:r>
+              <a:t>• The prior states only where the curve's energy lives: a band at the rate, plus a drift band at zero.</a:t>
+            </a:r>
+          </a:p>
+          <a:p>
+            <a:pPr>
+              <a:spcAft>
+                <a:spcPts val="800"/>
+              </a:spcAft>
+              <a:defRPr sz="2000">
+                <a:solidFill>
+                  <a:srgbClr val="1A1A1A"/>
+                </a:solidFill>
+              </a:defRPr>
+            </a:pPr>
+            <a:r>
+              <a:t>• Fit per note by exact marginal likelihood; variances from the evidence curvature.</a:t>
+            </a:r>
+          </a:p>
+          <a:p>
+            <a:pPr>
+              <a:spcAft>
+                <a:spcPts val="800"/>
+              </a:spcAft>
+              <a:defRPr sz="2000">
+                <a:solidFill>
+                  <a:srgbClr val="1A1A1A"/>
+                </a:solidFill>
+              </a:defRPr>
+            </a:pPr>
+            <a:r>
+              <a:t>• Channels from the posterior: c the realized average, γ from the vibrato component, f = μ₁.</a:t>
+            </a:r>
+          </a:p>
+        </p:txBody>
+      </p:sp>
     </p:spTree>
   </p:cSld>
   <p:clrMapOvr>
@@ -3361,9 +5720,44 @@
         <p:nvPr/>
       </p:nvGrpSpPr>
       <p:grpSpPr/>
+      <p:sp>
+        <p:nvSpPr>
+          <p:cNvPr id="2" name="TextBox 1"/>
+          <p:cNvSpPr txBox="1"/>
+          <p:nvPr/>
+        </p:nvSpPr>
+        <p:spPr>
+          <a:xfrm>
+            <a:off x="411480" y="228600"/>
+            <a:ext cx="11338560" cy="685800"/>
+          </a:xfrm>
+          <a:prstGeom prst="rect">
+            <a:avLst/>
+          </a:prstGeom>
+          <a:noFill/>
+        </p:spPr>
+        <p:txBody>
+          <a:bodyPr wrap="none">
+            <a:spAutoFit/>
+          </a:bodyPr>
+          <a:lstStyle/>
+          <a:p>
+            <a:pPr>
+              <a:defRPr sz="2800" b="1">
+                <a:solidFill>
+                  <a:srgbClr val="1A1A1A"/>
+                </a:solidFill>
+              </a:defRPr>
+            </a:pPr>
+            <a:r>
+              <a:t>One real note: the curve and its parts</a:t>
+            </a:r>
+          </a:p>
+        </p:txBody>
+      </p:sp>
       <p:pic>
         <p:nvPicPr>
-          <p:cNvPr id="2" name="Picture 1" descr="slide-15.png"/>
+          <p:cNvPr id="3" name="Picture 2" descr="sm_estimator_explainer.png"/>
           <p:cNvPicPr>
             <a:picLocks noChangeAspect="1"/>
           </p:cNvPicPr>
@@ -3377,14 +5771,49 @@
         </p:blipFill>
         <p:spPr>
           <a:xfrm>
-            <a:off x="0" y="0"/>
-            <a:ext cx="12188952" cy="6858000"/>
+            <a:off x="790956" y="1097280"/>
+            <a:ext cx="10607040" cy="2892408"/>
           </a:xfrm>
           <a:prstGeom prst="rect">
             <a:avLst/>
           </a:prstGeom>
         </p:spPr>
       </p:pic>
+      <p:sp>
+        <p:nvSpPr>
+          <p:cNvPr id="4" name="TextBox 3"/>
+          <p:cNvSpPr txBox="1"/>
+          <p:nvPr/>
+        </p:nvSpPr>
+        <p:spPr>
+          <a:xfrm>
+            <a:off x="822960" y="6126480"/>
+            <a:ext cx="10607040" cy="640080"/>
+          </a:xfrm>
+          <a:prstGeom prst="rect">
+            <a:avLst/>
+          </a:prstGeom>
+          <a:noFill/>
+        </p:spPr>
+        <p:txBody>
+          <a:bodyPr wrap="square">
+            <a:spAutoFit/>
+          </a:bodyPr>
+          <a:lstStyle/>
+          <a:p>
+            <a:pPr>
+              <a:defRPr sz="1300">
+                <a:solidFill>
+                  <a:srgbClr val="6B7280"/>
+                </a:solidFill>
+              </a:defRPr>
+            </a:pPr>
+            <a:r>
+              <a:t>A: the GP tracks the curve (rigid sine as reference). B: the posterior split into centre, drift, vibrato. C: the read-outs.</a:t>
+            </a:r>
+          </a:p>
+        </p:txBody>
+      </p:sp>
     </p:spTree>
   </p:cSld>
   <p:clrMapOvr>
@@ -3403,30 +5832,174 @@
         <p:nvPr/>
       </p:nvGrpSpPr>
       <p:grpSpPr/>
-      <p:pic>
-        <p:nvPicPr>
-          <p:cNvPr id="2" name="Picture 1" descr="slide-16.png"/>
-          <p:cNvPicPr>
-            <a:picLocks noChangeAspect="1"/>
-          </p:cNvPicPr>
+      <p:sp>
+        <p:nvSpPr>
+          <p:cNvPr id="2" name="TextBox 1"/>
+          <p:cNvSpPr txBox="1"/>
           <p:nvPr/>
-        </p:nvPicPr>
-        <p:blipFill>
-          <a:blip r:embed="rId2"/>
-          <a:stretch>
-            <a:fillRect/>
-          </a:stretch>
-        </p:blipFill>
-        <p:spPr>
-          <a:xfrm>
-            <a:off x="0" y="0"/>
-            <a:ext cx="12188952" cy="6858000"/>
+        </p:nvSpPr>
+        <p:spPr>
+          <a:xfrm>
+            <a:off x="411480" y="228600"/>
+            <a:ext cx="11338560" cy="685800"/>
           </a:xfrm>
           <a:prstGeom prst="rect">
             <a:avLst/>
           </a:prstGeom>
-        </p:spPr>
-      </p:pic>
+          <a:noFill/>
+        </p:spPr>
+        <p:txBody>
+          <a:bodyPr wrap="none">
+            <a:spAutoFit/>
+          </a:bodyPr>
+          <a:lstStyle/>
+          <a:p>
+            <a:pPr>
+              <a:defRPr sz="2800" b="1">
+                <a:solidFill>
+                  <a:srgbClr val="1A1A1A"/>
+                </a:solidFill>
+              </a:defRPr>
+            </a:pPr>
+            <a:r>
+              <a:t>Phase 2: results (strings and winds, URMP)</a:t>
+            </a:r>
+          </a:p>
+        </p:txBody>
+      </p:sp>
+      <p:sp>
+        <p:nvSpPr>
+          <p:cNvPr id="3" name="TextBox 2"/>
+          <p:cNvSpPr txBox="1"/>
+          <p:nvPr/>
+        </p:nvSpPr>
+        <p:spPr>
+          <a:xfrm>
+            <a:off x="822960" y="1097280"/>
+            <a:ext cx="10515600" cy="640080"/>
+          </a:xfrm>
+          <a:prstGeom prst="rect">
+            <a:avLst/>
+          </a:prstGeom>
+          <a:noFill/>
+        </p:spPr>
+        <p:txBody>
+          <a:bodyPr wrap="none">
+            <a:spAutoFit/>
+          </a:bodyPr>
+          <a:lstStyle/>
+          <a:p>
+            <a:pPr>
+              <a:defRPr sz="2000">
+                <a:solidFill>
+                  <a:srgbClr val="0072B2"/>
+                </a:solidFill>
+              </a:defRPr>
+            </a:pPr>
+            <a:r>
+              <a:t>yᵢ = [ c, log γ, log f, ℓ, τ, dᵢᵛⁱᵇ ]   — six channels, estimator variances used as given</a:t>
+            </a:r>
+          </a:p>
+        </p:txBody>
+      </p:sp>
+      <p:sp>
+        <p:nvSpPr>
+          <p:cNvPr id="4" name="TextBox 3"/>
+          <p:cNvSpPr txBox="1"/>
+          <p:nvPr/>
+        </p:nvSpPr>
+        <p:spPr>
+          <a:xfrm>
+            <a:off x="822960" y="1874519"/>
+            <a:ext cx="10607040" cy="4389120"/>
+          </a:xfrm>
+          <a:prstGeom prst="rect">
+            <a:avLst/>
+          </a:prstGeom>
+          <a:noFill/>
+        </p:spPr>
+        <p:txBody>
+          <a:bodyPr wrap="square">
+            <a:spAutoFit/>
+          </a:bodyPr>
+          <a:lstStyle/>
+          <a:p>
+            <a:pPr>
+              <a:spcAft>
+                <a:spcPts val="800"/>
+              </a:spcAft>
+              <a:defRPr sz="2000">
+                <a:solidFill>
+                  <a:srgbClr val="1A1A1A"/>
+                </a:solidFill>
+              </a:defRPr>
+            </a:pPr>
+            <a:r>
+              <a:t>• Preregistered, scored once on 13 held-out pieces. Δ = full model − no-graph ablation, paired per piece.</a:t>
+            </a:r>
+          </a:p>
+          <a:p>
+            <a:pPr>
+              <a:spcAft>
+                <a:spcPts val="800"/>
+              </a:spcAft>
+              <a:defRPr sz="2000">
+                <a:solidFill>
+                  <a:srgbClr val="1A1A1A"/>
+                </a:solidFill>
+              </a:defRPr>
+            </a:pPr>
+            <a:r>
+              <a:t>• Intonation recovery: ΔRMSE −0.877 cents, significant.</a:t>
+            </a:r>
+          </a:p>
+          <a:p>
+            <a:pPr>
+              <a:spcAft>
+                <a:spcPts val="800"/>
+              </a:spcAft>
+              <a:defRPr sz="2000">
+                <a:solidFill>
+                  <a:srgbClr val="1A1A1A"/>
+                </a:solidFill>
+              </a:defRPr>
+            </a:pPr>
+            <a:r>
+              <a:t>• Vibrato calibration: ΔNLL −2.990 (extent), −0.564 (rate), both significant.</a:t>
+            </a:r>
+          </a:p>
+          <a:p>
+            <a:pPr>
+              <a:spcAft>
+                <a:spcPts val="800"/>
+              </a:spcAft>
+              <a:defRPr sz="2000">
+                <a:solidFill>
+                  <a:srgbClr val="1A1A1A"/>
+                </a:solidFill>
+              </a:defRPr>
+            </a:pPr>
+            <a:r>
+              <a:t>• Coverage 0.88–0.91 at nominal 0.90, all six channels.</a:t>
+            </a:r>
+          </a:p>
+          <a:p>
+            <a:pPr>
+              <a:spcAft>
+                <a:spcPts val="800"/>
+              </a:spcAft>
+              <a:defRPr sz="2000">
+                <a:solidFill>
+                  <a:srgbClr val="1A1A1A"/>
+                </a:solidFill>
+              </a:defRPr>
+            </a:pPr>
+            <a:r>
+              <a:t>• Timing calibration: no improvement (−0.030, interval includes zero). The loose end, taken up after Phase 3.</a:t>
+            </a:r>
+          </a:p>
+        </p:txBody>
+      </p:sp>
     </p:spTree>
   </p:cSld>
   <p:clrMapOvr>
@@ -3445,30 +6018,129 @@
         <p:nvPr/>
       </p:nvGrpSpPr>
       <p:grpSpPr/>
-      <p:pic>
-        <p:nvPicPr>
-          <p:cNvPr id="2" name="Picture 1" descr="slide-17.png"/>
-          <p:cNvPicPr>
-            <a:picLocks noChangeAspect="1"/>
-          </p:cNvPicPr>
+      <p:sp>
+        <p:nvSpPr>
+          <p:cNvPr id="2" name="TextBox 1"/>
+          <p:cNvSpPr txBox="1"/>
           <p:nvPr/>
-        </p:nvPicPr>
-        <p:blipFill>
-          <a:blip r:embed="rId2"/>
-          <a:stretch>
-            <a:fillRect/>
-          </a:stretch>
-        </p:blipFill>
-        <p:spPr>
-          <a:xfrm>
-            <a:off x="0" y="0"/>
-            <a:ext cx="12188952" cy="6858000"/>
+        </p:nvSpPr>
+        <p:spPr>
+          <a:xfrm>
+            <a:off x="411480" y="228600"/>
+            <a:ext cx="11338560" cy="685800"/>
           </a:xfrm>
           <a:prstGeom prst="rect">
             <a:avLst/>
           </a:prstGeom>
-        </p:spPr>
-      </p:pic>
+          <a:noFill/>
+        </p:spPr>
+        <p:txBody>
+          <a:bodyPr wrap="none">
+            <a:spAutoFit/>
+          </a:bodyPr>
+          <a:lstStyle/>
+          <a:p>
+            <a:pPr>
+              <a:defRPr sz="2800" b="1">
+                <a:solidFill>
+                  <a:srgbClr val="1A1A1A"/>
+                </a:solidFill>
+              </a:defRPr>
+            </a:pPr>
+            <a:r>
+              <a:t>Phase 3: the waveform as the observation</a:t>
+            </a:r>
+          </a:p>
+        </p:txBody>
+      </p:sp>
+      <p:sp>
+        <p:nvSpPr>
+          <p:cNvPr id="3" name="TextBox 2"/>
+          <p:cNvSpPr txBox="1"/>
+          <p:nvPr/>
+        </p:nvSpPr>
+        <p:spPr>
+          <a:xfrm>
+            <a:off x="822960" y="1097280"/>
+            <a:ext cx="10515600" cy="640080"/>
+          </a:xfrm>
+          <a:prstGeom prst="rect">
+            <a:avLst/>
+          </a:prstGeom>
+          <a:noFill/>
+        </p:spPr>
+        <p:txBody>
+          <a:bodyPr wrap="none">
+            <a:spAutoFit/>
+          </a:bodyPr>
+          <a:lstStyle/>
+          <a:p>
+            <a:pPr>
+              <a:defRPr sz="2000">
+                <a:solidFill>
+                  <a:srgbClr val="0072B2"/>
+                </a:solidFill>
+              </a:defRPr>
+            </a:pPr>
+            <a:r>
+              <a:t>x = Φ(z) a + ε   ⇒   p(x|z) = N(x; 0, ΦΣ_aΦᵀ + σ²I)</a:t>
+            </a:r>
+          </a:p>
+        </p:txBody>
+      </p:sp>
+      <p:sp>
+        <p:nvSpPr>
+          <p:cNvPr id="4" name="TextBox 3"/>
+          <p:cNvSpPr txBox="1"/>
+          <p:nvPr/>
+        </p:nvSpPr>
+        <p:spPr>
+          <a:xfrm>
+            <a:off x="822960" y="1874519"/>
+            <a:ext cx="10607040" cy="4389120"/>
+          </a:xfrm>
+          <a:prstGeom prst="rect">
+            <a:avLst/>
+          </a:prstGeom>
+          <a:noFill/>
+        </p:spPr>
+        <p:txBody>
+          <a:bodyPr wrap="square">
+            <a:spAutoFit/>
+          </a:bodyPr>
+          <a:lstStyle/>
+          <a:p>
+            <a:pPr>
+              <a:spcAft>
+                <a:spcPts val="800"/>
+              </a:spcAft>
+              <a:defRPr sz="2000">
+                <a:solidFill>
+                  <a:srgbClr val="1A1A1A"/>
+                </a:solidFill>
+              </a:defRPr>
+            </a:pPr>
+            <a:r>
+              <a:t>• The likelihood block becomes the audio itself; the harmonic amplitudes are marginalized exactly (O(mp²), whole tracks exact).</a:t>
+            </a:r>
+          </a:p>
+          <a:p>
+            <a:pPr>
+              <a:spcAft>
+                <a:spcPts val="800"/>
+              </a:spcAft>
+              <a:defRPr sz="2000">
+                <a:solidFill>
+                  <a:srgbClr val="1A1A1A"/>
+                </a:solidFill>
+              </a:defRPr>
+            </a:pPr>
+            <a:r>
+              <a:t>• Development studies: intonation at 2.29 cents median with no pitch tracker; beats the estimator chain on winds.</a:t>
+            </a:r>
+          </a:p>
+        </p:txBody>
+      </p:sp>
     </p:spTree>
   </p:cSld>
   <p:clrMapOvr>
@@ -3487,9 +6159,44 @@
         <p:nvPr/>
       </p:nvGrpSpPr>
       <p:grpSpPr/>
+      <p:sp>
+        <p:nvSpPr>
+          <p:cNvPr id="2" name="TextBox 1"/>
+          <p:cNvSpPr txBox="1"/>
+          <p:nvPr/>
+        </p:nvSpPr>
+        <p:spPr>
+          <a:xfrm>
+            <a:off x="411480" y="228600"/>
+            <a:ext cx="11338560" cy="685800"/>
+          </a:xfrm>
+          <a:prstGeom prst="rect">
+            <a:avLst/>
+          </a:prstGeom>
+          <a:noFill/>
+        </p:spPr>
+        <p:txBody>
+          <a:bodyPr wrap="none">
+            <a:spAutoFit/>
+          </a:bodyPr>
+          <a:lstStyle/>
+          <a:p>
+            <a:pPr>
+              <a:defRPr sz="2800" b="1">
+                <a:solidFill>
+                  <a:srgbClr val="1A1A1A"/>
+                </a:solidFill>
+              </a:defRPr>
+            </a:pPr>
+            <a:r>
+              <a:t>Running now: the curve straight from the waveform</a:t>
+            </a:r>
+          </a:p>
+        </p:txBody>
+      </p:sp>
       <p:pic>
         <p:nvPicPr>
-          <p:cNvPr id="2" name="Picture 1" descr="slide-18.png"/>
+          <p:cNvPr id="3" name="Picture 2" descr="phase3_curve_proto.png"/>
           <p:cNvPicPr>
             <a:picLocks noChangeAspect="1"/>
           </p:cNvPicPr>
@@ -3503,14 +6210,49 @@
         </p:blipFill>
         <p:spPr>
           <a:xfrm>
-            <a:off x="0" y="0"/>
-            <a:ext cx="12188952" cy="6858000"/>
+            <a:off x="790956" y="1097280"/>
+            <a:ext cx="10607040" cy="3135994"/>
           </a:xfrm>
           <a:prstGeom prst="rect">
             <a:avLst/>
           </a:prstGeom>
         </p:spPr>
       </p:pic>
+      <p:sp>
+        <p:nvSpPr>
+          <p:cNvPr id="4" name="TextBox 3"/>
+          <p:cNvSpPr txBox="1"/>
+          <p:nvPr/>
+        </p:nvSpPr>
+        <p:spPr>
+          <a:xfrm>
+            <a:off x="822960" y="6126480"/>
+            <a:ext cx="10607040" cy="640080"/>
+          </a:xfrm>
+          <a:prstGeom prst="rect">
+            <a:avLst/>
+          </a:prstGeom>
+          <a:noFill/>
+        </p:spPr>
+        <p:txBody>
+          <a:bodyPr wrap="square">
+            <a:spAutoFit/>
+          </a:bodyPr>
+          <a:lstStyle/>
+          <a:p>
+            <a:pPr>
+              <a:defRPr sz="1300">
+                <a:solidFill>
+                  <a:srgbClr val="6B7280"/>
+                </a:solidFill>
+              </a:defRPr>
+            </a:pPr>
+            <a:r>
+              <a:t>Prototype (this week): the within-note GP prior meets the waveform likelihood. No tracker, no estimator. Better than the pYIN frames on two of three notes.</a:t>
+            </a:r>
+          </a:p>
+        </p:txBody>
+      </p:sp>
     </p:spTree>
   </p:cSld>
   <p:clrMapOvr>
@@ -3529,30 +6271,159 @@
         <p:nvPr/>
       </p:nvGrpSpPr>
       <p:grpSpPr/>
-      <p:pic>
-        <p:nvPicPr>
-          <p:cNvPr id="2" name="Picture 1" descr="slide-19.png"/>
-          <p:cNvPicPr>
-            <a:picLocks noChangeAspect="1"/>
-          </p:cNvPicPr>
+      <p:sp>
+        <p:nvSpPr>
+          <p:cNvPr id="2" name="TextBox 1"/>
+          <p:cNvSpPr txBox="1"/>
           <p:nvPr/>
-        </p:nvPicPr>
-        <p:blipFill>
-          <a:blip r:embed="rId2"/>
-          <a:stretch>
-            <a:fillRect/>
-          </a:stretch>
-        </p:blipFill>
-        <p:spPr>
-          <a:xfrm>
-            <a:off x="0" y="0"/>
-            <a:ext cx="12188952" cy="6858000"/>
+        </p:nvSpPr>
+        <p:spPr>
+          <a:xfrm>
+            <a:off x="411480" y="228600"/>
+            <a:ext cx="11338560" cy="685800"/>
           </a:xfrm>
           <a:prstGeom prst="rect">
             <a:avLst/>
           </a:prstGeom>
-        </p:spPr>
-      </p:pic>
+          <a:noFill/>
+        </p:spPr>
+        <p:txBody>
+          <a:bodyPr wrap="none">
+            <a:spAutoFit/>
+          </a:bodyPr>
+          <a:lstStyle/>
+          <a:p>
+            <a:pPr>
+              <a:defRPr sz="2800" b="1">
+                <a:solidFill>
+                  <a:srgbClr val="1A1A1A"/>
+                </a:solidFill>
+              </a:defRPr>
+            </a:pPr>
+            <a:r>
+              <a:t>Timing noise is correlated across notes</a:t>
+            </a:r>
+          </a:p>
+        </p:txBody>
+      </p:sp>
+      <p:sp>
+        <p:nvSpPr>
+          <p:cNvPr id="3" name="TextBox 2"/>
+          <p:cNvSpPr txBox="1"/>
+          <p:nvPr/>
+        </p:nvSpPr>
+        <p:spPr>
+          <a:xfrm>
+            <a:off x="822960" y="1097280"/>
+            <a:ext cx="10515600" cy="640080"/>
+          </a:xfrm>
+          <a:prstGeom prst="rect">
+            <a:avLst/>
+          </a:prstGeom>
+          <a:noFill/>
+        </p:spPr>
+        <p:txBody>
+          <a:bodyPr wrap="none">
+            <a:spAutoFit/>
+          </a:bodyPr>
+          <a:lstStyle/>
+          <a:p>
+            <a:pPr>
+              <a:defRPr sz="2000">
+                <a:solidFill>
+                  <a:srgbClr val="0072B2"/>
+                </a:solidFill>
+              </a:defRPr>
+            </a:pPr>
+            <a:r>
+              <a:t>Σᵗᵢⱼ = ς_{τ,i} ς_{τ,j} ρ^|i−j|   — one parameter ρ, chosen per piece by the evidence</a:t>
+            </a:r>
+          </a:p>
+        </p:txBody>
+      </p:sp>
+      <p:sp>
+        <p:nvSpPr>
+          <p:cNvPr id="4" name="TextBox 3"/>
+          <p:cNvSpPr txBox="1"/>
+          <p:nvPr/>
+        </p:nvSpPr>
+        <p:spPr>
+          <a:xfrm>
+            <a:off x="822960" y="1874519"/>
+            <a:ext cx="10607040" cy="4389120"/>
+          </a:xfrm>
+          <a:prstGeom prst="rect">
+            <a:avLst/>
+          </a:prstGeom>
+          <a:noFill/>
+        </p:spPr>
+        <p:txBody>
+          <a:bodyPr wrap="square">
+            <a:spAutoFit/>
+          </a:bodyPr>
+          <a:lstStyle/>
+          <a:p>
+            <a:pPr>
+              <a:spcAft>
+                <a:spcPts val="800"/>
+              </a:spcAft>
+              <a:defRPr sz="2000">
+                <a:solidFill>
+                  <a:srgbClr val="1A1A1A"/>
+                </a:solidFill>
+              </a:defRPr>
+            </a:pPr>
+            <a:r>
+              <a:t>• Why timing did not calibrate: alignment error is correlated along score time; a diagonal noise row cannot represent it.</a:t>
+            </a:r>
+          </a:p>
+          <a:p>
+            <a:pPr>
+              <a:spcAft>
+                <a:spcPts val="800"/>
+              </a:spcAft>
+              <a:defRPr sz="2000">
+                <a:solidFill>
+                  <a:srgbClr val="1A1A1A"/>
+                </a:solidFill>
+              </a:defRPr>
+            </a:pPr>
+            <a:r>
+              <a:t>• The evidence detects the correlation on 97–100% of pieces (median ρ 0.45–0.60).</a:t>
+            </a:r>
+          </a:p>
+          <a:p>
+            <a:pPr>
+              <a:spcAft>
+                <a:spcPts val="800"/>
+              </a:spcAft>
+              <a:defRPr sz="2000">
+                <a:solidFill>
+                  <a:srgbClr val="1A1A1A"/>
+                </a:solidFill>
+              </a:defRPr>
+            </a:pPr>
+            <a:r>
+              <a:t>• Calibration improves (ΔNLL −0.111, significant); timing error falls ~20% (99 → 80 ms).</a:t>
+            </a:r>
+          </a:p>
+          <a:p>
+            <a:pPr>
+              <a:spcAft>
+                <a:spcPts val="800"/>
+              </a:spcAft>
+              <a:defRPr sz="2000">
+                <a:solidFill>
+                  <a:srgbClr val="1A1A1A"/>
+                </a:solidFill>
+              </a:defRPr>
+            </a:pPr>
+            <a:r>
+              <a:t>• Reproduced three ways: original masks, fresh masks, joint refit.</a:t>
+            </a:r>
+          </a:p>
+        </p:txBody>
+      </p:sp>
     </p:spTree>
   </p:cSld>
   <p:clrMapOvr>
@@ -3571,9 +6442,82 @@
         <p:nvPr/>
       </p:nvGrpSpPr>
       <p:grpSpPr/>
+      <p:sp>
+        <p:nvSpPr>
+          <p:cNvPr id="2" name="TextBox 1"/>
+          <p:cNvSpPr txBox="1"/>
+          <p:nvPr/>
+        </p:nvSpPr>
+        <p:spPr>
+          <a:xfrm>
+            <a:off x="411480" y="228600"/>
+            <a:ext cx="11338560" cy="685800"/>
+          </a:xfrm>
+          <a:prstGeom prst="rect">
+            <a:avLst/>
+          </a:prstGeom>
+          <a:noFill/>
+        </p:spPr>
+        <p:txBody>
+          <a:bodyPr wrap="none">
+            <a:spAutoFit/>
+          </a:bodyPr>
+          <a:lstStyle/>
+          <a:p>
+            <a:pPr>
+              <a:defRPr sz="2800" b="1">
+                <a:solidFill>
+                  <a:srgbClr val="1A1A1A"/>
+                </a:solidFill>
+              </a:defRPr>
+            </a:pPr>
+            <a:r>
+              <a:t>Expressive performance</a:t>
+            </a:r>
+          </a:p>
+        </p:txBody>
+      </p:sp>
+      <p:sp>
+        <p:nvSpPr>
+          <p:cNvPr id="3" name="TextBox 2"/>
+          <p:cNvSpPr txBox="1"/>
+          <p:nvPr/>
+        </p:nvSpPr>
+        <p:spPr>
+          <a:xfrm>
+            <a:off x="822960" y="1097280"/>
+            <a:ext cx="10607040" cy="4389120"/>
+          </a:xfrm>
+          <a:prstGeom prst="rect">
+            <a:avLst/>
+          </a:prstGeom>
+          <a:noFill/>
+        </p:spPr>
+        <p:txBody>
+          <a:bodyPr wrap="square">
+            <a:spAutoFit/>
+          </a:bodyPr>
+          <a:lstStyle/>
+          <a:p>
+            <a:pPr>
+              <a:spcAft>
+                <a:spcPts val="800"/>
+              </a:spcAft>
+              <a:defRPr sz="2000">
+                <a:solidFill>
+                  <a:srgbClr val="1A1A1A"/>
+                </a:solidFill>
+              </a:defRPr>
+            </a:pPr>
+            <a:r>
+              <a:t>• The score fixes pitches and note values. Performers add the rest: when, how long, how loud, and how the pitch moves inside the note. These deviations are the expression.</a:t>
+            </a:r>
+          </a:p>
+        </p:txBody>
+      </p:sp>
       <p:pic>
         <p:nvPicPr>
-          <p:cNvPr id="2" name="Picture 1" descr="slide-02.png"/>
+          <p:cNvPr id="4" name="Picture 3" descr="deck_concept.png"/>
           <p:cNvPicPr>
             <a:picLocks noChangeAspect="1"/>
           </p:cNvPicPr>
@@ -3587,17 +6531,52 @@
         </p:blipFill>
         <p:spPr>
           <a:xfrm>
-            <a:off x="0" y="0"/>
-            <a:ext cx="12188952" cy="6858000"/>
+            <a:off x="2528316" y="2057400"/>
+            <a:ext cx="7132320" cy="4270472"/>
           </a:xfrm>
           <a:prstGeom prst="rect">
             <a:avLst/>
           </a:prstGeom>
         </p:spPr>
       </p:pic>
+      <p:sp>
+        <p:nvSpPr>
+          <p:cNvPr id="5" name="TextBox 4"/>
+          <p:cNvSpPr txBox="1"/>
+          <p:nvPr/>
+        </p:nvSpPr>
+        <p:spPr>
+          <a:xfrm>
+            <a:off x="822960" y="6126480"/>
+            <a:ext cx="10607040" cy="640080"/>
+          </a:xfrm>
+          <a:prstGeom prst="rect">
+            <a:avLst/>
+          </a:prstGeom>
+          <a:noFill/>
+        </p:spPr>
+        <p:txBody>
+          <a:bodyPr wrap="square">
+            <a:spAutoFit/>
+          </a:bodyPr>
+          <a:lstStyle/>
+          <a:p>
+            <a:pPr>
+              <a:defRPr sz="1300">
+                <a:solidFill>
+                  <a:srgbClr val="6B7280"/>
+                </a:solidFill>
+              </a:defRPr>
+            </a:pPr>
+            <a:r>
+              <a:t>flat (score)  |  expressive (a real performance)  — click to play</a:t>
+            </a:r>
+          </a:p>
+        </p:txBody>
+      </p:sp>
       <p:pic>
         <p:nvPicPr>
-          <p:cNvPr id="3" name="flat.wav">
+          <p:cNvPr id="6" name="flat.wav">
             <a:hlinkClick r:id="" action="ppaction://media"/>
           </p:cNvPr>
           <p:cNvPicPr>
@@ -3620,8 +6599,8 @@
         </p:blipFill>
         <p:spPr>
           <a:xfrm>
-            <a:off x="4663440" y="6035040"/>
-            <a:ext cx="640080" cy="640080"/>
+            <a:off x="4846320" y="5989320"/>
+            <a:ext cx="594360" cy="594360"/>
           </a:xfrm>
           <a:prstGeom prst="rect">
             <a:avLst/>
@@ -3630,7 +6609,7 @@
       </p:pic>
       <p:pic>
         <p:nvPicPr>
-          <p:cNvPr id="4" name="expressive.wav">
+          <p:cNvPr id="7" name="expressive.wav">
             <a:hlinkClick r:id="" action="ppaction://media"/>
           </p:cNvPr>
           <p:cNvPicPr>
@@ -3653,8 +6632,8 @@
         </p:blipFill>
         <p:spPr>
           <a:xfrm>
-            <a:off x="6492240" y="6035040"/>
-            <a:ext cx="640080" cy="640080"/>
+            <a:off x="6675120" y="5989320"/>
+            <a:ext cx="594360" cy="594360"/>
           </a:xfrm>
           <a:prstGeom prst="rect">
             <a:avLst/>
@@ -3679,7 +6658,7 @@
                   </p:stCondLst>
                 </p:cTn>
                 <p:tgtEl>
-                  <p:spTgt spid="3"/>
+                  <p:spTgt spid="6"/>
                 </p:tgtEl>
               </p:cMediaNode>
             </p:video>
@@ -3691,7 +6670,7 @@
                   </p:stCondLst>
                 </p:cTn>
                 <p:tgtEl>
-                  <p:spTgt spid="4"/>
+                  <p:spTgt spid="7"/>
                 </p:tgtEl>
               </p:cMediaNode>
             </p:video>
@@ -3713,9 +6692,44 @@
         <p:nvPr/>
       </p:nvGrpSpPr>
       <p:grpSpPr/>
+      <p:sp>
+        <p:nvSpPr>
+          <p:cNvPr id="2" name="TextBox 1"/>
+          <p:cNvSpPr txBox="1"/>
+          <p:nvPr/>
+        </p:nvSpPr>
+        <p:spPr>
+          <a:xfrm>
+            <a:off x="411480" y="228600"/>
+            <a:ext cx="11338560" cy="685800"/>
+          </a:xfrm>
+          <a:prstGeom prst="rect">
+            <a:avLst/>
+          </a:prstGeom>
+          <a:noFill/>
+        </p:spPr>
+        <p:txBody>
+          <a:bodyPr wrap="none">
+            <a:spAutoFit/>
+          </a:bodyPr>
+          <a:lstStyle/>
+          <a:p>
+            <a:pPr>
+              <a:defRPr sz="2800" b="1">
+                <a:solidFill>
+                  <a:srgbClr val="1A1A1A"/>
+                </a:solidFill>
+              </a:defRPr>
+            </a:pPr>
+            <a:r>
+              <a:t>Held-out timing, with and without the correlation</a:t>
+            </a:r>
+          </a:p>
+        </p:txBody>
+      </p:sp>
       <p:pic>
         <p:nvPicPr>
-          <p:cNvPr id="2" name="Picture 1" descr="slide-20.png"/>
+          <p:cNvPr id="3" name="Picture 2" descr="corrnoise_tau_dev.png"/>
           <p:cNvPicPr>
             <a:picLocks noChangeAspect="1"/>
           </p:cNvPicPr>
@@ -3729,14 +6743,49 @@
         </p:blipFill>
         <p:spPr>
           <a:xfrm>
-            <a:off x="0" y="0"/>
-            <a:ext cx="12188952" cy="6858000"/>
+            <a:off x="790956" y="1097280"/>
+            <a:ext cx="10607040" cy="3053618"/>
           </a:xfrm>
           <a:prstGeom prst="rect">
             <a:avLst/>
           </a:prstGeom>
         </p:spPr>
       </p:pic>
+      <p:sp>
+        <p:nvSpPr>
+          <p:cNvPr id="4" name="TextBox 3"/>
+          <p:cNvSpPr txBox="1"/>
+          <p:nvPr/>
+        </p:nvSpPr>
+        <p:spPr>
+          <a:xfrm>
+            <a:off x="822960" y="6126480"/>
+            <a:ext cx="10607040" cy="640080"/>
+          </a:xfrm>
+          <a:prstGeom prst="rect">
+            <a:avLst/>
+          </a:prstGeom>
+          <a:noFill/>
+        </p:spPr>
+        <p:txBody>
+          <a:bodyPr wrap="square">
+            <a:spAutoFit/>
+          </a:bodyPr>
+          <a:lstStyle/>
+          <a:p>
+            <a:pPr>
+              <a:defRPr sz="1300">
+                <a:solidFill>
+                  <a:srgbClr val="6B7280"/>
+                </a:solidFill>
+              </a:defRPr>
+            </a:pPr>
+            <a:r>
+              <a:t>Left: paired deltas, three runs. Middle: the chosen correlation per piece. Right: one track's held-out timing.</a:t>
+            </a:r>
+          </a:p>
+        </p:txBody>
+      </p:sp>
     </p:spTree>
   </p:cSld>
   <p:clrMapOvr>
@@ -3755,30 +6804,195 @@
         <p:nvPr/>
       </p:nvGrpSpPr>
       <p:grpSpPr/>
-      <p:pic>
-        <p:nvPicPr>
-          <p:cNvPr id="2" name="Picture 1" descr="slide-21.png"/>
-          <p:cNvPicPr>
-            <a:picLocks noChangeAspect="1"/>
-          </p:cNvPicPr>
+      <p:sp>
+        <p:nvSpPr>
+          <p:cNvPr id="2" name="TextBox 1"/>
+          <p:cNvSpPr txBox="1"/>
           <p:nvPr/>
-        </p:nvPicPr>
-        <p:blipFill>
-          <a:blip r:embed="rId2"/>
-          <a:stretch>
-            <a:fillRect/>
-          </a:stretch>
-        </p:blipFill>
-        <p:spPr>
-          <a:xfrm>
-            <a:off x="0" y="0"/>
-            <a:ext cx="12188952" cy="6858000"/>
+        </p:nvSpPr>
+        <p:spPr>
+          <a:xfrm>
+            <a:off x="411480" y="228600"/>
+            <a:ext cx="11338560" cy="685800"/>
           </a:xfrm>
           <a:prstGeom prst="rect">
             <a:avLst/>
           </a:prstGeom>
-        </p:spPr>
-      </p:pic>
+          <a:noFill/>
+        </p:spPr>
+        <p:txBody>
+          <a:bodyPr wrap="none">
+            <a:spAutoFit/>
+          </a:bodyPr>
+          <a:lstStyle/>
+          <a:p>
+            <a:pPr>
+              <a:defRPr sz="2800" b="1">
+                <a:solidFill>
+                  <a:srgbClr val="1A1A1A"/>
+                </a:solidFill>
+              </a:defRPr>
+            </a:pPr>
+            <a:r>
+              <a:t>From here (proposed sequencing)</a:t>
+            </a:r>
+          </a:p>
+        </p:txBody>
+      </p:sp>
+      <p:graphicFrame>
+        <p:nvGraphicFramePr>
+          <p:cNvPr id="3" name="Table 2"/>
+          <p:cNvGraphicFramePr>
+            <a:graphicFrameLocks noGrp="1"/>
+          </p:cNvGraphicFramePr>
+          <p:nvPr/>
+        </p:nvGraphicFramePr>
+        <p:xfrm>
+          <a:off x="1097280" y="1371600"/>
+          <a:ext cx="9966960" cy="3840480"/>
+        </p:xfrm>
+        <a:graphic>
+          <a:graphicData uri="http://schemas.openxmlformats.org/drawingml/2006/table">
+            <a:tbl>
+              <a:tblPr firstRow="1" bandRow="1">
+                <a:tableStyleId>{5C22544A-7EE6-4342-B048-85BDC9FD1C3A}</a:tableStyleId>
+              </a:tblPr>
+              <a:tblGrid>
+                <a:gridCol w="2377440"/>
+                <a:gridCol w="7589520"/>
+              </a:tblGrid>
+              <a:tr h="960120">
+                <a:tc>
+                  <a:txBody>
+                    <a:bodyPr/>
+                    <a:lstStyle/>
+                    <a:p>
+                      <a:pPr>
+                        <a:defRPr sz="1800"/>
+                      </a:pPr>
+                      <a:r>
+                        <a:t>now</a:t>
+                      </a:r>
+                    </a:p>
+                  </a:txBody>
+                  <a:tcPr/>
+                </a:tc>
+                <a:tc>
+                  <a:txBody>
+                    <a:bodyPr/>
+                    <a:lstStyle/>
+                    <a:p>
+                      <a:pPr>
+                        <a:defRPr sz="1800"/>
+                      </a:pPr>
+                      <a:r>
+                        <a:t>integrate the full-corpus learned-spectrum run (done this week)</a:t>
+                      </a:r>
+                    </a:p>
+                  </a:txBody>
+                  <a:tcPr/>
+                </a:tc>
+              </a:tr>
+              <a:tr h="960120">
+                <a:tc>
+                  <a:txBody>
+                    <a:bodyPr/>
+                    <a:lstStyle/>
+                    <a:p>
+                      <a:pPr>
+                        <a:defRPr sz="1800"/>
+                      </a:pPr>
+                      <a:r>
+                        <a:t>next 2 weeks</a:t>
+                      </a:r>
+                    </a:p>
+                  </a:txBody>
+                  <a:tcPr/>
+                </a:tc>
+                <a:tc>
+                  <a:txBody>
+                    <a:bodyPr/>
+                    <a:lstStyle/>
+                    <a:p>
+                      <a:pPr>
+                        <a:defRPr sz="1800"/>
+                      </a:pPr>
+                      <a:r>
+                        <a:t>freeze the timing-noise registration once the pool is decided; batch-evaluate the curve-from-waveform prototype</a:t>
+                      </a:r>
+                    </a:p>
+                  </a:txBody>
+                  <a:tcPr/>
+                </a:tc>
+              </a:tr>
+              <a:tr h="960120">
+                <a:tc>
+                  <a:txBody>
+                    <a:bodyPr/>
+                    <a:lstStyle/>
+                    <a:p>
+                      <a:pPr>
+                        <a:defRPr sz="1800"/>
+                      </a:pPr>
+                      <a:r>
+                        <a:t>November</a:t>
+                      </a:r>
+                    </a:p>
+                  </a:txBody>
+                  <a:tcPr/>
+                </a:tc>
+                <a:tc>
+                  <a:txBody>
+                    <a:bodyPr/>
+                    <a:lstStyle/>
+                    <a:p>
+                      <a:pPr>
+                        <a:defRPr sz="1800"/>
+                      </a:pPr>
+                      <a:r>
+                        <a:t>decide the channel design (scalars vs curve level); run the timing confirmation, one shot</a:t>
+                      </a:r>
+                    </a:p>
+                  </a:txBody>
+                  <a:tcPr/>
+                </a:tc>
+              </a:tr>
+              <a:tr h="960120">
+                <a:tc>
+                  <a:txBody>
+                    <a:bodyPr/>
+                    <a:lstStyle/>
+                    <a:p>
+                      <a:pPr>
+                        <a:defRPr sz="1800"/>
+                      </a:pPr>
+                      <a:r>
+                        <a:t>December on</a:t>
+                      </a:r>
+                    </a:p>
+                  </a:txBody>
+                  <a:tcPr/>
+                </a:tc>
+                <a:tc>
+                  <a:txBody>
+                    <a:bodyPr/>
+                    <a:lstStyle/>
+                    <a:p>
+                      <a:pPr>
+                        <a:defRPr sz="1800"/>
+                      </a:pPr>
+                      <a:r>
+                        <a:t>Phase 3 at scale; consolidate thesis chapters</a:t>
+                      </a:r>
+                    </a:p>
+                  </a:txBody>
+                  <a:tcPr/>
+                </a:tc>
+              </a:tr>
+            </a:tbl>
+          </a:graphicData>
+        </a:graphic>
+      </p:graphicFrame>
     </p:spTree>
   </p:cSld>
   <p:clrMapOvr>
@@ -3797,30 +7011,109 @@
         <p:nvPr/>
       </p:nvGrpSpPr>
       <p:grpSpPr/>
-      <p:pic>
-        <p:nvPicPr>
-          <p:cNvPr id="2" name="Picture 1" descr="slide-22.png"/>
-          <p:cNvPicPr>
-            <a:picLocks noChangeAspect="1"/>
-          </p:cNvPicPr>
+      <p:sp>
+        <p:nvSpPr>
+          <p:cNvPr id="2" name="TextBox 1"/>
+          <p:cNvSpPr txBox="1"/>
           <p:nvPr/>
-        </p:nvPicPr>
-        <p:blipFill>
-          <a:blip r:embed="rId2"/>
-          <a:stretch>
-            <a:fillRect/>
-          </a:stretch>
-        </p:blipFill>
-        <p:spPr>
-          <a:xfrm>
-            <a:off x="0" y="0"/>
-            <a:ext cx="12188952" cy="6858000"/>
+        </p:nvSpPr>
+        <p:spPr>
+          <a:xfrm>
+            <a:off x="411480" y="228600"/>
+            <a:ext cx="11338560" cy="685800"/>
           </a:xfrm>
           <a:prstGeom prst="rect">
             <a:avLst/>
           </a:prstGeom>
-        </p:spPr>
-      </p:pic>
+          <a:noFill/>
+        </p:spPr>
+        <p:txBody>
+          <a:bodyPr wrap="none">
+            <a:spAutoFit/>
+          </a:bodyPr>
+          <a:lstStyle/>
+          <a:p>
+            <a:pPr>
+              <a:defRPr sz="2800" b="1">
+                <a:solidFill>
+                  <a:srgbClr val="1A1A1A"/>
+                </a:solidFill>
+              </a:defRPr>
+            </a:pPr>
+            <a:r>
+              <a:t>Open questions</a:t>
+            </a:r>
+          </a:p>
+        </p:txBody>
+      </p:sp>
+      <p:sp>
+        <p:nvSpPr>
+          <p:cNvPr id="3" name="TextBox 2"/>
+          <p:cNvSpPr txBox="1"/>
+          <p:nvPr/>
+        </p:nvSpPr>
+        <p:spPr>
+          <a:xfrm>
+            <a:off x="822960" y="1097280"/>
+            <a:ext cx="10607040" cy="4389120"/>
+          </a:xfrm>
+          <a:prstGeom prst="rect">
+            <a:avLst/>
+          </a:prstGeom>
+          <a:noFill/>
+        </p:spPr>
+        <p:txBody>
+          <a:bodyPr wrap="square">
+            <a:spAutoFit/>
+          </a:bodyPr>
+          <a:lstStyle/>
+          <a:p>
+            <a:pPr>
+              <a:spcAft>
+                <a:spcPts val="800"/>
+              </a:spcAft>
+              <a:defRPr sz="2000">
+                <a:solidFill>
+                  <a:srgbClr val="1A1A1A"/>
+                </a:solidFill>
+              </a:defRPr>
+            </a:pPr>
+            <a:r>
+              <a:t>• Which corpus to confirm the timing result on: a new one (Bach10), a disclosed re-use, or both?</a:t>
+            </a:r>
+          </a:p>
+          <a:p>
+            <a:pPr>
+              <a:spcAft>
+                <a:spcPts val="800"/>
+              </a:spcAft>
+              <a:defRPr sz="2000">
+                <a:solidFill>
+                  <a:srgbClr val="1A1A1A"/>
+                </a:solidFill>
+              </a:defRPr>
+            </a:pPr>
+            <a:r>
+              <a:t>• Keep the channels as three scalars per note, or move them to curve level (the prototype's direction)?</a:t>
+            </a:r>
+          </a:p>
+          <a:p>
+            <a:pPr>
+              <a:spcAft>
+                <a:spcPts val="800"/>
+              </a:spcAft>
+              <a:defRPr sz="2000">
+                <a:solidFill>
+                  <a:srgbClr val="1A1A1A"/>
+                </a:solidFill>
+              </a:defRPr>
+            </a:pPr>
+            <a:r>
+              <a:t>• Should the new robustness options become defaults?</a:t>
+            </a:r>
+          </a:p>
+        </p:txBody>
+      </p:sp>
     </p:spTree>
   </p:cSld>
   <p:clrMapOvr>
@@ -3839,30 +7132,124 @@
         <p:nvPr/>
       </p:nvGrpSpPr>
       <p:grpSpPr/>
-      <p:pic>
-        <p:nvPicPr>
-          <p:cNvPr id="2" name="Picture 1" descr="slide-03.png"/>
-          <p:cNvPicPr>
-            <a:picLocks noChangeAspect="1"/>
-          </p:cNvPicPr>
+      <p:sp>
+        <p:nvSpPr>
+          <p:cNvPr id="2" name="TextBox 1"/>
+          <p:cNvSpPr txBox="1"/>
           <p:nvPr/>
-        </p:nvPicPr>
-        <p:blipFill>
-          <a:blip r:embed="rId2"/>
-          <a:stretch>
-            <a:fillRect/>
-          </a:stretch>
-        </p:blipFill>
-        <p:spPr>
-          <a:xfrm>
-            <a:off x="0" y="0"/>
-            <a:ext cx="12188952" cy="6858000"/>
+        </p:nvSpPr>
+        <p:spPr>
+          <a:xfrm>
+            <a:off x="411480" y="228600"/>
+            <a:ext cx="11338560" cy="685800"/>
           </a:xfrm>
           <a:prstGeom prst="rect">
             <a:avLst/>
           </a:prstGeom>
-        </p:spPr>
-      </p:pic>
+          <a:noFill/>
+        </p:spPr>
+        <p:txBody>
+          <a:bodyPr wrap="none">
+            <a:spAutoFit/>
+          </a:bodyPr>
+          <a:lstStyle/>
+          <a:p>
+            <a:pPr>
+              <a:defRPr sz="2800" b="1">
+                <a:solidFill>
+                  <a:srgbClr val="1A1A1A"/>
+                </a:solidFill>
+              </a:defRPr>
+            </a:pPr>
+            <a:r>
+              <a:t>The thesis, and the three problems</a:t>
+            </a:r>
+          </a:p>
+        </p:txBody>
+      </p:sp>
+      <p:sp>
+        <p:nvSpPr>
+          <p:cNvPr id="3" name="TextBox 2"/>
+          <p:cNvSpPr txBox="1"/>
+          <p:nvPr/>
+        </p:nvSpPr>
+        <p:spPr>
+          <a:xfrm>
+            <a:off x="822960" y="1097280"/>
+            <a:ext cx="10607040" cy="4389120"/>
+          </a:xfrm>
+          <a:prstGeom prst="rect">
+            <a:avLst/>
+          </a:prstGeom>
+          <a:noFill/>
+        </p:spPr>
+        <p:txBody>
+          <a:bodyPr wrap="square">
+            <a:spAutoFit/>
+          </a:bodyPr>
+          <a:lstStyle/>
+          <a:p>
+            <a:pPr>
+              <a:spcAft>
+                <a:spcPts val="800"/>
+              </a:spcAft>
+              <a:defRPr sz="2000">
+                <a:solidFill>
+                  <a:srgbClr val="1A1A1A"/>
+                </a:solidFill>
+              </a:defRPr>
+            </a:pPr>
+            <a:r>
+              <a:t>• Thesis: one Gaussian process on the score graph turns a known score and a performance into per-note expressive variables, each with an error bar you can trust.</a:t>
+            </a:r>
+          </a:p>
+          <a:p>
+            <a:pPr>
+              <a:spcAft>
+                <a:spcPts val="800"/>
+              </a:spcAft>
+              <a:defRPr sz="2000">
+                <a:solidFill>
+                  <a:srgbClr val="1A1A1A"/>
+                </a:solidFill>
+              </a:defRPr>
+            </a:pPr>
+            <a:r>
+              <a:t>• Piano: timing, articulation, velocity, read directly from aligned MIDI. Are the error bars calibrated?</a:t>
+            </a:r>
+          </a:p>
+          <a:p>
+            <a:pPr>
+              <a:spcAft>
+                <a:spcPts val="800"/>
+              </a:spcAft>
+              <a:defRPr sz="2000">
+                <a:solidFill>
+                  <a:srgbClr val="1A1A1A"/>
+                </a:solidFill>
+              </a:defRPr>
+            </a:pPr>
+            <a:r>
+              <a:t>• Strings and winds: six variables, now with intonation and vibrato, estimated from audio, noisily. Does the same prior still work?</a:t>
+            </a:r>
+          </a:p>
+          <a:p>
+            <a:pPr>
+              <a:spcAft>
+                <a:spcPts val="800"/>
+              </a:spcAft>
+              <a:defRPr sz="2000">
+                <a:solidFill>
+                  <a:srgbClr val="1A1A1A"/>
+                </a:solidFill>
+              </a:defRPr>
+            </a:pPr>
+            <a:r>
+              <a:t>• Audio directly: no pitch tracker at all. Can the waveform itself be the observation?</a:t>
+            </a:r>
+          </a:p>
+        </p:txBody>
+      </p:sp>
     </p:spTree>
   </p:cSld>
   <p:clrMapOvr>
@@ -3881,9 +7268,82 @@
         <p:nvPr/>
       </p:nvGrpSpPr>
       <p:grpSpPr/>
+      <p:sp>
+        <p:nvSpPr>
+          <p:cNvPr id="2" name="TextBox 1"/>
+          <p:cNvSpPr txBox="1"/>
+          <p:nvPr/>
+        </p:nvSpPr>
+        <p:spPr>
+          <a:xfrm>
+            <a:off x="411480" y="228600"/>
+            <a:ext cx="11338560" cy="685800"/>
+          </a:xfrm>
+          <a:prstGeom prst="rect">
+            <a:avLst/>
+          </a:prstGeom>
+          <a:noFill/>
+        </p:spPr>
+        <p:txBody>
+          <a:bodyPr wrap="none">
+            <a:spAutoFit/>
+          </a:bodyPr>
+          <a:lstStyle/>
+          <a:p>
+            <a:pPr>
+              <a:defRPr sz="2800" b="1">
+                <a:solidFill>
+                  <a:srgbClr val="1A1A1A"/>
+                </a:solidFill>
+              </a:defRPr>
+            </a:pPr>
+            <a:r>
+              <a:t>Approach: one prior, three kinds of observation</a:t>
+            </a:r>
+          </a:p>
+        </p:txBody>
+      </p:sp>
+      <p:sp>
+        <p:nvSpPr>
+          <p:cNvPr id="3" name="TextBox 2"/>
+          <p:cNvSpPr txBox="1"/>
+          <p:nvPr/>
+        </p:nvSpPr>
+        <p:spPr>
+          <a:xfrm>
+            <a:off x="822960" y="1097280"/>
+            <a:ext cx="10607040" cy="4389120"/>
+          </a:xfrm>
+          <a:prstGeom prst="rect">
+            <a:avLst/>
+          </a:prstGeom>
+          <a:noFill/>
+        </p:spPr>
+        <p:txBody>
+          <a:bodyPr wrap="square">
+            <a:spAutoFit/>
+          </a:bodyPr>
+          <a:lstStyle/>
+          <a:p>
+            <a:pPr>
+              <a:spcAft>
+                <a:spcPts val="800"/>
+              </a:spcAft>
+              <a:defRPr sz="2000">
+                <a:solidFill>
+                  <a:srgbClr val="1A1A1A"/>
+                </a:solidFill>
+              </a:defRPr>
+            </a:pPr>
+            <a:r>
+              <a:t>• One GP prior over per-note expressive fields, on a graph built from the score. Only the observation changes per phase: MIDI, f0 targets, or the waveform.</a:t>
+            </a:r>
+          </a:p>
+        </p:txBody>
+      </p:sp>
       <p:pic>
         <p:nvPicPr>
-          <p:cNvPr id="2" name="Picture 1" descr="slide-04.png"/>
+          <p:cNvPr id="4" name="Picture 3" descr="deck_programme.png"/>
           <p:cNvPicPr>
             <a:picLocks noChangeAspect="1"/>
           </p:cNvPicPr>
@@ -3897,8 +7357,8 @@
         </p:blipFill>
         <p:spPr>
           <a:xfrm>
-            <a:off x="0" y="0"/>
-            <a:ext cx="12188952" cy="6858000"/>
+            <a:off x="1705356" y="2057400"/>
+            <a:ext cx="8778240" cy="3625549"/>
           </a:xfrm>
           <a:prstGeom prst="rect">
             <a:avLst/>
@@ -3923,9 +7383,132 @@
         <p:nvPr/>
       </p:nvGrpSpPr>
       <p:grpSpPr/>
+      <p:sp>
+        <p:nvSpPr>
+          <p:cNvPr id="2" name="TextBox 1"/>
+          <p:cNvSpPr txBox="1"/>
+          <p:nvPr/>
+        </p:nvSpPr>
+        <p:spPr>
+          <a:xfrm>
+            <a:off x="411480" y="228600"/>
+            <a:ext cx="11338560" cy="685800"/>
+          </a:xfrm>
+          <a:prstGeom prst="rect">
+            <a:avLst/>
+          </a:prstGeom>
+          <a:noFill/>
+        </p:spPr>
+        <p:txBody>
+          <a:bodyPr wrap="none">
+            <a:spAutoFit/>
+          </a:bodyPr>
+          <a:lstStyle/>
+          <a:p>
+            <a:pPr>
+              <a:defRPr sz="2800" b="1">
+                <a:solidFill>
+                  <a:srgbClr val="1A1A1A"/>
+                </a:solidFill>
+              </a:defRPr>
+            </a:pPr>
+            <a:r>
+              <a:t>The model (1): the score graph</a:t>
+            </a:r>
+          </a:p>
+        </p:txBody>
+      </p:sp>
+      <p:sp>
+        <p:nvSpPr>
+          <p:cNvPr id="3" name="TextBox 2"/>
+          <p:cNvSpPr txBox="1"/>
+          <p:nvPr/>
+        </p:nvSpPr>
+        <p:spPr>
+          <a:xfrm>
+            <a:off x="822960" y="1097280"/>
+            <a:ext cx="10515600" cy="640080"/>
+          </a:xfrm>
+          <a:prstGeom prst="rect">
+            <a:avLst/>
+          </a:prstGeom>
+          <a:noFill/>
+        </p:spPr>
+        <p:txBody>
+          <a:bodyPr wrap="none">
+            <a:spAutoFit/>
+          </a:bodyPr>
+          <a:lstStyle/>
+          <a:p>
+            <a:pPr>
+              <a:defRPr sz="2000">
+                <a:solidFill>
+                  <a:srgbClr val="0072B2"/>
+                </a:solidFill>
+              </a:defRPr>
+            </a:pPr>
+            <a:r>
+              <a:t>Wᵢⱼ = exp( −(bᵢ−bⱼ)²/2ℓ_b² − (pᵢ−pⱼ)²/2ℓ_p² ),   L_G = D − W</a:t>
+            </a:r>
+          </a:p>
+        </p:txBody>
+      </p:sp>
+      <p:sp>
+        <p:nvSpPr>
+          <p:cNvPr id="4" name="TextBox 3"/>
+          <p:cNvSpPr txBox="1"/>
+          <p:nvPr/>
+        </p:nvSpPr>
+        <p:spPr>
+          <a:xfrm>
+            <a:off x="822960" y="1874519"/>
+            <a:ext cx="10607040" cy="4389120"/>
+          </a:xfrm>
+          <a:prstGeom prst="rect">
+            <a:avLst/>
+          </a:prstGeom>
+          <a:noFill/>
+        </p:spPr>
+        <p:txBody>
+          <a:bodyPr wrap="square">
+            <a:spAutoFit/>
+          </a:bodyPr>
+          <a:lstStyle/>
+          <a:p>
+            <a:pPr>
+              <a:spcAft>
+                <a:spcPts val="800"/>
+              </a:spcAft>
+              <a:defRPr sz="2000">
+                <a:solidFill>
+                  <a:srgbClr val="1A1A1A"/>
+                </a:solidFill>
+              </a:defRPr>
+            </a:pPr>
+            <a:r>
+              <a:t>• Nodes: the written notes (pitch, beat onset, duration).</a:t>
+            </a:r>
+          </a:p>
+          <a:p>
+            <a:pPr>
+              <a:spcAft>
+                <a:spcPts val="800"/>
+              </a:spcAft>
+              <a:defRPr sz="2000">
+                <a:solidFill>
+                  <a:srgbClr val="1A1A1A"/>
+                </a:solidFill>
+              </a:defRPr>
+            </a:pPr>
+            <a:r>
+              <a:t>• Edges: close in score time and pitch — neighbours are played similarly.</a:t>
+            </a:r>
+          </a:p>
+        </p:txBody>
+      </p:sp>
       <p:pic>
         <p:nvPicPr>
-          <p:cNvPr id="2" name="Picture 1" descr="slide-05.png"/>
+          <p:cNvPr id="5" name="Picture 4" descr="deck_scoregraph.png"/>
           <p:cNvPicPr>
             <a:picLocks noChangeAspect="1"/>
           </p:cNvPicPr>
@@ -3939,8 +7522,8 @@
         </p:blipFill>
         <p:spPr>
           <a:xfrm>
-            <a:off x="0" y="0"/>
-            <a:ext cx="12188952" cy="6858000"/>
+            <a:off x="2345436" y="3153393"/>
+            <a:ext cx="7498079" cy="3247407"/>
           </a:xfrm>
           <a:prstGeom prst="rect">
             <a:avLst/>
@@ -3965,30 +7548,129 @@
         <p:nvPr/>
       </p:nvGrpSpPr>
       <p:grpSpPr/>
-      <p:pic>
-        <p:nvPicPr>
-          <p:cNvPr id="2" name="Picture 1" descr="slide-06.png"/>
-          <p:cNvPicPr>
-            <a:picLocks noChangeAspect="1"/>
-          </p:cNvPicPr>
+      <p:sp>
+        <p:nvSpPr>
+          <p:cNvPr id="2" name="TextBox 1"/>
+          <p:cNvSpPr txBox="1"/>
           <p:nvPr/>
-        </p:nvPicPr>
-        <p:blipFill>
-          <a:blip r:embed="rId2"/>
-          <a:stretch>
-            <a:fillRect/>
-          </a:stretch>
-        </p:blipFill>
-        <p:spPr>
-          <a:xfrm>
-            <a:off x="0" y="0"/>
-            <a:ext cx="12188952" cy="6858000"/>
+        </p:nvSpPr>
+        <p:spPr>
+          <a:xfrm>
+            <a:off x="411480" y="228600"/>
+            <a:ext cx="11338560" cy="685800"/>
           </a:xfrm>
           <a:prstGeom prst="rect">
             <a:avLst/>
           </a:prstGeom>
-        </p:spPr>
-      </p:pic>
+          <a:noFill/>
+        </p:spPr>
+        <p:txBody>
+          <a:bodyPr wrap="none">
+            <a:spAutoFit/>
+          </a:bodyPr>
+          <a:lstStyle/>
+          <a:p>
+            <a:pPr>
+              <a:defRPr sz="2800" b="1">
+                <a:solidFill>
+                  <a:srgbClr val="1A1A1A"/>
+                </a:solidFill>
+              </a:defRPr>
+            </a:pPr>
+            <a:r>
+              <a:t>The model (2): a GP on the graph, channels coupled</a:t>
+            </a:r>
+          </a:p>
+        </p:txBody>
+      </p:sp>
+      <p:sp>
+        <p:nvSpPr>
+          <p:cNvPr id="3" name="TextBox 2"/>
+          <p:cNvSpPr txBox="1"/>
+          <p:nvPr/>
+        </p:nvSpPr>
+        <p:spPr>
+          <a:xfrm>
+            <a:off x="822960" y="1097280"/>
+            <a:ext cx="10515600" cy="640080"/>
+          </a:xfrm>
+          <a:prstGeom prst="rect">
+            <a:avLst/>
+          </a:prstGeom>
+          <a:noFill/>
+        </p:spPr>
+        <p:txBody>
+          <a:bodyPr wrap="none">
+            <a:spAutoFit/>
+          </a:bodyPr>
+          <a:lstStyle/>
+          <a:p>
+            <a:pPr>
+              <a:defRPr sz="2000">
+                <a:solidFill>
+                  <a:srgbClr val="0072B2"/>
+                </a:solidFill>
+              </a:defRPr>
+            </a:pPr>
+            <a:r>
+              <a:t>K_G(s) = U g(ν; s) Uᵀ,  g(ν; s) = 1/(1+sν)   ;   Cov[y] = B ⊗ K_G(s)</a:t>
+            </a:r>
+          </a:p>
+        </p:txBody>
+      </p:sp>
+      <p:sp>
+        <p:nvSpPr>
+          <p:cNvPr id="4" name="TextBox 3"/>
+          <p:cNvSpPr txBox="1"/>
+          <p:nvPr/>
+        </p:nvSpPr>
+        <p:spPr>
+          <a:xfrm>
+            <a:off x="822960" y="1874519"/>
+            <a:ext cx="10607040" cy="4389120"/>
+          </a:xfrm>
+          <a:prstGeom prst="rect">
+            <a:avLst/>
+          </a:prstGeom>
+          <a:noFill/>
+        </p:spPr>
+        <p:txBody>
+          <a:bodyPr wrap="square">
+            <a:spAutoFit/>
+          </a:bodyPr>
+          <a:lstStyle/>
+          <a:p>
+            <a:pPr>
+              <a:spcAft>
+                <a:spcPts val="800"/>
+              </a:spcAft>
+              <a:defRPr sz="2000">
+                <a:solidFill>
+                  <a:srgbClr val="1A1A1A"/>
+                </a:solidFill>
+              </a:defRPr>
+            </a:pPr>
+            <a:r>
+              <a:t>• Shape the Laplacian spectrum with one parameter s: smooth-on-the-graph patterns keep their variance, rough ones are shrunk (graph Matérn).</a:t>
+            </a:r>
+          </a:p>
+          <a:p>
+            <a:pPr>
+              <a:spcAft>
+                <a:spcPts val="800"/>
+              </a:spcAft>
+              <a:defRPr sz="2000">
+                <a:solidFill>
+                  <a:srgbClr val="1A1A1A"/>
+                </a:solidFill>
+              </a:defRPr>
+            </a:pPr>
+            <a:r>
+              <a:t>• The channels are correlated: a learned coupling matrix B shares the graph, so an observed channel at one note informs the others at neighbouring notes.</a:t>
+            </a:r>
+          </a:p>
+        </p:txBody>
+      </p:sp>
     </p:spTree>
   </p:cSld>
   <p:clrMapOvr>
@@ -4007,30 +7689,144 @@
         <p:nvPr/>
       </p:nvGrpSpPr>
       <p:grpSpPr/>
-      <p:pic>
-        <p:nvPicPr>
-          <p:cNvPr id="2" name="Picture 1" descr="slide-07.png"/>
-          <p:cNvPicPr>
-            <a:picLocks noChangeAspect="1"/>
-          </p:cNvPicPr>
+      <p:sp>
+        <p:nvSpPr>
+          <p:cNvPr id="2" name="TextBox 1"/>
+          <p:cNvSpPr txBox="1"/>
           <p:nvPr/>
-        </p:nvPicPr>
-        <p:blipFill>
-          <a:blip r:embed="rId2"/>
-          <a:stretch>
-            <a:fillRect/>
-          </a:stretch>
-        </p:blipFill>
-        <p:spPr>
-          <a:xfrm>
-            <a:off x="0" y="0"/>
-            <a:ext cx="12188952" cy="6858000"/>
+        </p:nvSpPr>
+        <p:spPr>
+          <a:xfrm>
+            <a:off x="411480" y="228600"/>
+            <a:ext cx="11338560" cy="685800"/>
           </a:xfrm>
           <a:prstGeom prst="rect">
             <a:avLst/>
           </a:prstGeom>
-        </p:spPr>
-      </p:pic>
+          <a:noFill/>
+        </p:spPr>
+        <p:txBody>
+          <a:bodyPr wrap="none">
+            <a:spAutoFit/>
+          </a:bodyPr>
+          <a:lstStyle/>
+          <a:p>
+            <a:pPr>
+              <a:defRPr sz="2800" b="1">
+                <a:solidFill>
+                  <a:srgbClr val="1A1A1A"/>
+                </a:solidFill>
+              </a:defRPr>
+            </a:pPr>
+            <a:r>
+              <a:t>The model (3): the covariance of one performance</a:t>
+            </a:r>
+          </a:p>
+        </p:txBody>
+      </p:sp>
+      <p:sp>
+        <p:nvSpPr>
+          <p:cNvPr id="3" name="TextBox 2"/>
+          <p:cNvSpPr txBox="1"/>
+          <p:nvPr/>
+        </p:nvSpPr>
+        <p:spPr>
+          <a:xfrm>
+            <a:off x="822960" y="1097280"/>
+            <a:ext cx="10515600" cy="640080"/>
+          </a:xfrm>
+          <a:prstGeom prst="rect">
+            <a:avLst/>
+          </a:prstGeom>
+          <a:noFill/>
+        </p:spPr>
+        <p:txBody>
+          <a:bodyPr wrap="none">
+            <a:spAutoFit/>
+          </a:bodyPr>
+          <a:lstStyle/>
+          <a:p>
+            <a:pPr>
+              <a:defRPr sz="2000">
+                <a:solidFill>
+                  <a:srgbClr val="0072B2"/>
+                </a:solidFill>
+              </a:defRPr>
+            </a:pPr>
+            <a:r>
+              <a:t>K = B⊗K_G(s)  +  Σ_f diag(c_f)⊗X_f X_fᵀ  +  diag(ς²)⊗I</a:t>
+            </a:r>
+          </a:p>
+        </p:txBody>
+      </p:sp>
+      <p:sp>
+        <p:nvSpPr>
+          <p:cNvPr id="4" name="TextBox 3"/>
+          <p:cNvSpPr txBox="1"/>
+          <p:nvPr/>
+        </p:nvSpPr>
+        <p:spPr>
+          <a:xfrm>
+            <a:off x="822960" y="1874519"/>
+            <a:ext cx="10607040" cy="4389120"/>
+          </a:xfrm>
+          <a:prstGeom prst="rect">
+            <a:avLst/>
+          </a:prstGeom>
+          <a:noFill/>
+        </p:spPr>
+        <p:txBody>
+          <a:bodyPr wrap="square">
+            <a:spAutoFit/>
+          </a:bodyPr>
+          <a:lstStyle/>
+          <a:p>
+            <a:pPr>
+              <a:spcAft>
+                <a:spcPts val="800"/>
+              </a:spcAft>
+              <a:defRPr sz="2000">
+                <a:solidFill>
+                  <a:srgbClr val="1A1A1A"/>
+                </a:solidFill>
+              </a:defRPr>
+            </a:pPr>
+            <a:r>
+              <a:t>• Graph term + side-information terms + noise: the whole model is one per-piece covariance matrix.</a:t>
+            </a:r>
+          </a:p>
+          <a:p>
+            <a:pPr>
+              <a:spcAft>
+                <a:spcPts val="800"/>
+              </a:spcAft>
+              <a:defRPr sz="2000">
+                <a:solidFill>
+                  <a:srgbClr val="1A1A1A"/>
+                </a:solidFill>
+              </a:defRPr>
+            </a:pPr>
+            <a:r>
+              <a:t>• Feature weights are re-inferred for every piece — the measured source of the accuracy gain.</a:t>
+            </a:r>
+          </a:p>
+          <a:p>
+            <a:pPr>
+              <a:spcAft>
+                <a:spcPts val="800"/>
+              </a:spcAft>
+              <a:defRPr sz="2000">
+                <a:solidFill>
+                  <a:srgbClr val="1A1A1A"/>
+                </a:solidFill>
+              </a:defRPr>
+            </a:pPr>
+            <a:r>
+              <a:t>• Sixteen numbers per piece, fit by exact evidence; prediction is conjugate, closed form.</a:t>
+            </a:r>
+          </a:p>
+        </p:txBody>
+      </p:sp>
     </p:spTree>
   </p:cSld>
   <p:clrMapOvr>
@@ -4049,9 +7845,44 @@
         <p:nvPr/>
       </p:nvGrpSpPr>
       <p:grpSpPr/>
+      <p:sp>
+        <p:nvSpPr>
+          <p:cNvPr id="2" name="TextBox 1"/>
+          <p:cNvSpPr txBox="1"/>
+          <p:nvPr/>
+        </p:nvSpPr>
+        <p:spPr>
+          <a:xfrm>
+            <a:off x="411480" y="228600"/>
+            <a:ext cx="11338560" cy="685800"/>
+          </a:xfrm>
+          <a:prstGeom prst="rect">
+            <a:avLst/>
+          </a:prstGeom>
+          <a:noFill/>
+        </p:spPr>
+        <p:txBody>
+          <a:bodyPr wrap="none">
+            <a:spAutoFit/>
+          </a:bodyPr>
+          <a:lstStyle/>
+          <a:p>
+            <a:pPr>
+              <a:defRPr sz="2800" b="1">
+                <a:solidFill>
+                  <a:srgbClr val="1A1A1A"/>
+                </a:solidFill>
+              </a:defRPr>
+            </a:pPr>
+            <a:r>
+              <a:t>The model, in one picture</a:t>
+            </a:r>
+          </a:p>
+        </p:txBody>
+      </p:sp>
       <p:pic>
         <p:nvPicPr>
-          <p:cNvPr id="2" name="Picture 1" descr="slide-08.png"/>
+          <p:cNvPr id="3" name="Picture 2" descr="arch_phase1_deck.png"/>
           <p:cNvPicPr>
             <a:picLocks noChangeAspect="1"/>
           </p:cNvPicPr>
@@ -4065,14 +7896,49 @@
         </p:blipFill>
         <p:spPr>
           <a:xfrm>
-            <a:off x="0" y="0"/>
-            <a:ext cx="12188952" cy="6858000"/>
+            <a:off x="1248156" y="1097280"/>
+            <a:ext cx="9692640" cy="4391836"/>
           </a:xfrm>
           <a:prstGeom prst="rect">
             <a:avLst/>
           </a:prstGeom>
         </p:spPr>
       </p:pic>
+      <p:sp>
+        <p:nvSpPr>
+          <p:cNvPr id="4" name="TextBox 3"/>
+          <p:cNvSpPr txBox="1"/>
+          <p:nvPr/>
+        </p:nvSpPr>
+        <p:spPr>
+          <a:xfrm>
+            <a:off x="822960" y="6126480"/>
+            <a:ext cx="10607040" cy="640080"/>
+          </a:xfrm>
+          <a:prstGeom prst="rect">
+            <a:avLst/>
+          </a:prstGeom>
+          <a:noFill/>
+        </p:spPr>
+        <p:txBody>
+          <a:bodyPr wrap="square">
+            <a:spAutoFit/>
+          </a:bodyPr>
+          <a:lstStyle/>
+          <a:p>
+            <a:pPr>
+              <a:defRPr sz="1300">
+                <a:solidFill>
+                  <a:srgbClr val="6B7280"/>
+                </a:solidFill>
+              </a:defRPr>
+            </a:pPr>
+            <a:r>
+              <a:t>Blue: score graph → L_G → K_G. Amber: features as linear kernels. Vermilion: the likelihood, the only block that changes across the phases.</a:t>
+            </a:r>
+          </a:p>
+        </p:txBody>
+      </p:sp>
     </p:spTree>
   </p:cSld>
   <p:clrMapOvr>
@@ -4091,30 +7957,129 @@
         <p:nvPr/>
       </p:nvGrpSpPr>
       <p:grpSpPr/>
-      <p:pic>
-        <p:nvPicPr>
-          <p:cNvPr id="2" name="Picture 1" descr="slide-09.png"/>
-          <p:cNvPicPr>
-            <a:picLocks noChangeAspect="1"/>
-          </p:cNvPicPr>
+      <p:sp>
+        <p:nvSpPr>
+          <p:cNvPr id="2" name="TextBox 1"/>
+          <p:cNvSpPr txBox="1"/>
           <p:nvPr/>
-        </p:nvPicPr>
-        <p:blipFill>
-          <a:blip r:embed="rId2"/>
-          <a:stretch>
-            <a:fillRect/>
-          </a:stretch>
-        </p:blipFill>
-        <p:spPr>
-          <a:xfrm>
-            <a:off x="0" y="0"/>
-            <a:ext cx="12188952" cy="6858000"/>
+        </p:nvSpPr>
+        <p:spPr>
+          <a:xfrm>
+            <a:off x="411480" y="228600"/>
+            <a:ext cx="11338560" cy="685800"/>
           </a:xfrm>
           <a:prstGeom prst="rect">
             <a:avLst/>
           </a:prstGeom>
-        </p:spPr>
-      </p:pic>
+          <a:noFill/>
+        </p:spPr>
+        <p:txBody>
+          <a:bodyPr wrap="none">
+            <a:spAutoFit/>
+          </a:bodyPr>
+          <a:lstStyle/>
+          <a:p>
+            <a:pPr>
+              <a:defRPr sz="2800" b="1">
+                <a:solidFill>
+                  <a:srgbClr val="1A1A1A"/>
+                </a:solidFill>
+              </a:defRPr>
+            </a:pPr>
+            <a:r>
+              <a:t>Phase 1: the setting (piano, aligned MIDI)</a:t>
+            </a:r>
+          </a:p>
+        </p:txBody>
+      </p:sp>
+      <p:sp>
+        <p:nvSpPr>
+          <p:cNvPr id="3" name="TextBox 2"/>
+          <p:cNvSpPr txBox="1"/>
+          <p:nvPr/>
+        </p:nvSpPr>
+        <p:spPr>
+          <a:xfrm>
+            <a:off x="822960" y="1097280"/>
+            <a:ext cx="10515600" cy="640080"/>
+          </a:xfrm>
+          <a:prstGeom prst="rect">
+            <a:avLst/>
+          </a:prstGeom>
+          <a:noFill/>
+        </p:spPr>
+        <p:txBody>
+          <a:bodyPr wrap="none">
+            <a:spAutoFit/>
+          </a:bodyPr>
+          <a:lstStyle/>
+          <a:p>
+            <a:pPr>
+              <a:defRPr sz="2000">
+                <a:solidFill>
+                  <a:srgbClr val="0072B2"/>
+                </a:solidFill>
+              </a:defRPr>
+            </a:pPr>
+            <a:r>
+              <a:t>yᵢ = [ τᵢ (onset timing),  log rᵢ (articulation),  vᵢ (velocity) ]</a:t>
+            </a:r>
+          </a:p>
+        </p:txBody>
+      </p:sp>
+      <p:sp>
+        <p:nvSpPr>
+          <p:cNvPr id="4" name="TextBox 3"/>
+          <p:cNvSpPr txBox="1"/>
+          <p:nvPr/>
+        </p:nvSpPr>
+        <p:spPr>
+          <a:xfrm>
+            <a:off x="822960" y="1874519"/>
+            <a:ext cx="10607040" cy="4389120"/>
+          </a:xfrm>
+          <a:prstGeom prst="rect">
+            <a:avLst/>
+          </a:prstGeom>
+          <a:noFill/>
+        </p:spPr>
+        <p:txBody>
+          <a:bodyPr wrap="square">
+            <a:spAutoFit/>
+          </a:bodyPr>
+          <a:lstStyle/>
+          <a:p>
+            <a:pPr>
+              <a:spcAft>
+                <a:spcPts val="800"/>
+              </a:spcAft>
+              <a:defRPr sz="2000">
+                <a:solidFill>
+                  <a:srgbClr val="1A1A1A"/>
+                </a:solidFill>
+              </a:defRPr>
+            </a:pPr>
+            <a:r>
+              <a:t>• A Disklavier records exactly what the pianist controlled: three variables per note, read directly, no estimation.</a:t>
+            </a:r>
+          </a:p>
+          <a:p>
+            <a:pPr>
+              <a:spcAft>
+                <a:spcPts val="800"/>
+              </a:spcAft>
+              <a:defRPr sz="2000">
+                <a:solidFill>
+                  <a:srgbClr val="1A1A1A"/>
+                </a:solidFill>
+              </a:defRPr>
+            </a:pPr>
+            <a:r>
+              <a:t>• The question: on held-out notes, how good are the estimates, and can the error bars be trusted?</a:t>
+            </a:r>
+          </a:p>
+        </p:txBody>
+      </p:sp>
     </p:spTree>
   </p:cSld>
   <p:clrMapOvr>
@@ -4441,4 +8406,324 @@
   </a:objectDefaults>
   <a:extraClrSchemeLst/>
 </a:theme>
+</file>
+
+<file path=ppt/theme/theme2.xml><?xml version="1.0" encoding="utf-8"?>
+<a:theme xmlns:a="http://schemas.openxmlformats.org/drawingml/2006/main" name="Office Theme">
+  <a:themeElements>
+    <a:clrScheme name="Office">
+      <a:dk1>
+        <a:sysClr val="windowText" lastClr="000000"/>
+      </a:dk1>
+      <a:lt1>
+        <a:sysClr val="window" lastClr="FFFFFF"/>
+      </a:lt1>
+      <a:dk2>
+        <a:srgbClr val="1F497D"/>
+      </a:dk2>
+      <a:lt2>
+        <a:srgbClr val="EEECE1"/>
+      </a:lt2>
+      <a:accent1>
+        <a:srgbClr val="4F81BD"/>
+      </a:accent1>
+      <a:accent2>
+        <a:srgbClr val="C0504D"/>
+      </a:accent2>
+      <a:accent3>
+        <a:srgbClr val="9BBB59"/>
+      </a:accent3>
+      <a:accent4>
+        <a:srgbClr val="8064A2"/>
+      </a:accent4>
+      <a:accent5>
+        <a:srgbClr val="4BACC6"/>
+      </a:accent5>
+      <a:accent6>
+        <a:srgbClr val="F79646"/>
+      </a:accent6>
+      <a:hlink>
+        <a:srgbClr val="0000FF"/>
+      </a:hlink>
+      <a:folHlink>
+        <a:srgbClr val="800080"/>
+      </a:folHlink>
+    </a:clrScheme>
+    <a:fontScheme name="Office">
+      <a:majorFont>
+        <a:latin typeface="Calibri"/>
+        <a:ea typeface=""/>
+        <a:cs typeface=""/>
+        <a:font script="Jpan" typeface="ＭＳ Ｐゴシック"/>
+        <a:font script="Hang" typeface="맑은 고딕"/>
+        <a:font script="Hans" typeface="宋体"/>
+        <a:font script="Hant" typeface="新細明體"/>
+        <a:font script="Arab" typeface="Times New Roman"/>
+        <a:font script="Hebr" typeface="Times New Roman"/>
+        <a:font script="Thai" typeface="Angsana New"/>
+        <a:font script="Ethi" typeface="Nyala"/>
+        <a:font script="Beng" typeface="Vrinda"/>
+        <a:font script="Gujr" typeface="Shruti"/>
+        <a:font script="Khmr" typeface="MoolBoran"/>
+        <a:font script="Knda" typeface="Tunga"/>
+        <a:font script="Guru" typeface="Raavi"/>
+        <a:font script="Cans" typeface="Euphemia"/>
+        <a:font script="Cher" typeface="Plantagenet Cherokee"/>
+        <a:font script="Yiii" typeface="Microsoft Yi Baiti"/>
+        <a:font script="Tibt" typeface="Microsoft Himalaya"/>
+        <a:font script="Thaa" typeface="MV Boli"/>
+        <a:font script="Deva" typeface="Mangal"/>
+        <a:font script="Telu" typeface="Gautami"/>
+        <a:font script="Taml" typeface="Latha"/>
+        <a:font script="Syrc" typeface="Estrangelo Edessa"/>
+        <a:font script="Orya" typeface="Kalinga"/>
+        <a:font script="Mlym" typeface="Kartika"/>
+        <a:font script="Laoo" typeface="DokChampa"/>
+        <a:font script="Sinh" typeface="Iskoola Pota"/>
+        <a:font script="Mong" typeface="Mongolian Baiti"/>
+        <a:font script="Viet" typeface="Times New Roman"/>
+        <a:font script="Uigh" typeface="Microsoft Uighur"/>
+        <a:font script="Geor" typeface="Sylfaen"/>
+      </a:majorFont>
+      <a:minorFont>
+        <a:latin typeface="Calibri"/>
+        <a:ea typeface=""/>
+        <a:cs typeface=""/>
+        <a:font script="Jpan" typeface="ＭＳ Ｐゴシック"/>
+        <a:font script="Hang" typeface="맑은 고딕"/>
+        <a:font script="Hans" typeface="宋体"/>
+        <a:font script="Hant" typeface="新細明體"/>
+        <a:font script="Arab" typeface="Arial"/>
+        <a:font script="Hebr" typeface="Arial"/>
+        <a:font script="Thai" typeface="Cordia New"/>
+        <a:font script="Ethi" typeface="Nyala"/>
+        <a:font script="Beng" typeface="Vrinda"/>
+        <a:font script="Gujr" typeface="Shruti"/>
+        <a:font script="Khmr" typeface="DaunPenh"/>
+        <a:font script="Knda" typeface="Tunga"/>
+        <a:font script="Guru" typeface="Raavi"/>
+        <a:font script="Cans" typeface="Euphemia"/>
+        <a:font script="Cher" typeface="Plantagenet Cherokee"/>
+        <a:font script="Yiii" typeface="Microsoft Yi Baiti"/>
+        <a:font script="Tibt" typeface="Microsoft Himalaya"/>
+        <a:font script="Thaa" typeface="MV Boli"/>
+        <a:font script="Deva" typeface="Mangal"/>
+        <a:font script="Telu" typeface="Gautami"/>
+        <a:font script="Taml" typeface="Latha"/>
+        <a:font script="Syrc" typeface="Estrangelo Edessa"/>
+        <a:font script="Orya" typeface="Kalinga"/>
+        <a:font script="Mlym" typeface="Kartika"/>
+        <a:font script="Laoo" typeface="DokChampa"/>
+        <a:font script="Sinh" typeface="Iskoola Pota"/>
+        <a:font script="Mong" typeface="Mongolian Baiti"/>
+        <a:font script="Viet" typeface="Arial"/>
+        <a:font script="Uigh" typeface="Microsoft Uighur"/>
+        <a:font script="Geor" typeface="Sylfaen"/>
+      </a:minorFont>
+    </a:fontScheme>
+    <a:fmtScheme name="Office">
+      <a:fillStyleLst>
+        <a:solidFill>
+          <a:schemeClr val="phClr"/>
+        </a:solidFill>
+        <a:gradFill rotWithShape="1">
+          <a:gsLst>
+            <a:gs pos="0">
+              <a:schemeClr val="phClr">
+                <a:tint val="50000"/>
+                <a:satMod val="300000"/>
+              </a:schemeClr>
+            </a:gs>
+            <a:gs pos="35000">
+              <a:schemeClr val="phClr">
+                <a:tint val="37000"/>
+                <a:satMod val="300000"/>
+              </a:schemeClr>
+            </a:gs>
+            <a:gs pos="100000">
+              <a:schemeClr val="phClr">
+                <a:tint val="15000"/>
+                <a:satMod val="350000"/>
+              </a:schemeClr>
+            </a:gs>
+          </a:gsLst>
+          <a:lin ang="16200000" scaled="1"/>
+        </a:gradFill>
+        <a:gradFill rotWithShape="1">
+          <a:gsLst>
+            <a:gs pos="0">
+              <a:schemeClr val="phClr">
+                <a:tint val="100000"/>
+                <a:shade val="100000"/>
+                <a:satMod val="130000"/>
+              </a:schemeClr>
+            </a:gs>
+            <a:gs pos="100000">
+              <a:schemeClr val="phClr">
+                <a:tint val="50000"/>
+                <a:shade val="100000"/>
+                <a:satMod val="350000"/>
+              </a:schemeClr>
+            </a:gs>
+          </a:gsLst>
+          <a:lin ang="16200000" scaled="0"/>
+        </a:gradFill>
+      </a:fillStyleLst>
+      <a:lnStyleLst>
+        <a:ln w="9525" cap="flat" cmpd="sng" algn="ctr">
+          <a:solidFill>
+            <a:schemeClr val="phClr">
+              <a:shade val="95000"/>
+              <a:satMod val="105000"/>
+            </a:schemeClr>
+          </a:solidFill>
+          <a:prstDash val="solid"/>
+        </a:ln>
+        <a:ln w="25400" cap="flat" cmpd="sng" algn="ctr">
+          <a:solidFill>
+            <a:schemeClr val="phClr"/>
+          </a:solidFill>
+          <a:prstDash val="solid"/>
+        </a:ln>
+        <a:ln w="38100" cap="flat" cmpd="sng" algn="ctr">
+          <a:solidFill>
+            <a:schemeClr val="phClr"/>
+          </a:solidFill>
+          <a:prstDash val="solid"/>
+        </a:ln>
+      </a:lnStyleLst>
+      <a:effectStyleLst>
+        <a:effectStyle>
+          <a:effectLst>
+            <a:outerShdw blurRad="40000" dist="20000" dir="5400000" rotWithShape="0">
+              <a:srgbClr val="000000">
+                <a:alpha val="38000"/>
+              </a:srgbClr>
+            </a:outerShdw>
+          </a:effectLst>
+        </a:effectStyle>
+        <a:effectStyle>
+          <a:effectLst>
+            <a:outerShdw blurRad="40000" dist="23000" dir="5400000" rotWithShape="0">
+              <a:srgbClr val="000000">
+                <a:alpha val="35000"/>
+              </a:srgbClr>
+            </a:outerShdw>
+          </a:effectLst>
+        </a:effectStyle>
+        <a:effectStyle>
+          <a:effectLst>
+            <a:outerShdw blurRad="40000" dist="23000" dir="5400000" rotWithShape="0">
+              <a:srgbClr val="000000">
+                <a:alpha val="35000"/>
+              </a:srgbClr>
+            </a:outerShdw>
+          </a:effectLst>
+          <a:scene3d>
+            <a:camera prst="orthographicFront">
+              <a:rot lat="0" lon="0" rev="0"/>
+            </a:camera>
+            <a:lightRig rig="threePt" dir="t">
+              <a:rot lat="0" lon="0" rev="1200000"/>
+            </a:lightRig>
+          </a:scene3d>
+          <a:sp3d>
+            <a:bevelT w="63500" h="25400"/>
+          </a:sp3d>
+        </a:effectStyle>
+      </a:effectStyleLst>
+      <a:bgFillStyleLst>
+        <a:solidFill>
+          <a:schemeClr val="phClr"/>
+        </a:solidFill>
+        <a:gradFill rotWithShape="1">
+          <a:gsLst>
+            <a:gs pos="0">
+              <a:schemeClr val="phClr">
+                <a:tint val="40000"/>
+                <a:satMod val="350000"/>
+              </a:schemeClr>
+            </a:gs>
+            <a:gs pos="40000">
+              <a:schemeClr val="phClr">
+                <a:tint val="45000"/>
+                <a:shade val="99000"/>
+                <a:satMod val="350000"/>
+              </a:schemeClr>
+            </a:gs>
+            <a:gs pos="100000">
+              <a:schemeClr val="phClr">
+                <a:shade val="20000"/>
+                <a:satMod val="255000"/>
+              </a:schemeClr>
+            </a:gs>
+          </a:gsLst>
+          <a:path path="circle">
+            <a:fillToRect l="50000" t="-80000" r="50000" b="180000"/>
+          </a:path>
+        </a:gradFill>
+        <a:gradFill rotWithShape="1">
+          <a:gsLst>
+            <a:gs pos="0">
+              <a:schemeClr val="phClr">
+                <a:tint val="80000"/>
+                <a:satMod val="300000"/>
+              </a:schemeClr>
+            </a:gs>
+            <a:gs pos="100000">
+              <a:schemeClr val="phClr">
+                <a:shade val="30000"/>
+                <a:satMod val="200000"/>
+              </a:schemeClr>
+            </a:gs>
+          </a:gsLst>
+          <a:path path="circle">
+            <a:fillToRect l="50000" t="50000" r="50000" b="50000"/>
+          </a:path>
+        </a:gradFill>
+      </a:bgFillStyleLst>
+    </a:fmtScheme>
+  </a:themeElements>
+  <a:objectDefaults>
+    <a:spDef>
+      <a:spPr/>
+      <a:bodyPr/>
+      <a:lstStyle/>
+      <a:style>
+        <a:lnRef idx="1">
+          <a:schemeClr val="accent1"/>
+        </a:lnRef>
+        <a:fillRef idx="3">
+          <a:schemeClr val="accent1"/>
+        </a:fillRef>
+        <a:effectRef idx="2">
+          <a:schemeClr val="accent1"/>
+        </a:effectRef>
+        <a:fontRef idx="minor">
+          <a:schemeClr val="lt1"/>
+        </a:fontRef>
+      </a:style>
+    </a:spDef>
+    <a:lnDef>
+      <a:spPr/>
+      <a:bodyPr/>
+      <a:lstStyle/>
+      <a:style>
+        <a:lnRef idx="2">
+          <a:schemeClr val="accent1"/>
+        </a:lnRef>
+        <a:fillRef idx="0">
+          <a:schemeClr val="accent1"/>
+        </a:fillRef>
+        <a:effectRef idx="1">
+          <a:schemeClr val="accent1"/>
+        </a:effectRef>
+        <a:fontRef idx="minor">
+          <a:schemeClr val="tx1"/>
+        </a:fontRef>
+      </a:style>
+    </a:lnDef>
+  </a:objectDefaults>
+  <a:extraClrSchemeLst/>
+</a:theme>
 </file>
--- a/docs/slides/deck_week.pptx
+++ b/docs/slides/deck_week.pptx
@@ -4937,8 +4937,8 @@
         </p:nvSpPr>
         <p:spPr>
           <a:xfrm>
-            <a:off x="914400" y="2377440"/>
-            <a:ext cx="10332720" cy="1645920"/>
+            <a:off x="11430000" y="6446520"/>
+            <a:ext cx="640080" cy="320040"/>
           </a:xfrm>
           <a:prstGeom prst="rect">
             <a:avLst/>
@@ -4952,26 +4952,118 @@
           <a:lstStyle/>
           <a:p>
             <a:pPr>
-              <a:defRPr sz="3200" b="1">
+              <a:defRPr sz="1200" b="0">
+                <a:solidFill>
+                  <a:srgbClr val="6B7280"/>
+                </a:solidFill>
+                <a:latin typeface="Segoe UI"/>
+              </a:defRPr>
+            </a:pPr>
+            <a:r>
+              <a:t>1</a:t>
+            </a:r>
+          </a:p>
+        </p:txBody>
+      </p:sp>
+      <p:sp>
+        <p:nvSpPr>
+          <p:cNvPr id="3" name="Rectangle 2"/>
+          <p:cNvSpPr/>
+          <p:nvPr/>
+        </p:nvSpPr>
+        <p:spPr>
+          <a:xfrm>
+            <a:off x="0" y="2103120"/>
+            <a:ext cx="12188952" cy="38100"/>
+          </a:xfrm>
+          <a:prstGeom prst="rect">
+            <a:avLst/>
+          </a:prstGeom>
+          <a:solidFill>
+            <a:srgbClr val="0072B2"/>
+          </a:solidFill>
+          <a:ln>
+            <a:noFill/>
+          </a:ln>
+          <a:effectLst/>
+        </p:spPr>
+        <p:style>
+          <a:lnRef idx="1">
+            <a:schemeClr val="accent1"/>
+          </a:lnRef>
+          <a:fillRef idx="3">
+            <a:schemeClr val="accent1"/>
+          </a:fillRef>
+          <a:effectRef idx="2">
+            <a:schemeClr val="accent1"/>
+          </a:effectRef>
+          <a:fontRef idx="minor">
+            <a:schemeClr val="lt1"/>
+          </a:fontRef>
+        </p:style>
+        <p:txBody>
+          <a:bodyPr rtlCol="0" anchor="ctr"/>
+          <a:lstStyle/>
+          <a:p>
+            <a:pPr algn="ctr"/>
+          </a:p>
+        </p:txBody>
+      </p:sp>
+      <p:sp>
+        <p:nvSpPr>
+          <p:cNvPr id="4" name="TextBox 3"/>
+          <p:cNvSpPr txBox="1"/>
+          <p:nvPr/>
+        </p:nvSpPr>
+        <p:spPr>
+          <a:xfrm>
+            <a:off x="914400" y="2468880"/>
+            <a:ext cx="10332720" cy="2011680"/>
+          </a:xfrm>
+          <a:prstGeom prst="rect">
+            <a:avLst/>
+          </a:prstGeom>
+          <a:noFill/>
+        </p:spPr>
+        <p:txBody>
+          <a:bodyPr wrap="none">
+            <a:spAutoFit/>
+          </a:bodyPr>
+          <a:lstStyle/>
+          <a:p>
+            <a:pPr>
+              <a:defRPr sz="3400" b="1">
                 <a:solidFill>
                   <a:srgbClr val="1A1A1A"/>
                 </a:solidFill>
+                <a:latin typeface="Segoe UI"/>
               </a:defRPr>
             </a:pPr>
             <a:r>
               <a:t>Expressive Performance as a Gaussian Process on a Musical Score Graph</a:t>
             </a:r>
+          </a:p>
+          <a:p>
+            <a:pPr>
+              <a:defRPr sz="1200" b="0">
+                <a:solidFill>
+                  <a:srgbClr val="1A1A1A"/>
+                </a:solidFill>
+                <a:latin typeface="Segoe UI"/>
+              </a:defRPr>
+            </a:pPr>
           </a:p>
           <a:p>
             <a:pPr>
               <a:defRPr sz="1800" b="0">
                 <a:solidFill>
-                  <a:srgbClr val="1A1A1A"/>
-                </a:solidFill>
+                  <a:srgbClr val="6B7280"/>
+                </a:solidFill>
+                <a:latin typeface="Segoe UI"/>
               </a:defRPr>
             </a:pPr>
             <a:r>
-              <a:t>Raynaldi Lalang — Kyoto University — October 2026</a:t>
+              <a:t>Raynaldi Lalang   ·   Kyoto University   ·   October 2026</a:t>
             </a:r>
           </a:p>
         </p:txBody>
@@ -5002,8 +5094,8 @@
         </p:nvSpPr>
         <p:spPr>
           <a:xfrm>
-            <a:off x="411480" y="228600"/>
-            <a:ext cx="11338560" cy="685800"/>
+            <a:off x="11430000" y="6446520"/>
+            <a:ext cx="640080" cy="320040"/>
           </a:xfrm>
           <a:prstGeom prst="rect">
             <a:avLst/>
@@ -5017,14 +5109,15 @@
           <a:lstStyle/>
           <a:p>
             <a:pPr>
-              <a:defRPr sz="2800" b="1">
-                <a:solidFill>
-                  <a:srgbClr val="1A1A1A"/>
-                </a:solidFill>
+              <a:defRPr sz="1200" b="0">
+                <a:solidFill>
+                  <a:srgbClr val="6B7280"/>
+                </a:solidFill>
+                <a:latin typeface="Segoe UI"/>
               </a:defRPr>
             </a:pPr>
             <a:r>
-              <a:t>Phase 1: results (piano, ASAP)</a:t>
+              <a:t>10</a:t>
             </a:r>
           </a:p>
         </p:txBody>
@@ -5037,6 +5130,86 @@
         </p:nvSpPr>
         <p:spPr>
           <a:xfrm>
+            <a:off x="411480" y="228600"/>
+            <a:ext cx="11338560" cy="685800"/>
+          </a:xfrm>
+          <a:prstGeom prst="rect">
+            <a:avLst/>
+          </a:prstGeom>
+          <a:noFill/>
+        </p:spPr>
+        <p:txBody>
+          <a:bodyPr wrap="none">
+            <a:spAutoFit/>
+          </a:bodyPr>
+          <a:lstStyle/>
+          <a:p>
+            <a:pPr>
+              <a:defRPr sz="2800" b="1">
+                <a:solidFill>
+                  <a:srgbClr val="1A1A1A"/>
+                </a:solidFill>
+                <a:latin typeface="Segoe UI"/>
+              </a:defRPr>
+            </a:pPr>
+            <a:r>
+              <a:t>Phase 1: results (piano, ASAP)</a:t>
+            </a:r>
+          </a:p>
+        </p:txBody>
+      </p:sp>
+      <p:sp>
+        <p:nvSpPr>
+          <p:cNvPr id="4" name="Rectangle 3"/>
+          <p:cNvSpPr/>
+          <p:nvPr/>
+        </p:nvSpPr>
+        <p:spPr>
+          <a:xfrm>
+            <a:off x="457200" y="896112"/>
+            <a:ext cx="11247120" cy="27940"/>
+          </a:xfrm>
+          <a:prstGeom prst="rect">
+            <a:avLst/>
+          </a:prstGeom>
+          <a:solidFill>
+            <a:srgbClr val="0072B2"/>
+          </a:solidFill>
+          <a:ln>
+            <a:noFill/>
+          </a:ln>
+          <a:effectLst/>
+        </p:spPr>
+        <p:style>
+          <a:lnRef idx="1">
+            <a:schemeClr val="accent1"/>
+          </a:lnRef>
+          <a:fillRef idx="3">
+            <a:schemeClr val="accent1"/>
+          </a:fillRef>
+          <a:effectRef idx="2">
+            <a:schemeClr val="accent1"/>
+          </a:effectRef>
+          <a:fontRef idx="minor">
+            <a:schemeClr val="lt1"/>
+          </a:fontRef>
+        </p:style>
+        <p:txBody>
+          <a:bodyPr rtlCol="0" anchor="ctr"/>
+          <a:lstStyle/>
+          <a:p>
+            <a:pPr algn="ctr"/>
+          </a:p>
+        </p:txBody>
+      </p:sp>
+      <p:sp>
+        <p:nvSpPr>
+          <p:cNvPr id="5" name="TextBox 4"/>
+          <p:cNvSpPr txBox="1"/>
+          <p:nvPr/>
+        </p:nvSpPr>
+        <p:spPr>
+          <a:xfrm>
             <a:off x="822960" y="1097280"/>
             <a:ext cx="10607040" cy="4389120"/>
           </a:xfrm>
@@ -5053,61 +5226,65 @@
           <a:p>
             <a:pPr>
               <a:spcAft>
-                <a:spcPts val="800"/>
+                <a:spcPts val="1000"/>
               </a:spcAft>
-              <a:defRPr sz="2000">
+              <a:defRPr sz="2000" b="0">
                 <a:solidFill>
                   <a:srgbClr val="1A1A1A"/>
                 </a:solidFill>
+                <a:latin typeface="Segoe UI"/>
               </a:defRPr>
             </a:pPr>
             <a:r>
-              <a:t>• Preregistered, scored once on 20 untouched pieces, against the two-stage pipeline the model contains.</a:t>
+              <a:t>•  Preregistered, scored once on 20 untouched pieces, against the two-stage pipeline the model contains.</a:t>
             </a:r>
           </a:p>
           <a:p>
             <a:pPr>
               <a:spcAft>
-                <a:spcPts val="800"/>
+                <a:spcPts val="1000"/>
               </a:spcAft>
-              <a:defRPr sz="2000">
+              <a:defRPr sz="2000" b="0">
                 <a:solidFill>
                   <a:srgbClr val="1A1A1A"/>
                 </a:solidFill>
+                <a:latin typeface="Segoe UI"/>
               </a:defRPr>
             </a:pPr>
             <a:r>
-              <a:t>• Accuracy: RMSE 0.376 vs 0.393 (pooled over the three channels), paired per-piece difference significant.</a:t>
+              <a:t>•  Accuracy: RMSE 0.376 vs 0.393 (pooled over the three channels), paired per-piece difference significant.</a:t>
             </a:r>
           </a:p>
           <a:p>
             <a:pPr>
               <a:spcAft>
-                <a:spcPts val="800"/>
+                <a:spcPts val="1000"/>
               </a:spcAft>
-              <a:defRPr sz="2000">
+              <a:defRPr sz="2000" b="0">
                 <a:solidFill>
                   <a:srgbClr val="1A1A1A"/>
                 </a:solidFill>
+                <a:latin typeface="Segoe UI"/>
               </a:defRPr>
             </a:pPr>
             <a:r>
-              <a:t>• Calibration: the graph's log-score contribution significant; coverage 0.925 at nominal 0.90.</a:t>
+              <a:t>•  Calibration: the graph's log-score contribution significant; coverage 0.925 at nominal 0.90.</a:t>
             </a:r>
           </a:p>
           <a:p>
             <a:pPr>
               <a:spcAft>
-                <a:spcPts val="800"/>
+                <a:spcPts val="1000"/>
               </a:spcAft>
-              <a:defRPr sz="2000">
+              <a:defRPr sz="2000" b="0">
                 <a:solidFill>
                   <a:srgbClr val="1A1A1A"/>
                 </a:solidFill>
+                <a:latin typeface="Segoe UI"/>
               </a:defRPr>
             </a:pPr>
             <a:r>
-              <a:t>• Attribution: the features carry the mean, the graph carries the calibration.</a:t>
+              <a:t>•  Attribution: the features carry the mean, the graph carries the calibration.</a:t>
             </a:r>
           </a:p>
         </p:txBody>
@@ -5138,8 +5315,8 @@
         </p:nvSpPr>
         <p:spPr>
           <a:xfrm>
-            <a:off x="411480" y="228600"/>
-            <a:ext cx="11338560" cy="685800"/>
+            <a:off x="11430000" y="6446520"/>
+            <a:ext cx="640080" cy="320040"/>
           </a:xfrm>
           <a:prstGeom prst="rect">
             <a:avLst/>
@@ -5153,14 +5330,15 @@
           <a:lstStyle/>
           <a:p>
             <a:pPr>
-              <a:defRPr sz="2800" b="1">
-                <a:solidFill>
-                  <a:srgbClr val="1A1A1A"/>
-                </a:solidFill>
+              <a:defRPr sz="1200" b="0">
+                <a:solidFill>
+                  <a:srgbClr val="6B7280"/>
+                </a:solidFill>
+                <a:latin typeface="Segoe UI"/>
               </a:defRPr>
             </a:pPr>
             <a:r>
-              <a:t>Phase 2: from audio to the cents curve</a:t>
+              <a:t>11</a:t>
             </a:r>
           </a:p>
         </p:txBody>
@@ -5173,8 +5351,8 @@
         </p:nvSpPr>
         <p:spPr>
           <a:xfrm>
-            <a:off x="822960" y="1097280"/>
-            <a:ext cx="10515600" cy="640080"/>
+            <a:off x="411480" y="228600"/>
+            <a:ext cx="11338560" cy="685800"/>
           </a:xfrm>
           <a:prstGeom prst="rect">
             <a:avLst/>
@@ -5188,10 +5366,91 @@
           <a:lstStyle/>
           <a:p>
             <a:pPr>
-              <a:defRPr sz="2000">
+              <a:defRPr sz="2800" b="1">
+                <a:solidFill>
+                  <a:srgbClr val="1A1A1A"/>
+                </a:solidFill>
+                <a:latin typeface="Segoe UI"/>
+              </a:defRPr>
+            </a:pPr>
+            <a:r>
+              <a:t>Phase 2: from audio to the cents curve</a:t>
+            </a:r>
+          </a:p>
+        </p:txBody>
+      </p:sp>
+      <p:sp>
+        <p:nvSpPr>
+          <p:cNvPr id="4" name="Rectangle 3"/>
+          <p:cNvSpPr/>
+          <p:nvPr/>
+        </p:nvSpPr>
+        <p:spPr>
+          <a:xfrm>
+            <a:off x="457200" y="896112"/>
+            <a:ext cx="11247120" cy="27940"/>
+          </a:xfrm>
+          <a:prstGeom prst="rect">
+            <a:avLst/>
+          </a:prstGeom>
+          <a:solidFill>
+            <a:srgbClr val="0072B2"/>
+          </a:solidFill>
+          <a:ln>
+            <a:noFill/>
+          </a:ln>
+          <a:effectLst/>
+        </p:spPr>
+        <p:style>
+          <a:lnRef idx="1">
+            <a:schemeClr val="accent1"/>
+          </a:lnRef>
+          <a:fillRef idx="3">
+            <a:schemeClr val="accent1"/>
+          </a:fillRef>
+          <a:effectRef idx="2">
+            <a:schemeClr val="accent1"/>
+          </a:effectRef>
+          <a:fontRef idx="minor">
+            <a:schemeClr val="lt1"/>
+          </a:fontRef>
+        </p:style>
+        <p:txBody>
+          <a:bodyPr rtlCol="0" anchor="ctr"/>
+          <a:lstStyle/>
+          <a:p>
+            <a:pPr algn="ctr"/>
+          </a:p>
+        </p:txBody>
+      </p:sp>
+      <p:sp>
+        <p:nvSpPr>
+          <p:cNvPr id="5" name="TextBox 4"/>
+          <p:cNvSpPr txBox="1"/>
+          <p:nvPr/>
+        </p:nvSpPr>
+        <p:spPr>
+          <a:xfrm>
+            <a:off x="822960" y="1097280"/>
+            <a:ext cx="10515600" cy="640080"/>
+          </a:xfrm>
+          <a:prstGeom prst="rect">
+            <a:avLst/>
+          </a:prstGeom>
+          <a:noFill/>
+        </p:spPr>
+        <p:txBody>
+          <a:bodyPr wrap="none">
+            <a:spAutoFit/>
+          </a:bodyPr>
+          <a:lstStyle/>
+          <a:p>
+            <a:pPr>
+              <a:defRPr sz="2000" b="0">
                 <a:solidFill>
                   <a:srgbClr val="0072B2"/>
                 </a:solidFill>
+                <a:latin typeface="Segoe UI"/>
               </a:defRPr>
             </a:pPr>
             <a:r>
@@ -5202,7 +5461,7 @@
       </p:sp>
       <p:sp>
         <p:nvSpPr>
-          <p:cNvPr id="4" name="TextBox 3"/>
+          <p:cNvPr id="6" name="TextBox 5"/>
           <p:cNvSpPr txBox="1"/>
           <p:nvPr/>
         </p:nvSpPr>
@@ -5224,46 +5483,49 @@
           <a:p>
             <a:pPr>
               <a:spcAft>
-                <a:spcPts val="800"/>
+                <a:spcPts val="1000"/>
               </a:spcAft>
-              <a:defRPr sz="2000">
+              <a:defRPr sz="2000" b="0">
                 <a:solidFill>
                   <a:srgbClr val="1A1A1A"/>
                 </a:solidFill>
+                <a:latin typeface="Segoe UI"/>
               </a:defRPr>
             </a:pPr>
             <a:r>
-              <a:t>• A pitch tracker gives frames: time, f₀, voicing confidence.</a:t>
+              <a:t>•  A pitch tracker gives frames: time, f₀, voicing confidence.</a:t>
             </a:r>
           </a:p>
           <a:p>
             <a:pPr>
               <a:spcAft>
-                <a:spcPts val="800"/>
+                <a:spcPts val="1000"/>
               </a:spcAft>
-              <a:defRPr sz="2000">
+              <a:defRPr sz="2000" b="0">
                 <a:solidFill>
                   <a:srgbClr val="1A1A1A"/>
                 </a:solidFill>
+                <a:latin typeface="Segoe UI"/>
               </a:defRPr>
             </a:pPr>
             <a:r>
-              <a:t>• Frame rule: voiced, confidence above the track's lowest quintile, at least 4 frames per note.</a:t>
+              <a:t>•  Frame rule: voiced, confidence above the track's lowest quintile, at least 4 frames per note.</a:t>
             </a:r>
           </a:p>
           <a:p>
             <a:pPr>
               <a:spcAft>
-                <a:spcPts val="800"/>
+                <a:spcPts val="1000"/>
               </a:spcAft>
-              <a:defRPr sz="2000">
+              <a:defRPr sz="2000" b="0">
                 <a:solidFill>
                   <a:srgbClr val="1A1A1A"/>
                 </a:solidFill>
+                <a:latin typeface="Segoe UI"/>
               </a:defRPr>
             </a:pPr>
             <a:r>
-              <a:t>• Two curves per note — tracked: pYIN, run by us; ground truth: the corpus's own annotation of the same stem. Cleaner, but still a measurement.</a:t>
+              <a:t>•  Two curves per note — tracked: pYIN, run by us; ground truth: the corpus's own annotation of the same stem. Cleaner, but still a measurement.</a:t>
             </a:r>
           </a:p>
         </p:txBody>
@@ -5294,8 +5556,8 @@
         </p:nvSpPr>
         <p:spPr>
           <a:xfrm>
-            <a:off x="411480" y="228600"/>
-            <a:ext cx="11338560" cy="685800"/>
+            <a:off x="11430000" y="6446520"/>
+            <a:ext cx="640080" cy="320040"/>
           </a:xfrm>
           <a:prstGeom prst="rect">
             <a:avLst/>
@@ -5309,14 +5571,15 @@
           <a:lstStyle/>
           <a:p>
             <a:pPr>
-              <a:defRPr sz="2800" b="1">
-                <a:solidFill>
-                  <a:srgbClr val="1A1A1A"/>
-                </a:solidFill>
+              <a:defRPr sz="1200" b="0">
+                <a:solidFill>
+                  <a:srgbClr val="6B7280"/>
+                </a:solidFill>
+                <a:latin typeface="Segoe UI"/>
               </a:defRPr>
             </a:pPr>
             <a:r>
-              <a:t>Phase 2: the pitch-curve channels</a:t>
+              <a:t>12</a:t>
             </a:r>
           </a:p>
         </p:txBody>
@@ -5329,6 +5592,86 @@
         </p:nvSpPr>
         <p:spPr>
           <a:xfrm>
+            <a:off x="411480" y="228600"/>
+            <a:ext cx="11338560" cy="685800"/>
+          </a:xfrm>
+          <a:prstGeom prst="rect">
+            <a:avLst/>
+          </a:prstGeom>
+          <a:noFill/>
+        </p:spPr>
+        <p:txBody>
+          <a:bodyPr wrap="none">
+            <a:spAutoFit/>
+          </a:bodyPr>
+          <a:lstStyle/>
+          <a:p>
+            <a:pPr>
+              <a:defRPr sz="2800" b="1">
+                <a:solidFill>
+                  <a:srgbClr val="1A1A1A"/>
+                </a:solidFill>
+                <a:latin typeface="Segoe UI"/>
+              </a:defRPr>
+            </a:pPr>
+            <a:r>
+              <a:t>Phase 2: the pitch-curve channels</a:t>
+            </a:r>
+          </a:p>
+        </p:txBody>
+      </p:sp>
+      <p:sp>
+        <p:nvSpPr>
+          <p:cNvPr id="4" name="Rectangle 3"/>
+          <p:cNvSpPr/>
+          <p:nvPr/>
+        </p:nvSpPr>
+        <p:spPr>
+          <a:xfrm>
+            <a:off x="457200" y="896112"/>
+            <a:ext cx="11247120" cy="27940"/>
+          </a:xfrm>
+          <a:prstGeom prst="rect">
+            <a:avLst/>
+          </a:prstGeom>
+          <a:solidFill>
+            <a:srgbClr val="0072B2"/>
+          </a:solidFill>
+          <a:ln>
+            <a:noFill/>
+          </a:ln>
+          <a:effectLst/>
+        </p:spPr>
+        <p:style>
+          <a:lnRef idx="1">
+            <a:schemeClr val="accent1"/>
+          </a:lnRef>
+          <a:fillRef idx="3">
+            <a:schemeClr val="accent1"/>
+          </a:fillRef>
+          <a:effectRef idx="2">
+            <a:schemeClr val="accent1"/>
+          </a:effectRef>
+          <a:fontRef idx="minor">
+            <a:schemeClr val="lt1"/>
+          </a:fontRef>
+        </p:style>
+        <p:txBody>
+          <a:bodyPr rtlCol="0" anchor="ctr"/>
+          <a:lstStyle/>
+          <a:p>
+            <a:pPr algn="ctr"/>
+          </a:p>
+        </p:txBody>
+      </p:sp>
+      <p:sp>
+        <p:nvSpPr>
+          <p:cNvPr id="5" name="TextBox 4"/>
+          <p:cNvSpPr txBox="1"/>
+          <p:nvPr/>
+        </p:nvSpPr>
+        <p:spPr>
+          <a:xfrm>
             <a:off x="822960" y="1097280"/>
             <a:ext cx="10607040" cy="4389120"/>
           </a:xfrm>
@@ -5345,76 +5688,81 @@
           <a:p>
             <a:pPr>
               <a:spcAft>
-                <a:spcPts val="800"/>
+                <a:spcPts val="1000"/>
               </a:spcAft>
-              <a:defRPr sz="2000">
+              <a:defRPr sz="2000" b="0">
                 <a:solidFill>
                   <a:srgbClr val="1A1A1A"/>
                 </a:solidFill>
+                <a:latin typeface="Segoe UI"/>
               </a:defRPr>
             </a:pPr>
             <a:r>
-              <a:t>• Within one note: a sustained level plus one oscillation. Three numbers describe it.</a:t>
+              <a:t>•  Within one note: a sustained level plus one oscillation. Three numbers describe it.</a:t>
             </a:r>
           </a:p>
           <a:p>
             <a:pPr>
               <a:spcAft>
-                <a:spcPts val="800"/>
+                <a:spcPts val="1000"/>
               </a:spcAft>
-              <a:defRPr sz="2000">
+              <a:defRPr sz="2000" b="0">
                 <a:solidFill>
                   <a:srgbClr val="1A1A1A"/>
                 </a:solidFill>
+                <a:latin typeface="Segoe UI"/>
               </a:defRPr>
             </a:pPr>
             <a:r>
-              <a:t>• Intonation c (cents): the sustained offset from the written pitch. c &gt; 0 sharp; 100 = a semitone.</a:t>
+              <a:t>•  Intonation c (cents): the sustained offset from the written pitch. c &gt; 0 sharp; 100 = a semitone.</a:t>
             </a:r>
           </a:p>
           <a:p>
             <a:pPr>
               <a:spcAft>
-                <a:spcPts val="800"/>
+                <a:spcPts val="1000"/>
               </a:spcAft>
-              <a:defRPr sz="2000">
+              <a:defRPr sz="2000" b="0">
                 <a:solidFill>
                   <a:srgbClr val="1A1A1A"/>
                 </a:solidFill>
+                <a:latin typeface="Segoe UI"/>
               </a:defRPr>
             </a:pPr>
             <a:r>
-              <a:t>• Vibrato extent γ (cents): the oscillation's amplitude.</a:t>
+              <a:t>•  Vibrato extent γ (cents): the oscillation's amplitude.</a:t>
             </a:r>
           </a:p>
           <a:p>
             <a:pPr>
               <a:spcAft>
-                <a:spcPts val="800"/>
+                <a:spcPts val="1000"/>
               </a:spcAft>
-              <a:defRPr sz="2000">
+              <a:defRPr sz="2000" b="0">
                 <a:solidFill>
                   <a:srgbClr val="1A1A1A"/>
                 </a:solidFill>
+                <a:latin typeface="Segoe UI"/>
               </a:defRPr>
             </a:pPr>
             <a:r>
-              <a:t>• Vibrato rate f (Hz): its frequency; vibrato lives at roughly 4–8 Hz.</a:t>
+              <a:t>•  Vibrato rate f (Hz): its frequency; vibrato lives at roughly 4–8 Hz.</a:t>
             </a:r>
           </a:p>
           <a:p>
             <a:pPr>
               <a:spcAft>
-                <a:spcPts val="800"/>
+                <a:spcPts val="1000"/>
               </a:spcAft>
-              <a:defRPr sz="2000">
+              <a:defRPr sz="2000" b="0">
                 <a:solidFill>
                   <a:srgbClr val="1A1A1A"/>
                 </a:solidFill>
+                <a:latin typeface="Segoe UI"/>
               </a:defRPr>
             </a:pPr>
             <a:r>
-              <a:t>• The bundle carries log γ, log f. No oscillation found: those cells are missing, c remains.</a:t>
+              <a:t>•  The bundle carries log γ, log f. No oscillation found: those cells are missing, c remains.</a:t>
             </a:r>
           </a:p>
         </p:txBody>
@@ -5445,8 +5793,8 @@
         </p:nvSpPr>
         <p:spPr>
           <a:xfrm>
-            <a:off x="411480" y="228600"/>
-            <a:ext cx="11338560" cy="685800"/>
+            <a:off x="11430000" y="6446520"/>
+            <a:ext cx="640080" cy="320040"/>
           </a:xfrm>
           <a:prstGeom prst="rect">
             <a:avLst/>
@@ -5460,21 +5808,102 @@
           <a:lstStyle/>
           <a:p>
             <a:pPr>
+              <a:defRPr sz="1200" b="0">
+                <a:solidFill>
+                  <a:srgbClr val="6B7280"/>
+                </a:solidFill>
+                <a:latin typeface="Segoe UI"/>
+              </a:defRPr>
+            </a:pPr>
+            <a:r>
+              <a:t>13</a:t>
+            </a:r>
+          </a:p>
+        </p:txBody>
+      </p:sp>
+      <p:sp>
+        <p:nvSpPr>
+          <p:cNvPr id="3" name="TextBox 2"/>
+          <p:cNvSpPr txBox="1"/>
+          <p:nvPr/>
+        </p:nvSpPr>
+        <p:spPr>
+          <a:xfrm>
+            <a:off x="411480" y="228600"/>
+            <a:ext cx="11338560" cy="685800"/>
+          </a:xfrm>
+          <a:prstGeom prst="rect">
+            <a:avLst/>
+          </a:prstGeom>
+          <a:noFill/>
+        </p:spPr>
+        <p:txBody>
+          <a:bodyPr wrap="none">
+            <a:spAutoFit/>
+          </a:bodyPr>
+          <a:lstStyle/>
+          <a:p>
+            <a:pPr>
               <a:defRPr sz="2800" b="1">
                 <a:solidFill>
                   <a:srgbClr val="1A1A1A"/>
                 </a:solidFill>
+                <a:latin typeface="Segoe UI"/>
               </a:defRPr>
             </a:pPr>
             <a:r>
               <a:t>Phase 2: what the data looks like</a:t>
             </a:r>
+          </a:p>
+        </p:txBody>
+      </p:sp>
+      <p:sp>
+        <p:nvSpPr>
+          <p:cNvPr id="4" name="Rectangle 3"/>
+          <p:cNvSpPr/>
+          <p:nvPr/>
+        </p:nvSpPr>
+        <p:spPr>
+          <a:xfrm>
+            <a:off x="457200" y="896112"/>
+            <a:ext cx="11247120" cy="27940"/>
+          </a:xfrm>
+          <a:prstGeom prst="rect">
+            <a:avLst/>
+          </a:prstGeom>
+          <a:solidFill>
+            <a:srgbClr val="0072B2"/>
+          </a:solidFill>
+          <a:ln>
+            <a:noFill/>
+          </a:ln>
+          <a:effectLst/>
+        </p:spPr>
+        <p:style>
+          <a:lnRef idx="1">
+            <a:schemeClr val="accent1"/>
+          </a:lnRef>
+          <a:fillRef idx="3">
+            <a:schemeClr val="accent1"/>
+          </a:fillRef>
+          <a:effectRef idx="2">
+            <a:schemeClr val="accent1"/>
+          </a:effectRef>
+          <a:fontRef idx="minor">
+            <a:schemeClr val="lt1"/>
+          </a:fontRef>
+        </p:style>
+        <p:txBody>
+          <a:bodyPr rtlCol="0" anchor="ctr"/>
+          <a:lstStyle/>
+          <a:p>
+            <a:pPr algn="ctr"/>
           </a:p>
         </p:txBody>
       </p:sp>
       <p:pic>
         <p:nvPicPr>
-          <p:cNvPr id="3" name="Picture 2" descr="phase2_frames_intro.png"/>
+          <p:cNvPr id="5" name="Picture 4" descr="phase2_frames_intro.png"/>
           <p:cNvPicPr>
             <a:picLocks noChangeAspect="1"/>
           </p:cNvPicPr>
@@ -5498,7 +5927,7 @@
       </p:pic>
       <p:sp>
         <p:nvSpPr>
-          <p:cNvPr id="4" name="TextBox 3"/>
+          <p:cNvPr id="6" name="TextBox 5"/>
           <p:cNvSpPr txBox="1"/>
           <p:nvPr/>
         </p:nvSpPr>
@@ -5519,10 +5948,11 @@
           <a:lstStyle/>
           <a:p>
             <a:pPr>
-              <a:defRPr sz="1300">
+              <a:defRPr sz="1300" b="0">
                 <a:solidFill>
                   <a:srgbClr val="6B7280"/>
                 </a:solidFill>
+                <a:latin typeface="Segoe UI"/>
               </a:defRPr>
             </a:pPr>
             <a:r>
@@ -5557,8 +5987,8 @@
         </p:nvSpPr>
         <p:spPr>
           <a:xfrm>
-            <a:off x="411480" y="228600"/>
-            <a:ext cx="11338560" cy="685800"/>
+            <a:off x="11430000" y="6446520"/>
+            <a:ext cx="640080" cy="320040"/>
           </a:xfrm>
           <a:prstGeom prst="rect">
             <a:avLst/>
@@ -5572,14 +6002,15 @@
           <a:lstStyle/>
           <a:p>
             <a:pPr>
-              <a:defRPr sz="2800" b="1">
-                <a:solidFill>
-                  <a:srgbClr val="1A1A1A"/>
-                </a:solidFill>
+              <a:defRPr sz="1200" b="0">
+                <a:solidFill>
+                  <a:srgbClr val="6B7280"/>
+                </a:solidFill>
+                <a:latin typeface="Segoe UI"/>
               </a:defRPr>
             </a:pPr>
             <a:r>
-              <a:t>Estimating the channels with a Gaussian process</a:t>
+              <a:t>14</a:t>
             </a:r>
           </a:p>
         </p:txBody>
@@ -5592,8 +6023,8 @@
         </p:nvSpPr>
         <p:spPr>
           <a:xfrm>
-            <a:off x="822960" y="1097280"/>
-            <a:ext cx="10515600" cy="640080"/>
+            <a:off x="411480" y="228600"/>
+            <a:ext cx="11338560" cy="685800"/>
           </a:xfrm>
           <a:prstGeom prst="rect">
             <a:avLst/>
@@ -5607,10 +6038,91 @@
           <a:lstStyle/>
           <a:p>
             <a:pPr>
-              <a:defRPr sz="2000">
+              <a:defRPr sz="2800" b="1">
+                <a:solidFill>
+                  <a:srgbClr val="1A1A1A"/>
+                </a:solidFill>
+                <a:latin typeface="Segoe UI"/>
+              </a:defRPr>
+            </a:pPr>
+            <a:r>
+              <a:t>Estimating the channels with a Gaussian process</a:t>
+            </a:r>
+          </a:p>
+        </p:txBody>
+      </p:sp>
+      <p:sp>
+        <p:nvSpPr>
+          <p:cNvPr id="4" name="Rectangle 3"/>
+          <p:cNvSpPr/>
+          <p:nvPr/>
+        </p:nvSpPr>
+        <p:spPr>
+          <a:xfrm>
+            <a:off x="457200" y="896112"/>
+            <a:ext cx="11247120" cy="27940"/>
+          </a:xfrm>
+          <a:prstGeom prst="rect">
+            <a:avLst/>
+          </a:prstGeom>
+          <a:solidFill>
+            <a:srgbClr val="0072B2"/>
+          </a:solidFill>
+          <a:ln>
+            <a:noFill/>
+          </a:ln>
+          <a:effectLst/>
+        </p:spPr>
+        <p:style>
+          <a:lnRef idx="1">
+            <a:schemeClr val="accent1"/>
+          </a:lnRef>
+          <a:fillRef idx="3">
+            <a:schemeClr val="accent1"/>
+          </a:fillRef>
+          <a:effectRef idx="2">
+            <a:schemeClr val="accent1"/>
+          </a:effectRef>
+          <a:fontRef idx="minor">
+            <a:schemeClr val="lt1"/>
+          </a:fontRef>
+        </p:style>
+        <p:txBody>
+          <a:bodyPr rtlCol="0" anchor="ctr"/>
+          <a:lstStyle/>
+          <a:p>
+            <a:pPr algn="ctr"/>
+          </a:p>
+        </p:txBody>
+      </p:sp>
+      <p:sp>
+        <p:nvSpPr>
+          <p:cNvPr id="5" name="TextBox 4"/>
+          <p:cNvSpPr txBox="1"/>
+          <p:nvPr/>
+        </p:nvSpPr>
+        <p:spPr>
+          <a:xfrm>
+            <a:off x="822960" y="1097280"/>
+            <a:ext cx="10515600" cy="640080"/>
+          </a:xfrm>
+          <a:prstGeom prst="rect">
+            <a:avLst/>
+          </a:prstGeom>
+          <a:noFill/>
+        </p:spPr>
+        <p:txBody>
+          <a:bodyPr wrap="none">
+            <a:spAutoFit/>
+          </a:bodyPr>
+          <a:lstStyle/>
+          <a:p>
+            <a:pPr>
+              <a:defRPr sz="2000" b="0">
                 <a:solidFill>
                   <a:srgbClr val="0072B2"/>
                 </a:solidFill>
+                <a:latin typeface="Segoe UI"/>
               </a:defRPr>
             </a:pPr>
             <a:r>
@@ -5621,7 +6133,7 @@
       </p:sp>
       <p:sp>
         <p:nvSpPr>
-          <p:cNvPr id="4" name="TextBox 3"/>
+          <p:cNvPr id="6" name="TextBox 5"/>
           <p:cNvSpPr txBox="1"/>
           <p:nvPr/>
         </p:nvSpPr>
@@ -5643,61 +6155,65 @@
           <a:p>
             <a:pPr>
               <a:spcAft>
-                <a:spcPts val="800"/>
+                <a:spcPts val="1000"/>
               </a:spcAft>
-              <a:defRPr sz="2000">
+              <a:defRPr sz="2000" b="0">
                 <a:solidFill>
                   <a:srgbClr val="1A1A1A"/>
                 </a:solidFill>
+                <a:latin typeface="Segoe UI"/>
               </a:defRPr>
             </a:pPr>
             <a:r>
-              <a:t>• The cents curve as a Gaussian process, two components: a damped cosine at the vibrato rate, plus a slow drift (a special case of the spectral mixture kernel, Wilson and Adams 2013).</a:t>
+              <a:t>•  The cents curve as a Gaussian process, two components: a damped cosine at the vibrato rate, plus a slow drift (a special case of the spectral mixture kernel, Wilson and Adams 2013).</a:t>
             </a:r>
           </a:p>
           <a:p>
             <a:pPr>
               <a:spcAft>
-                <a:spcPts val="800"/>
+                <a:spcPts val="1000"/>
               </a:spcAft>
-              <a:defRPr sz="2000">
+              <a:defRPr sz="2000" b="0">
                 <a:solidFill>
                   <a:srgbClr val="1A1A1A"/>
                 </a:solidFill>
+                <a:latin typeface="Segoe UI"/>
               </a:defRPr>
             </a:pPr>
             <a:r>
-              <a:t>• The prior states only where the curve's energy lives: a band at the rate, plus a drift band at zero.</a:t>
+              <a:t>•  The prior states only where the curve's energy lives: a band at the rate, plus a drift band at zero.</a:t>
             </a:r>
           </a:p>
           <a:p>
             <a:pPr>
               <a:spcAft>
-                <a:spcPts val="800"/>
+                <a:spcPts val="1000"/>
               </a:spcAft>
-              <a:defRPr sz="2000">
+              <a:defRPr sz="2000" b="0">
                 <a:solidFill>
                   <a:srgbClr val="1A1A1A"/>
                 </a:solidFill>
+                <a:latin typeface="Segoe UI"/>
               </a:defRPr>
             </a:pPr>
             <a:r>
-              <a:t>• Fit per note by exact marginal likelihood; variances from the evidence curvature.</a:t>
+              <a:t>•  Fit per note by exact marginal likelihood; variances from the evidence curvature.</a:t>
             </a:r>
           </a:p>
           <a:p>
             <a:pPr>
               <a:spcAft>
-                <a:spcPts val="800"/>
+                <a:spcPts val="1000"/>
               </a:spcAft>
-              <a:defRPr sz="2000">
+              <a:defRPr sz="2000" b="0">
                 <a:solidFill>
                   <a:srgbClr val="1A1A1A"/>
                 </a:solidFill>
+                <a:latin typeface="Segoe UI"/>
               </a:defRPr>
             </a:pPr>
             <a:r>
-              <a:t>• Channels from the posterior: c the realized average, γ from the vibrato component, f = μ₁.</a:t>
+              <a:t>•  Channels from the posterior: c the realized average, γ from the vibrato component, f = μ₁.</a:t>
             </a:r>
           </a:p>
         </p:txBody>
@@ -5728,8 +6244,8 @@
         </p:nvSpPr>
         <p:spPr>
           <a:xfrm>
-            <a:off x="411480" y="228600"/>
-            <a:ext cx="11338560" cy="685800"/>
+            <a:off x="11430000" y="6446520"/>
+            <a:ext cx="640080" cy="320040"/>
           </a:xfrm>
           <a:prstGeom prst="rect">
             <a:avLst/>
@@ -5743,21 +6259,102 @@
           <a:lstStyle/>
           <a:p>
             <a:pPr>
+              <a:defRPr sz="1200" b="0">
+                <a:solidFill>
+                  <a:srgbClr val="6B7280"/>
+                </a:solidFill>
+                <a:latin typeface="Segoe UI"/>
+              </a:defRPr>
+            </a:pPr>
+            <a:r>
+              <a:t>15</a:t>
+            </a:r>
+          </a:p>
+        </p:txBody>
+      </p:sp>
+      <p:sp>
+        <p:nvSpPr>
+          <p:cNvPr id="3" name="TextBox 2"/>
+          <p:cNvSpPr txBox="1"/>
+          <p:nvPr/>
+        </p:nvSpPr>
+        <p:spPr>
+          <a:xfrm>
+            <a:off x="411480" y="228600"/>
+            <a:ext cx="11338560" cy="685800"/>
+          </a:xfrm>
+          <a:prstGeom prst="rect">
+            <a:avLst/>
+          </a:prstGeom>
+          <a:noFill/>
+        </p:spPr>
+        <p:txBody>
+          <a:bodyPr wrap="none">
+            <a:spAutoFit/>
+          </a:bodyPr>
+          <a:lstStyle/>
+          <a:p>
+            <a:pPr>
               <a:defRPr sz="2800" b="1">
                 <a:solidFill>
                   <a:srgbClr val="1A1A1A"/>
                 </a:solidFill>
+                <a:latin typeface="Segoe UI"/>
               </a:defRPr>
             </a:pPr>
             <a:r>
               <a:t>One real note: the curve and its parts</a:t>
             </a:r>
+          </a:p>
+        </p:txBody>
+      </p:sp>
+      <p:sp>
+        <p:nvSpPr>
+          <p:cNvPr id="4" name="Rectangle 3"/>
+          <p:cNvSpPr/>
+          <p:nvPr/>
+        </p:nvSpPr>
+        <p:spPr>
+          <a:xfrm>
+            <a:off x="457200" y="896112"/>
+            <a:ext cx="11247120" cy="27940"/>
+          </a:xfrm>
+          <a:prstGeom prst="rect">
+            <a:avLst/>
+          </a:prstGeom>
+          <a:solidFill>
+            <a:srgbClr val="0072B2"/>
+          </a:solidFill>
+          <a:ln>
+            <a:noFill/>
+          </a:ln>
+          <a:effectLst/>
+        </p:spPr>
+        <p:style>
+          <a:lnRef idx="1">
+            <a:schemeClr val="accent1"/>
+          </a:lnRef>
+          <a:fillRef idx="3">
+            <a:schemeClr val="accent1"/>
+          </a:fillRef>
+          <a:effectRef idx="2">
+            <a:schemeClr val="accent1"/>
+          </a:effectRef>
+          <a:fontRef idx="minor">
+            <a:schemeClr val="lt1"/>
+          </a:fontRef>
+        </p:style>
+        <p:txBody>
+          <a:bodyPr rtlCol="0" anchor="ctr"/>
+          <a:lstStyle/>
+          <a:p>
+            <a:pPr algn="ctr"/>
           </a:p>
         </p:txBody>
       </p:sp>
       <p:pic>
         <p:nvPicPr>
-          <p:cNvPr id="3" name="Picture 2" descr="sm_estimator_explainer.png"/>
+          <p:cNvPr id="5" name="Picture 4" descr="sm_estimator_explainer.png"/>
           <p:cNvPicPr>
             <a:picLocks noChangeAspect="1"/>
           </p:cNvPicPr>
@@ -5781,7 +6378,7 @@
       </p:pic>
       <p:sp>
         <p:nvSpPr>
-          <p:cNvPr id="4" name="TextBox 3"/>
+          <p:cNvPr id="6" name="TextBox 5"/>
           <p:cNvSpPr txBox="1"/>
           <p:nvPr/>
         </p:nvSpPr>
@@ -5802,10 +6399,11 @@
           <a:lstStyle/>
           <a:p>
             <a:pPr>
-              <a:defRPr sz="1300">
+              <a:defRPr sz="1300" b="0">
                 <a:solidFill>
                   <a:srgbClr val="6B7280"/>
                 </a:solidFill>
+                <a:latin typeface="Segoe UI"/>
               </a:defRPr>
             </a:pPr>
             <a:r>
@@ -5840,8 +6438,8 @@
         </p:nvSpPr>
         <p:spPr>
           <a:xfrm>
-            <a:off x="411480" y="228600"/>
-            <a:ext cx="11338560" cy="685800"/>
+            <a:off x="11430000" y="6446520"/>
+            <a:ext cx="640080" cy="320040"/>
           </a:xfrm>
           <a:prstGeom prst="rect">
             <a:avLst/>
@@ -5855,14 +6453,15 @@
           <a:lstStyle/>
           <a:p>
             <a:pPr>
-              <a:defRPr sz="2800" b="1">
-                <a:solidFill>
-                  <a:srgbClr val="1A1A1A"/>
-                </a:solidFill>
+              <a:defRPr sz="1200" b="0">
+                <a:solidFill>
+                  <a:srgbClr val="6B7280"/>
+                </a:solidFill>
+                <a:latin typeface="Segoe UI"/>
               </a:defRPr>
             </a:pPr>
             <a:r>
-              <a:t>Phase 2: results (strings and winds, URMP)</a:t>
+              <a:t>16</a:t>
             </a:r>
           </a:p>
         </p:txBody>
@@ -5875,8 +6474,8 @@
         </p:nvSpPr>
         <p:spPr>
           <a:xfrm>
-            <a:off x="822960" y="1097280"/>
-            <a:ext cx="10515600" cy="640080"/>
+            <a:off x="411480" y="228600"/>
+            <a:ext cx="11338560" cy="685800"/>
           </a:xfrm>
           <a:prstGeom prst="rect">
             <a:avLst/>
@@ -5890,10 +6489,91 @@
           <a:lstStyle/>
           <a:p>
             <a:pPr>
-              <a:defRPr sz="2000">
+              <a:defRPr sz="2800" b="1">
+                <a:solidFill>
+                  <a:srgbClr val="1A1A1A"/>
+                </a:solidFill>
+                <a:latin typeface="Segoe UI"/>
+              </a:defRPr>
+            </a:pPr>
+            <a:r>
+              <a:t>Phase 2: results (strings and winds, URMP)</a:t>
+            </a:r>
+          </a:p>
+        </p:txBody>
+      </p:sp>
+      <p:sp>
+        <p:nvSpPr>
+          <p:cNvPr id="4" name="Rectangle 3"/>
+          <p:cNvSpPr/>
+          <p:nvPr/>
+        </p:nvSpPr>
+        <p:spPr>
+          <a:xfrm>
+            <a:off x="457200" y="896112"/>
+            <a:ext cx="11247120" cy="27940"/>
+          </a:xfrm>
+          <a:prstGeom prst="rect">
+            <a:avLst/>
+          </a:prstGeom>
+          <a:solidFill>
+            <a:srgbClr val="0072B2"/>
+          </a:solidFill>
+          <a:ln>
+            <a:noFill/>
+          </a:ln>
+          <a:effectLst/>
+        </p:spPr>
+        <p:style>
+          <a:lnRef idx="1">
+            <a:schemeClr val="accent1"/>
+          </a:lnRef>
+          <a:fillRef idx="3">
+            <a:schemeClr val="accent1"/>
+          </a:fillRef>
+          <a:effectRef idx="2">
+            <a:schemeClr val="accent1"/>
+          </a:effectRef>
+          <a:fontRef idx="minor">
+            <a:schemeClr val="lt1"/>
+          </a:fontRef>
+        </p:style>
+        <p:txBody>
+          <a:bodyPr rtlCol="0" anchor="ctr"/>
+          <a:lstStyle/>
+          <a:p>
+            <a:pPr algn="ctr"/>
+          </a:p>
+        </p:txBody>
+      </p:sp>
+      <p:sp>
+        <p:nvSpPr>
+          <p:cNvPr id="5" name="TextBox 4"/>
+          <p:cNvSpPr txBox="1"/>
+          <p:nvPr/>
+        </p:nvSpPr>
+        <p:spPr>
+          <a:xfrm>
+            <a:off x="822960" y="1097280"/>
+            <a:ext cx="10515600" cy="640080"/>
+          </a:xfrm>
+          <a:prstGeom prst="rect">
+            <a:avLst/>
+          </a:prstGeom>
+          <a:noFill/>
+        </p:spPr>
+        <p:txBody>
+          <a:bodyPr wrap="none">
+            <a:spAutoFit/>
+          </a:bodyPr>
+          <a:lstStyle/>
+          <a:p>
+            <a:pPr>
+              <a:defRPr sz="2000" b="0">
                 <a:solidFill>
                   <a:srgbClr val="0072B2"/>
                 </a:solidFill>
+                <a:latin typeface="Segoe UI"/>
               </a:defRPr>
             </a:pPr>
             <a:r>
@@ -5904,7 +6584,7 @@
       </p:sp>
       <p:sp>
         <p:nvSpPr>
-          <p:cNvPr id="4" name="TextBox 3"/>
+          <p:cNvPr id="6" name="TextBox 5"/>
           <p:cNvSpPr txBox="1"/>
           <p:nvPr/>
         </p:nvSpPr>
@@ -5926,76 +6606,81 @@
           <a:p>
             <a:pPr>
               <a:spcAft>
-                <a:spcPts val="800"/>
+                <a:spcPts val="1000"/>
               </a:spcAft>
-              <a:defRPr sz="2000">
+              <a:defRPr sz="2000" b="0">
                 <a:solidFill>
                   <a:srgbClr val="1A1A1A"/>
                 </a:solidFill>
+                <a:latin typeface="Segoe UI"/>
               </a:defRPr>
             </a:pPr>
             <a:r>
-              <a:t>• Preregistered, scored once on 13 held-out pieces. Δ = full model − no-graph ablation, paired per piece.</a:t>
+              <a:t>•  Preregistered, scored once on 13 held-out pieces. Δ = full model − no-graph ablation, paired per piece.</a:t>
             </a:r>
           </a:p>
           <a:p>
             <a:pPr>
               <a:spcAft>
-                <a:spcPts val="800"/>
+                <a:spcPts val="1000"/>
               </a:spcAft>
-              <a:defRPr sz="2000">
+              <a:defRPr sz="2000" b="0">
                 <a:solidFill>
                   <a:srgbClr val="1A1A1A"/>
                 </a:solidFill>
+                <a:latin typeface="Segoe UI"/>
               </a:defRPr>
             </a:pPr>
             <a:r>
-              <a:t>• Intonation recovery: ΔRMSE −0.877 cents, significant.</a:t>
+              <a:t>•  Intonation recovery: ΔRMSE −0.877 cents, significant.</a:t>
             </a:r>
           </a:p>
           <a:p>
             <a:pPr>
               <a:spcAft>
-                <a:spcPts val="800"/>
+                <a:spcPts val="1000"/>
               </a:spcAft>
-              <a:defRPr sz="2000">
+              <a:defRPr sz="2000" b="0">
                 <a:solidFill>
                   <a:srgbClr val="1A1A1A"/>
                 </a:solidFill>
+                <a:latin typeface="Segoe UI"/>
               </a:defRPr>
             </a:pPr>
             <a:r>
-              <a:t>• Vibrato calibration: ΔNLL −2.990 (extent), −0.564 (rate), both significant.</a:t>
+              <a:t>•  Vibrato calibration: ΔNLL −2.990 (extent), −0.564 (rate), both significant.</a:t>
             </a:r>
           </a:p>
           <a:p>
             <a:pPr>
               <a:spcAft>
-                <a:spcPts val="800"/>
+                <a:spcPts val="1000"/>
               </a:spcAft>
-              <a:defRPr sz="2000">
+              <a:defRPr sz="2000" b="0">
                 <a:solidFill>
                   <a:srgbClr val="1A1A1A"/>
                 </a:solidFill>
+                <a:latin typeface="Segoe UI"/>
               </a:defRPr>
             </a:pPr>
             <a:r>
-              <a:t>• Coverage 0.88–0.91 at nominal 0.90, all six channels.</a:t>
+              <a:t>•  Coverage 0.88–0.91 at nominal 0.90, all six channels.</a:t>
             </a:r>
           </a:p>
           <a:p>
             <a:pPr>
               <a:spcAft>
-                <a:spcPts val="800"/>
+                <a:spcPts val="1000"/>
               </a:spcAft>
-              <a:defRPr sz="2000">
+              <a:defRPr sz="2000" b="0">
                 <a:solidFill>
                   <a:srgbClr val="1A1A1A"/>
                 </a:solidFill>
+                <a:latin typeface="Segoe UI"/>
               </a:defRPr>
             </a:pPr>
             <a:r>
-              <a:t>• Timing calibration: no improvement (−0.030, interval includes zero). The loose end, taken up after Phase 3.</a:t>
+              <a:t>•  Timing calibration: no improvement (−0.030, interval includes zero). The loose end, taken up after Phase 3.</a:t>
             </a:r>
           </a:p>
         </p:txBody>
@@ -6026,8 +6711,8 @@
         </p:nvSpPr>
         <p:spPr>
           <a:xfrm>
-            <a:off x="411480" y="228600"/>
-            <a:ext cx="11338560" cy="685800"/>
+            <a:off x="11430000" y="6446520"/>
+            <a:ext cx="640080" cy="320040"/>
           </a:xfrm>
           <a:prstGeom prst="rect">
             <a:avLst/>
@@ -6041,14 +6726,15 @@
           <a:lstStyle/>
           <a:p>
             <a:pPr>
-              <a:defRPr sz="2800" b="1">
-                <a:solidFill>
-                  <a:srgbClr val="1A1A1A"/>
-                </a:solidFill>
+              <a:defRPr sz="1200" b="0">
+                <a:solidFill>
+                  <a:srgbClr val="6B7280"/>
+                </a:solidFill>
+                <a:latin typeface="Segoe UI"/>
               </a:defRPr>
             </a:pPr>
             <a:r>
-              <a:t>Phase 3: the waveform as the observation</a:t>
+              <a:t>17</a:t>
             </a:r>
           </a:p>
         </p:txBody>
@@ -6061,8 +6747,8 @@
         </p:nvSpPr>
         <p:spPr>
           <a:xfrm>
-            <a:off x="822960" y="1097280"/>
-            <a:ext cx="10515600" cy="640080"/>
+            <a:off x="411480" y="228600"/>
+            <a:ext cx="11338560" cy="685800"/>
           </a:xfrm>
           <a:prstGeom prst="rect">
             <a:avLst/>
@@ -6076,10 +6762,91 @@
           <a:lstStyle/>
           <a:p>
             <a:pPr>
-              <a:defRPr sz="2000">
+              <a:defRPr sz="2800" b="1">
+                <a:solidFill>
+                  <a:srgbClr val="1A1A1A"/>
+                </a:solidFill>
+                <a:latin typeface="Segoe UI"/>
+              </a:defRPr>
+            </a:pPr>
+            <a:r>
+              <a:t>Phase 3: the waveform as the observation</a:t>
+            </a:r>
+          </a:p>
+        </p:txBody>
+      </p:sp>
+      <p:sp>
+        <p:nvSpPr>
+          <p:cNvPr id="4" name="Rectangle 3"/>
+          <p:cNvSpPr/>
+          <p:nvPr/>
+        </p:nvSpPr>
+        <p:spPr>
+          <a:xfrm>
+            <a:off x="457200" y="896112"/>
+            <a:ext cx="11247120" cy="27940"/>
+          </a:xfrm>
+          <a:prstGeom prst="rect">
+            <a:avLst/>
+          </a:prstGeom>
+          <a:solidFill>
+            <a:srgbClr val="0072B2"/>
+          </a:solidFill>
+          <a:ln>
+            <a:noFill/>
+          </a:ln>
+          <a:effectLst/>
+        </p:spPr>
+        <p:style>
+          <a:lnRef idx="1">
+            <a:schemeClr val="accent1"/>
+          </a:lnRef>
+          <a:fillRef idx="3">
+            <a:schemeClr val="accent1"/>
+          </a:fillRef>
+          <a:effectRef idx="2">
+            <a:schemeClr val="accent1"/>
+          </a:effectRef>
+          <a:fontRef idx="minor">
+            <a:schemeClr val="lt1"/>
+          </a:fontRef>
+        </p:style>
+        <p:txBody>
+          <a:bodyPr rtlCol="0" anchor="ctr"/>
+          <a:lstStyle/>
+          <a:p>
+            <a:pPr algn="ctr"/>
+          </a:p>
+        </p:txBody>
+      </p:sp>
+      <p:sp>
+        <p:nvSpPr>
+          <p:cNvPr id="5" name="TextBox 4"/>
+          <p:cNvSpPr txBox="1"/>
+          <p:nvPr/>
+        </p:nvSpPr>
+        <p:spPr>
+          <a:xfrm>
+            <a:off x="822960" y="1097280"/>
+            <a:ext cx="10515600" cy="640080"/>
+          </a:xfrm>
+          <a:prstGeom prst="rect">
+            <a:avLst/>
+          </a:prstGeom>
+          <a:noFill/>
+        </p:spPr>
+        <p:txBody>
+          <a:bodyPr wrap="none">
+            <a:spAutoFit/>
+          </a:bodyPr>
+          <a:lstStyle/>
+          <a:p>
+            <a:pPr>
+              <a:defRPr sz="2000" b="0">
                 <a:solidFill>
                   <a:srgbClr val="0072B2"/>
                 </a:solidFill>
+                <a:latin typeface="Segoe UI"/>
               </a:defRPr>
             </a:pPr>
             <a:r>
@@ -6090,7 +6857,7 @@
       </p:sp>
       <p:sp>
         <p:nvSpPr>
-          <p:cNvPr id="4" name="TextBox 3"/>
+          <p:cNvPr id="6" name="TextBox 5"/>
           <p:cNvSpPr txBox="1"/>
           <p:nvPr/>
         </p:nvSpPr>
@@ -6112,31 +6879,33 @@
           <a:p>
             <a:pPr>
               <a:spcAft>
-                <a:spcPts val="800"/>
+                <a:spcPts val="1000"/>
               </a:spcAft>
-              <a:defRPr sz="2000">
+              <a:defRPr sz="2000" b="0">
                 <a:solidFill>
                   <a:srgbClr val="1A1A1A"/>
                 </a:solidFill>
+                <a:latin typeface="Segoe UI"/>
               </a:defRPr>
             </a:pPr>
             <a:r>
-              <a:t>• The likelihood block becomes the audio itself; the harmonic amplitudes are marginalized exactly (O(mp²), whole tracks exact).</a:t>
+              <a:t>•  The likelihood block becomes the audio itself; the harmonic amplitudes are marginalized exactly (O(mp²), whole tracks exact).</a:t>
             </a:r>
           </a:p>
           <a:p>
             <a:pPr>
               <a:spcAft>
-                <a:spcPts val="800"/>
+                <a:spcPts val="1000"/>
               </a:spcAft>
-              <a:defRPr sz="2000">
+              <a:defRPr sz="2000" b="0">
                 <a:solidFill>
                   <a:srgbClr val="1A1A1A"/>
                 </a:solidFill>
+                <a:latin typeface="Segoe UI"/>
               </a:defRPr>
             </a:pPr>
             <a:r>
-              <a:t>• Development studies: intonation at 2.29 cents median with no pitch tracker; beats the estimator chain on winds.</a:t>
+              <a:t>•  Development studies: intonation at 2.29 cents median with no pitch tracker; beats the estimator chain on winds.</a:t>
             </a:r>
           </a:p>
         </p:txBody>
@@ -6167,8 +6936,8 @@
         </p:nvSpPr>
         <p:spPr>
           <a:xfrm>
-            <a:off x="411480" y="228600"/>
-            <a:ext cx="11338560" cy="685800"/>
+            <a:off x="11430000" y="6446520"/>
+            <a:ext cx="640080" cy="320040"/>
           </a:xfrm>
           <a:prstGeom prst="rect">
             <a:avLst/>
@@ -6182,21 +6951,102 @@
           <a:lstStyle/>
           <a:p>
             <a:pPr>
+              <a:defRPr sz="1200" b="0">
+                <a:solidFill>
+                  <a:srgbClr val="6B7280"/>
+                </a:solidFill>
+                <a:latin typeface="Segoe UI"/>
+              </a:defRPr>
+            </a:pPr>
+            <a:r>
+              <a:t>18</a:t>
+            </a:r>
+          </a:p>
+        </p:txBody>
+      </p:sp>
+      <p:sp>
+        <p:nvSpPr>
+          <p:cNvPr id="3" name="TextBox 2"/>
+          <p:cNvSpPr txBox="1"/>
+          <p:nvPr/>
+        </p:nvSpPr>
+        <p:spPr>
+          <a:xfrm>
+            <a:off x="411480" y="228600"/>
+            <a:ext cx="11338560" cy="685800"/>
+          </a:xfrm>
+          <a:prstGeom prst="rect">
+            <a:avLst/>
+          </a:prstGeom>
+          <a:noFill/>
+        </p:spPr>
+        <p:txBody>
+          <a:bodyPr wrap="none">
+            <a:spAutoFit/>
+          </a:bodyPr>
+          <a:lstStyle/>
+          <a:p>
+            <a:pPr>
               <a:defRPr sz="2800" b="1">
                 <a:solidFill>
                   <a:srgbClr val="1A1A1A"/>
                 </a:solidFill>
+                <a:latin typeface="Segoe UI"/>
               </a:defRPr>
             </a:pPr>
             <a:r>
               <a:t>Running now: the curve straight from the waveform</a:t>
             </a:r>
+          </a:p>
+        </p:txBody>
+      </p:sp>
+      <p:sp>
+        <p:nvSpPr>
+          <p:cNvPr id="4" name="Rectangle 3"/>
+          <p:cNvSpPr/>
+          <p:nvPr/>
+        </p:nvSpPr>
+        <p:spPr>
+          <a:xfrm>
+            <a:off x="457200" y="896112"/>
+            <a:ext cx="11247120" cy="27940"/>
+          </a:xfrm>
+          <a:prstGeom prst="rect">
+            <a:avLst/>
+          </a:prstGeom>
+          <a:solidFill>
+            <a:srgbClr val="0072B2"/>
+          </a:solidFill>
+          <a:ln>
+            <a:noFill/>
+          </a:ln>
+          <a:effectLst/>
+        </p:spPr>
+        <p:style>
+          <a:lnRef idx="1">
+            <a:schemeClr val="accent1"/>
+          </a:lnRef>
+          <a:fillRef idx="3">
+            <a:schemeClr val="accent1"/>
+          </a:fillRef>
+          <a:effectRef idx="2">
+            <a:schemeClr val="accent1"/>
+          </a:effectRef>
+          <a:fontRef idx="minor">
+            <a:schemeClr val="lt1"/>
+          </a:fontRef>
+        </p:style>
+        <p:txBody>
+          <a:bodyPr rtlCol="0" anchor="ctr"/>
+          <a:lstStyle/>
+          <a:p>
+            <a:pPr algn="ctr"/>
           </a:p>
         </p:txBody>
       </p:sp>
       <p:pic>
         <p:nvPicPr>
-          <p:cNvPr id="3" name="Picture 2" descr="phase3_curve_proto.png"/>
+          <p:cNvPr id="5" name="Picture 4" descr="phase3_curve_proto.png"/>
           <p:cNvPicPr>
             <a:picLocks noChangeAspect="1"/>
           </p:cNvPicPr>
@@ -6220,7 +7070,7 @@
       </p:pic>
       <p:sp>
         <p:nvSpPr>
-          <p:cNvPr id="4" name="TextBox 3"/>
+          <p:cNvPr id="6" name="TextBox 5"/>
           <p:cNvSpPr txBox="1"/>
           <p:nvPr/>
         </p:nvSpPr>
@@ -6241,10 +7091,11 @@
           <a:lstStyle/>
           <a:p>
             <a:pPr>
-              <a:defRPr sz="1300">
+              <a:defRPr sz="1300" b="0">
                 <a:solidFill>
                   <a:srgbClr val="6B7280"/>
                 </a:solidFill>
+                <a:latin typeface="Segoe UI"/>
               </a:defRPr>
             </a:pPr>
             <a:r>
@@ -6279,8 +7130,8 @@
         </p:nvSpPr>
         <p:spPr>
           <a:xfrm>
-            <a:off x="411480" y="228600"/>
-            <a:ext cx="11338560" cy="685800"/>
+            <a:off x="11430000" y="6446520"/>
+            <a:ext cx="640080" cy="320040"/>
           </a:xfrm>
           <a:prstGeom prst="rect">
             <a:avLst/>
@@ -6294,14 +7145,15 @@
           <a:lstStyle/>
           <a:p>
             <a:pPr>
-              <a:defRPr sz="2800" b="1">
-                <a:solidFill>
-                  <a:srgbClr val="1A1A1A"/>
-                </a:solidFill>
+              <a:defRPr sz="1200" b="0">
+                <a:solidFill>
+                  <a:srgbClr val="6B7280"/>
+                </a:solidFill>
+                <a:latin typeface="Segoe UI"/>
               </a:defRPr>
             </a:pPr>
             <a:r>
-              <a:t>Timing noise is correlated across notes</a:t>
+              <a:t>19</a:t>
             </a:r>
           </a:p>
         </p:txBody>
@@ -6314,8 +7166,8 @@
         </p:nvSpPr>
         <p:spPr>
           <a:xfrm>
-            <a:off x="822960" y="1097280"/>
-            <a:ext cx="10515600" cy="640080"/>
+            <a:off x="411480" y="228600"/>
+            <a:ext cx="11338560" cy="685800"/>
           </a:xfrm>
           <a:prstGeom prst="rect">
             <a:avLst/>
@@ -6329,10 +7181,91 @@
           <a:lstStyle/>
           <a:p>
             <a:pPr>
-              <a:defRPr sz="2000">
+              <a:defRPr sz="2800" b="1">
+                <a:solidFill>
+                  <a:srgbClr val="1A1A1A"/>
+                </a:solidFill>
+                <a:latin typeface="Segoe UI"/>
+              </a:defRPr>
+            </a:pPr>
+            <a:r>
+              <a:t>Timing noise is correlated across notes</a:t>
+            </a:r>
+          </a:p>
+        </p:txBody>
+      </p:sp>
+      <p:sp>
+        <p:nvSpPr>
+          <p:cNvPr id="4" name="Rectangle 3"/>
+          <p:cNvSpPr/>
+          <p:nvPr/>
+        </p:nvSpPr>
+        <p:spPr>
+          <a:xfrm>
+            <a:off x="457200" y="896112"/>
+            <a:ext cx="11247120" cy="27940"/>
+          </a:xfrm>
+          <a:prstGeom prst="rect">
+            <a:avLst/>
+          </a:prstGeom>
+          <a:solidFill>
+            <a:srgbClr val="0072B2"/>
+          </a:solidFill>
+          <a:ln>
+            <a:noFill/>
+          </a:ln>
+          <a:effectLst/>
+        </p:spPr>
+        <p:style>
+          <a:lnRef idx="1">
+            <a:schemeClr val="accent1"/>
+          </a:lnRef>
+          <a:fillRef idx="3">
+            <a:schemeClr val="accent1"/>
+          </a:fillRef>
+          <a:effectRef idx="2">
+            <a:schemeClr val="accent1"/>
+          </a:effectRef>
+          <a:fontRef idx="minor">
+            <a:schemeClr val="lt1"/>
+          </a:fontRef>
+        </p:style>
+        <p:txBody>
+          <a:bodyPr rtlCol="0" anchor="ctr"/>
+          <a:lstStyle/>
+          <a:p>
+            <a:pPr algn="ctr"/>
+          </a:p>
+        </p:txBody>
+      </p:sp>
+      <p:sp>
+        <p:nvSpPr>
+          <p:cNvPr id="5" name="TextBox 4"/>
+          <p:cNvSpPr txBox="1"/>
+          <p:nvPr/>
+        </p:nvSpPr>
+        <p:spPr>
+          <a:xfrm>
+            <a:off x="822960" y="1097280"/>
+            <a:ext cx="10515600" cy="640080"/>
+          </a:xfrm>
+          <a:prstGeom prst="rect">
+            <a:avLst/>
+          </a:prstGeom>
+          <a:noFill/>
+        </p:spPr>
+        <p:txBody>
+          <a:bodyPr wrap="none">
+            <a:spAutoFit/>
+          </a:bodyPr>
+          <a:lstStyle/>
+          <a:p>
+            <a:pPr>
+              <a:defRPr sz="2000" b="0">
                 <a:solidFill>
                   <a:srgbClr val="0072B2"/>
                 </a:solidFill>
+                <a:latin typeface="Segoe UI"/>
               </a:defRPr>
             </a:pPr>
             <a:r>
@@ -6343,7 +7276,7 @@
       </p:sp>
       <p:sp>
         <p:nvSpPr>
-          <p:cNvPr id="4" name="TextBox 3"/>
+          <p:cNvPr id="6" name="TextBox 5"/>
           <p:cNvSpPr txBox="1"/>
           <p:nvPr/>
         </p:nvSpPr>
@@ -6365,61 +7298,65 @@
           <a:p>
             <a:pPr>
               <a:spcAft>
-                <a:spcPts val="800"/>
+                <a:spcPts val="1000"/>
               </a:spcAft>
-              <a:defRPr sz="2000">
+              <a:defRPr sz="2000" b="0">
                 <a:solidFill>
                   <a:srgbClr val="1A1A1A"/>
                 </a:solidFill>
+                <a:latin typeface="Segoe UI"/>
               </a:defRPr>
             </a:pPr>
             <a:r>
-              <a:t>• Why timing did not calibrate: alignment error is correlated along score time; a diagonal noise row cannot represent it.</a:t>
+              <a:t>•  Why timing did not calibrate: alignment error is correlated along score time; a diagonal noise row cannot represent it.</a:t>
             </a:r>
           </a:p>
           <a:p>
             <a:pPr>
               <a:spcAft>
-                <a:spcPts val="800"/>
+                <a:spcPts val="1000"/>
               </a:spcAft>
-              <a:defRPr sz="2000">
+              <a:defRPr sz="2000" b="0">
                 <a:solidFill>
                   <a:srgbClr val="1A1A1A"/>
                 </a:solidFill>
+                <a:latin typeface="Segoe UI"/>
               </a:defRPr>
             </a:pPr>
             <a:r>
-              <a:t>• The evidence detects the correlation on 97–100% of pieces (median ρ 0.45–0.60).</a:t>
+              <a:t>•  The evidence detects the correlation on 97–100% of pieces (median ρ 0.45–0.60).</a:t>
             </a:r>
           </a:p>
           <a:p>
             <a:pPr>
               <a:spcAft>
-                <a:spcPts val="800"/>
+                <a:spcPts val="1000"/>
               </a:spcAft>
-              <a:defRPr sz="2000">
+              <a:defRPr sz="2000" b="0">
                 <a:solidFill>
                   <a:srgbClr val="1A1A1A"/>
                 </a:solidFill>
+                <a:latin typeface="Segoe UI"/>
               </a:defRPr>
             </a:pPr>
             <a:r>
-              <a:t>• Calibration improves (ΔNLL −0.111, significant); timing error falls ~20% (99 → 80 ms).</a:t>
+              <a:t>•  Calibration improves (ΔNLL −0.111, significant); timing error falls ~20% (99 → 80 ms).</a:t>
             </a:r>
           </a:p>
           <a:p>
             <a:pPr>
               <a:spcAft>
-                <a:spcPts val="800"/>
+                <a:spcPts val="1000"/>
               </a:spcAft>
-              <a:defRPr sz="2000">
+              <a:defRPr sz="2000" b="0">
                 <a:solidFill>
                   <a:srgbClr val="1A1A1A"/>
                 </a:solidFill>
+                <a:latin typeface="Segoe UI"/>
               </a:defRPr>
             </a:pPr>
             <a:r>
-              <a:t>• Reproduced three ways: original masks, fresh masks, joint refit.</a:t>
+              <a:t>•  Reproduced three ways: original masks, fresh masks, joint refit.</a:t>
             </a:r>
           </a:p>
         </p:txBody>
@@ -6450,8 +7387,8 @@
         </p:nvSpPr>
         <p:spPr>
           <a:xfrm>
-            <a:off x="411480" y="228600"/>
-            <a:ext cx="11338560" cy="685800"/>
+            <a:off x="11430000" y="6446520"/>
+            <a:ext cx="640080" cy="320040"/>
           </a:xfrm>
           <a:prstGeom prst="rect">
             <a:avLst/>
@@ -6465,14 +7402,15 @@
           <a:lstStyle/>
           <a:p>
             <a:pPr>
-              <a:defRPr sz="2800" b="1">
-                <a:solidFill>
-                  <a:srgbClr val="1A1A1A"/>
-                </a:solidFill>
+              <a:defRPr sz="1200" b="0">
+                <a:solidFill>
+                  <a:srgbClr val="6B7280"/>
+                </a:solidFill>
+                <a:latin typeface="Segoe UI"/>
               </a:defRPr>
             </a:pPr>
             <a:r>
-              <a:t>Expressive performance</a:t>
+              <a:t>2</a:t>
             </a:r>
           </a:p>
         </p:txBody>
@@ -6485,6 +7423,86 @@
         </p:nvSpPr>
         <p:spPr>
           <a:xfrm>
+            <a:off x="411480" y="228600"/>
+            <a:ext cx="11338560" cy="685800"/>
+          </a:xfrm>
+          <a:prstGeom prst="rect">
+            <a:avLst/>
+          </a:prstGeom>
+          <a:noFill/>
+        </p:spPr>
+        <p:txBody>
+          <a:bodyPr wrap="none">
+            <a:spAutoFit/>
+          </a:bodyPr>
+          <a:lstStyle/>
+          <a:p>
+            <a:pPr>
+              <a:defRPr sz="2800" b="1">
+                <a:solidFill>
+                  <a:srgbClr val="1A1A1A"/>
+                </a:solidFill>
+                <a:latin typeface="Segoe UI"/>
+              </a:defRPr>
+            </a:pPr>
+            <a:r>
+              <a:t>Expressive performance</a:t>
+            </a:r>
+          </a:p>
+        </p:txBody>
+      </p:sp>
+      <p:sp>
+        <p:nvSpPr>
+          <p:cNvPr id="4" name="Rectangle 3"/>
+          <p:cNvSpPr/>
+          <p:nvPr/>
+        </p:nvSpPr>
+        <p:spPr>
+          <a:xfrm>
+            <a:off x="457200" y="896112"/>
+            <a:ext cx="11247120" cy="27940"/>
+          </a:xfrm>
+          <a:prstGeom prst="rect">
+            <a:avLst/>
+          </a:prstGeom>
+          <a:solidFill>
+            <a:srgbClr val="0072B2"/>
+          </a:solidFill>
+          <a:ln>
+            <a:noFill/>
+          </a:ln>
+          <a:effectLst/>
+        </p:spPr>
+        <p:style>
+          <a:lnRef idx="1">
+            <a:schemeClr val="accent1"/>
+          </a:lnRef>
+          <a:fillRef idx="3">
+            <a:schemeClr val="accent1"/>
+          </a:fillRef>
+          <a:effectRef idx="2">
+            <a:schemeClr val="accent1"/>
+          </a:effectRef>
+          <a:fontRef idx="minor">
+            <a:schemeClr val="lt1"/>
+          </a:fontRef>
+        </p:style>
+        <p:txBody>
+          <a:bodyPr rtlCol="0" anchor="ctr"/>
+          <a:lstStyle/>
+          <a:p>
+            <a:pPr algn="ctr"/>
+          </a:p>
+        </p:txBody>
+      </p:sp>
+      <p:sp>
+        <p:nvSpPr>
+          <p:cNvPr id="5" name="TextBox 4"/>
+          <p:cNvSpPr txBox="1"/>
+          <p:nvPr/>
+        </p:nvSpPr>
+        <p:spPr>
+          <a:xfrm>
             <a:off x="822960" y="1097280"/>
             <a:ext cx="10607040" cy="4389120"/>
           </a:xfrm>
@@ -6501,23 +7519,24 @@
           <a:p>
             <a:pPr>
               <a:spcAft>
-                <a:spcPts val="800"/>
+                <a:spcPts val="1000"/>
               </a:spcAft>
-              <a:defRPr sz="2000">
+              <a:defRPr sz="2000" b="0">
                 <a:solidFill>
                   <a:srgbClr val="1A1A1A"/>
                 </a:solidFill>
+                <a:latin typeface="Segoe UI"/>
               </a:defRPr>
             </a:pPr>
             <a:r>
-              <a:t>• The score fixes pitches and note values. Performers add the rest: when, how long, how loud, and how the pitch moves inside the note. These deviations are the expression.</a:t>
+              <a:t>•  The score fixes pitches and note values. Performers add the rest: when, how long, how loud, and how the pitch moves inside the note. These deviations are the expression.</a:t>
             </a:r>
           </a:p>
         </p:txBody>
       </p:sp>
       <p:pic>
         <p:nvPicPr>
-          <p:cNvPr id="4" name="Picture 3" descr="deck_concept.png"/>
+          <p:cNvPr id="6" name="Picture 5" descr="deck_concept.png"/>
           <p:cNvPicPr>
             <a:picLocks noChangeAspect="1"/>
           </p:cNvPicPr>
@@ -6541,7 +7560,7 @@
       </p:pic>
       <p:sp>
         <p:nvSpPr>
-          <p:cNvPr id="5" name="TextBox 4"/>
+          <p:cNvPr id="7" name="TextBox 6"/>
           <p:cNvSpPr txBox="1"/>
           <p:nvPr/>
         </p:nvSpPr>
@@ -6562,10 +7581,11 @@
           <a:lstStyle/>
           <a:p>
             <a:pPr>
-              <a:defRPr sz="1300">
+              <a:defRPr sz="1300" b="0">
                 <a:solidFill>
                   <a:srgbClr val="6B7280"/>
                 </a:solidFill>
+                <a:latin typeface="Segoe UI"/>
               </a:defRPr>
             </a:pPr>
             <a:r>
@@ -6576,7 +7596,7 @@
       </p:sp>
       <p:pic>
         <p:nvPicPr>
-          <p:cNvPr id="6" name="flat.wav">
+          <p:cNvPr id="8" name="flat.wav">
             <a:hlinkClick r:id="" action="ppaction://media"/>
           </p:cNvPr>
           <p:cNvPicPr>
@@ -6609,7 +7629,7 @@
       </p:pic>
       <p:pic>
         <p:nvPicPr>
-          <p:cNvPr id="7" name="expressive.wav">
+          <p:cNvPr id="9" name="expressive.wav">
             <a:hlinkClick r:id="" action="ppaction://media"/>
           </p:cNvPr>
           <p:cNvPicPr>
@@ -6658,7 +7678,7 @@
                   </p:stCondLst>
                 </p:cTn>
                 <p:tgtEl>
-                  <p:spTgt spid="6"/>
+                  <p:spTgt spid="8"/>
                 </p:tgtEl>
               </p:cMediaNode>
             </p:video>
@@ -6670,7 +7690,7 @@
                   </p:stCondLst>
                 </p:cTn>
                 <p:tgtEl>
-                  <p:spTgt spid="7"/>
+                  <p:spTgt spid="9"/>
                 </p:tgtEl>
               </p:cMediaNode>
             </p:video>
@@ -6700,8 +7720,8 @@
         </p:nvSpPr>
         <p:spPr>
           <a:xfrm>
-            <a:off x="411480" y="228600"/>
-            <a:ext cx="11338560" cy="685800"/>
+            <a:off x="11430000" y="6446520"/>
+            <a:ext cx="640080" cy="320040"/>
           </a:xfrm>
           <a:prstGeom prst="rect">
             <a:avLst/>
@@ -6715,21 +7735,102 @@
           <a:lstStyle/>
           <a:p>
             <a:pPr>
+              <a:defRPr sz="1200" b="0">
+                <a:solidFill>
+                  <a:srgbClr val="6B7280"/>
+                </a:solidFill>
+                <a:latin typeface="Segoe UI"/>
+              </a:defRPr>
+            </a:pPr>
+            <a:r>
+              <a:t>20</a:t>
+            </a:r>
+          </a:p>
+        </p:txBody>
+      </p:sp>
+      <p:sp>
+        <p:nvSpPr>
+          <p:cNvPr id="3" name="TextBox 2"/>
+          <p:cNvSpPr txBox="1"/>
+          <p:nvPr/>
+        </p:nvSpPr>
+        <p:spPr>
+          <a:xfrm>
+            <a:off x="411480" y="228600"/>
+            <a:ext cx="11338560" cy="685800"/>
+          </a:xfrm>
+          <a:prstGeom prst="rect">
+            <a:avLst/>
+          </a:prstGeom>
+          <a:noFill/>
+        </p:spPr>
+        <p:txBody>
+          <a:bodyPr wrap="none">
+            <a:spAutoFit/>
+          </a:bodyPr>
+          <a:lstStyle/>
+          <a:p>
+            <a:pPr>
               <a:defRPr sz="2800" b="1">
                 <a:solidFill>
                   <a:srgbClr val="1A1A1A"/>
                 </a:solidFill>
+                <a:latin typeface="Segoe UI"/>
               </a:defRPr>
             </a:pPr>
             <a:r>
               <a:t>Held-out timing, with and without the correlation</a:t>
             </a:r>
+          </a:p>
+        </p:txBody>
+      </p:sp>
+      <p:sp>
+        <p:nvSpPr>
+          <p:cNvPr id="4" name="Rectangle 3"/>
+          <p:cNvSpPr/>
+          <p:nvPr/>
+        </p:nvSpPr>
+        <p:spPr>
+          <a:xfrm>
+            <a:off x="457200" y="896112"/>
+            <a:ext cx="11247120" cy="27940"/>
+          </a:xfrm>
+          <a:prstGeom prst="rect">
+            <a:avLst/>
+          </a:prstGeom>
+          <a:solidFill>
+            <a:srgbClr val="0072B2"/>
+          </a:solidFill>
+          <a:ln>
+            <a:noFill/>
+          </a:ln>
+          <a:effectLst/>
+        </p:spPr>
+        <p:style>
+          <a:lnRef idx="1">
+            <a:schemeClr val="accent1"/>
+          </a:lnRef>
+          <a:fillRef idx="3">
+            <a:schemeClr val="accent1"/>
+          </a:fillRef>
+          <a:effectRef idx="2">
+            <a:schemeClr val="accent1"/>
+          </a:effectRef>
+          <a:fontRef idx="minor">
+            <a:schemeClr val="lt1"/>
+          </a:fontRef>
+        </p:style>
+        <p:txBody>
+          <a:bodyPr rtlCol="0" anchor="ctr"/>
+          <a:lstStyle/>
+          <a:p>
+            <a:pPr algn="ctr"/>
           </a:p>
         </p:txBody>
       </p:sp>
       <p:pic>
         <p:nvPicPr>
-          <p:cNvPr id="3" name="Picture 2" descr="corrnoise_tau_dev.png"/>
+          <p:cNvPr id="5" name="Picture 4" descr="corrnoise_tau_dev.png"/>
           <p:cNvPicPr>
             <a:picLocks noChangeAspect="1"/>
           </p:cNvPicPr>
@@ -6753,7 +7854,7 @@
       </p:pic>
       <p:sp>
         <p:nvSpPr>
-          <p:cNvPr id="4" name="TextBox 3"/>
+          <p:cNvPr id="6" name="TextBox 5"/>
           <p:cNvSpPr txBox="1"/>
           <p:nvPr/>
         </p:nvSpPr>
@@ -6774,10 +7875,11 @@
           <a:lstStyle/>
           <a:p>
             <a:pPr>
-              <a:defRPr sz="1300">
+              <a:defRPr sz="1300" b="0">
                 <a:solidFill>
                   <a:srgbClr val="6B7280"/>
                 </a:solidFill>
+                <a:latin typeface="Segoe UI"/>
               </a:defRPr>
             </a:pPr>
             <a:r>
@@ -6812,8 +7914,8 @@
         </p:nvSpPr>
         <p:spPr>
           <a:xfrm>
-            <a:off x="411480" y="228600"/>
-            <a:ext cx="11338560" cy="685800"/>
+            <a:off x="11430000" y="6446520"/>
+            <a:ext cx="640080" cy="320040"/>
           </a:xfrm>
           <a:prstGeom prst="rect">
             <a:avLst/>
@@ -6827,21 +7929,102 @@
           <a:lstStyle/>
           <a:p>
             <a:pPr>
+              <a:defRPr sz="1200" b="0">
+                <a:solidFill>
+                  <a:srgbClr val="6B7280"/>
+                </a:solidFill>
+                <a:latin typeface="Segoe UI"/>
+              </a:defRPr>
+            </a:pPr>
+            <a:r>
+              <a:t>21</a:t>
+            </a:r>
+          </a:p>
+        </p:txBody>
+      </p:sp>
+      <p:sp>
+        <p:nvSpPr>
+          <p:cNvPr id="3" name="TextBox 2"/>
+          <p:cNvSpPr txBox="1"/>
+          <p:nvPr/>
+        </p:nvSpPr>
+        <p:spPr>
+          <a:xfrm>
+            <a:off x="411480" y="228600"/>
+            <a:ext cx="11338560" cy="685800"/>
+          </a:xfrm>
+          <a:prstGeom prst="rect">
+            <a:avLst/>
+          </a:prstGeom>
+          <a:noFill/>
+        </p:spPr>
+        <p:txBody>
+          <a:bodyPr wrap="none">
+            <a:spAutoFit/>
+          </a:bodyPr>
+          <a:lstStyle/>
+          <a:p>
+            <a:pPr>
               <a:defRPr sz="2800" b="1">
                 <a:solidFill>
                   <a:srgbClr val="1A1A1A"/>
                 </a:solidFill>
+                <a:latin typeface="Segoe UI"/>
               </a:defRPr>
             </a:pPr>
             <a:r>
               <a:t>From here (proposed sequencing)</a:t>
             </a:r>
+          </a:p>
+        </p:txBody>
+      </p:sp>
+      <p:sp>
+        <p:nvSpPr>
+          <p:cNvPr id="4" name="Rectangle 3"/>
+          <p:cNvSpPr/>
+          <p:nvPr/>
+        </p:nvSpPr>
+        <p:spPr>
+          <a:xfrm>
+            <a:off x="457200" y="896112"/>
+            <a:ext cx="11247120" cy="27940"/>
+          </a:xfrm>
+          <a:prstGeom prst="rect">
+            <a:avLst/>
+          </a:prstGeom>
+          <a:solidFill>
+            <a:srgbClr val="0072B2"/>
+          </a:solidFill>
+          <a:ln>
+            <a:noFill/>
+          </a:ln>
+          <a:effectLst/>
+        </p:spPr>
+        <p:style>
+          <a:lnRef idx="1">
+            <a:schemeClr val="accent1"/>
+          </a:lnRef>
+          <a:fillRef idx="3">
+            <a:schemeClr val="accent1"/>
+          </a:fillRef>
+          <a:effectRef idx="2">
+            <a:schemeClr val="accent1"/>
+          </a:effectRef>
+          <a:fontRef idx="minor">
+            <a:schemeClr val="lt1"/>
+          </a:fontRef>
+        </p:style>
+        <p:txBody>
+          <a:bodyPr rtlCol="0" anchor="ctr"/>
+          <a:lstStyle/>
+          <a:p>
+            <a:pPr algn="ctr"/>
           </a:p>
         </p:txBody>
       </p:sp>
       <p:graphicFrame>
         <p:nvGraphicFramePr>
-          <p:cNvPr id="3" name="Table 2"/>
+          <p:cNvPr id="5" name="Table 4"/>
           <p:cNvGraphicFramePr>
             <a:graphicFrameLocks noGrp="1"/>
           </p:cNvGraphicFramePr>
@@ -6868,14 +8051,23 @@
                     <a:lstStyle/>
                     <a:p>
                       <a:pPr>
-                        <a:defRPr sz="1800"/>
+                        <a:defRPr sz="1800" b="1">
+                          <a:solidFill>
+                            <a:srgbClr val="0072B2"/>
+                          </a:solidFill>
+                          <a:latin typeface="Segoe UI"/>
+                        </a:defRPr>
                       </a:pPr>
                       <a:r>
                         <a:t>now</a:t>
                       </a:r>
                     </a:p>
                   </a:txBody>
-                  <a:tcPr/>
+                  <a:tcPr>
+                    <a:solidFill>
+                      <a:srgbClr val="FFFFFF"/>
+                    </a:solidFill>
+                  </a:tcPr>
                 </a:tc>
                 <a:tc>
                   <a:txBody>
@@ -6883,14 +8075,23 @@
                     <a:lstStyle/>
                     <a:p>
                       <a:pPr>
-                        <a:defRPr sz="1800"/>
+                        <a:defRPr sz="1800" b="0">
+                          <a:solidFill>
+                            <a:srgbClr val="1A1A1A"/>
+                          </a:solidFill>
+                          <a:latin typeface="Segoe UI"/>
+                        </a:defRPr>
                       </a:pPr>
                       <a:r>
                         <a:t>integrate the full-corpus learned-spectrum run (done this week)</a:t>
                       </a:r>
                     </a:p>
                   </a:txBody>
-                  <a:tcPr/>
+                  <a:tcPr>
+                    <a:solidFill>
+                      <a:srgbClr val="FFFFFF"/>
+                    </a:solidFill>
+                  </a:tcPr>
                 </a:tc>
               </a:tr>
               <a:tr h="960120">
@@ -6900,14 +8101,23 @@
                     <a:lstStyle/>
                     <a:p>
                       <a:pPr>
-                        <a:defRPr sz="1800"/>
+                        <a:defRPr sz="1800" b="1">
+                          <a:solidFill>
+                            <a:srgbClr val="0072B2"/>
+                          </a:solidFill>
+                          <a:latin typeface="Segoe UI"/>
+                        </a:defRPr>
                       </a:pPr>
                       <a:r>
                         <a:t>next 2 weeks</a:t>
                       </a:r>
                     </a:p>
                   </a:txBody>
-                  <a:tcPr/>
+                  <a:tcPr>
+                    <a:solidFill>
+                      <a:srgbClr val="E5E7EB"/>
+                    </a:solidFill>
+                  </a:tcPr>
                 </a:tc>
                 <a:tc>
                   <a:txBody>
@@ -6915,14 +8125,23 @@
                     <a:lstStyle/>
                     <a:p>
                       <a:pPr>
-                        <a:defRPr sz="1800"/>
+                        <a:defRPr sz="1800" b="0">
+                          <a:solidFill>
+                            <a:srgbClr val="1A1A1A"/>
+                          </a:solidFill>
+                          <a:latin typeface="Segoe UI"/>
+                        </a:defRPr>
                       </a:pPr>
                       <a:r>
                         <a:t>freeze the timing-noise registration once the pool is decided; batch-evaluate the curve-from-waveform prototype</a:t>
                       </a:r>
                     </a:p>
                   </a:txBody>
-                  <a:tcPr/>
+                  <a:tcPr>
+                    <a:solidFill>
+                      <a:srgbClr val="E5E7EB"/>
+                    </a:solidFill>
+                  </a:tcPr>
                 </a:tc>
               </a:tr>
               <a:tr h="960120">
@@ -6932,14 +8151,23 @@
                     <a:lstStyle/>
                     <a:p>
                       <a:pPr>
-                        <a:defRPr sz="1800"/>
+                        <a:defRPr sz="1800" b="1">
+                          <a:solidFill>
+                            <a:srgbClr val="0072B2"/>
+                          </a:solidFill>
+                          <a:latin typeface="Segoe UI"/>
+                        </a:defRPr>
                       </a:pPr>
                       <a:r>
                         <a:t>November</a:t>
                       </a:r>
                     </a:p>
                   </a:txBody>
-                  <a:tcPr/>
+                  <a:tcPr>
+                    <a:solidFill>
+                      <a:srgbClr val="FFFFFF"/>
+                    </a:solidFill>
+                  </a:tcPr>
                 </a:tc>
                 <a:tc>
                   <a:txBody>
@@ -6947,14 +8175,23 @@
                     <a:lstStyle/>
                     <a:p>
                       <a:pPr>
-                        <a:defRPr sz="1800"/>
+                        <a:defRPr sz="1800" b="0">
+                          <a:solidFill>
+                            <a:srgbClr val="1A1A1A"/>
+                          </a:solidFill>
+                          <a:latin typeface="Segoe UI"/>
+                        </a:defRPr>
                       </a:pPr>
                       <a:r>
                         <a:t>decide the channel design (scalars vs curve level); run the timing confirmation, one shot</a:t>
                       </a:r>
                     </a:p>
                   </a:txBody>
-                  <a:tcPr/>
+                  <a:tcPr>
+                    <a:solidFill>
+                      <a:srgbClr val="FFFFFF"/>
+                    </a:solidFill>
+                  </a:tcPr>
                 </a:tc>
               </a:tr>
               <a:tr h="960120">
@@ -6964,14 +8201,23 @@
                     <a:lstStyle/>
                     <a:p>
                       <a:pPr>
-                        <a:defRPr sz="1800"/>
+                        <a:defRPr sz="1800" b="1">
+                          <a:solidFill>
+                            <a:srgbClr val="0072B2"/>
+                          </a:solidFill>
+                          <a:latin typeface="Segoe UI"/>
+                        </a:defRPr>
                       </a:pPr>
                       <a:r>
                         <a:t>December on</a:t>
                       </a:r>
                     </a:p>
                   </a:txBody>
-                  <a:tcPr/>
+                  <a:tcPr>
+                    <a:solidFill>
+                      <a:srgbClr val="E5E7EB"/>
+                    </a:solidFill>
+                  </a:tcPr>
                 </a:tc>
                 <a:tc>
                   <a:txBody>
@@ -6979,14 +8225,23 @@
                     <a:lstStyle/>
                     <a:p>
                       <a:pPr>
-                        <a:defRPr sz="1800"/>
+                        <a:defRPr sz="1800" b="0">
+                          <a:solidFill>
+                            <a:srgbClr val="1A1A1A"/>
+                          </a:solidFill>
+                          <a:latin typeface="Segoe UI"/>
+                        </a:defRPr>
                       </a:pPr>
                       <a:r>
                         <a:t>Phase 3 at scale; consolidate thesis chapters</a:t>
                       </a:r>
                     </a:p>
                   </a:txBody>
-                  <a:tcPr/>
+                  <a:tcPr>
+                    <a:solidFill>
+                      <a:srgbClr val="E5E7EB"/>
+                    </a:solidFill>
+                  </a:tcPr>
                 </a:tc>
               </a:tr>
             </a:tbl>
@@ -7019,8 +8274,8 @@
         </p:nvSpPr>
         <p:spPr>
           <a:xfrm>
-            <a:off x="411480" y="228600"/>
-            <a:ext cx="11338560" cy="685800"/>
+            <a:off x="11430000" y="6446520"/>
+            <a:ext cx="640080" cy="320040"/>
           </a:xfrm>
           <a:prstGeom prst="rect">
             <a:avLst/>
@@ -7034,14 +8289,15 @@
           <a:lstStyle/>
           <a:p>
             <a:pPr>
-              <a:defRPr sz="2800" b="1">
-                <a:solidFill>
-                  <a:srgbClr val="1A1A1A"/>
-                </a:solidFill>
+              <a:defRPr sz="1200" b="0">
+                <a:solidFill>
+                  <a:srgbClr val="6B7280"/>
+                </a:solidFill>
+                <a:latin typeface="Segoe UI"/>
               </a:defRPr>
             </a:pPr>
             <a:r>
-              <a:t>Open questions</a:t>
+              <a:t>22</a:t>
             </a:r>
           </a:p>
         </p:txBody>
@@ -7054,6 +8310,86 @@
         </p:nvSpPr>
         <p:spPr>
           <a:xfrm>
+            <a:off x="411480" y="228600"/>
+            <a:ext cx="11338560" cy="685800"/>
+          </a:xfrm>
+          <a:prstGeom prst="rect">
+            <a:avLst/>
+          </a:prstGeom>
+          <a:noFill/>
+        </p:spPr>
+        <p:txBody>
+          <a:bodyPr wrap="none">
+            <a:spAutoFit/>
+          </a:bodyPr>
+          <a:lstStyle/>
+          <a:p>
+            <a:pPr>
+              <a:defRPr sz="2800" b="1">
+                <a:solidFill>
+                  <a:srgbClr val="1A1A1A"/>
+                </a:solidFill>
+                <a:latin typeface="Segoe UI"/>
+              </a:defRPr>
+            </a:pPr>
+            <a:r>
+              <a:t>Open questions</a:t>
+            </a:r>
+          </a:p>
+        </p:txBody>
+      </p:sp>
+      <p:sp>
+        <p:nvSpPr>
+          <p:cNvPr id="4" name="Rectangle 3"/>
+          <p:cNvSpPr/>
+          <p:nvPr/>
+        </p:nvSpPr>
+        <p:spPr>
+          <a:xfrm>
+            <a:off x="457200" y="896112"/>
+            <a:ext cx="11247120" cy="27940"/>
+          </a:xfrm>
+          <a:prstGeom prst="rect">
+            <a:avLst/>
+          </a:prstGeom>
+          <a:solidFill>
+            <a:srgbClr val="0072B2"/>
+          </a:solidFill>
+          <a:ln>
+            <a:noFill/>
+          </a:ln>
+          <a:effectLst/>
+        </p:spPr>
+        <p:style>
+          <a:lnRef idx="1">
+            <a:schemeClr val="accent1"/>
+          </a:lnRef>
+          <a:fillRef idx="3">
+            <a:schemeClr val="accent1"/>
+          </a:fillRef>
+          <a:effectRef idx="2">
+            <a:schemeClr val="accent1"/>
+          </a:effectRef>
+          <a:fontRef idx="minor">
+            <a:schemeClr val="lt1"/>
+          </a:fontRef>
+        </p:style>
+        <p:txBody>
+          <a:bodyPr rtlCol="0" anchor="ctr"/>
+          <a:lstStyle/>
+          <a:p>
+            <a:pPr algn="ctr"/>
+          </a:p>
+        </p:txBody>
+      </p:sp>
+      <p:sp>
+        <p:nvSpPr>
+          <p:cNvPr id="5" name="TextBox 4"/>
+          <p:cNvSpPr txBox="1"/>
+          <p:nvPr/>
+        </p:nvSpPr>
+        <p:spPr>
+          <a:xfrm>
             <a:off x="822960" y="1097280"/>
             <a:ext cx="10607040" cy="4389120"/>
           </a:xfrm>
@@ -7070,46 +8406,49 @@
           <a:p>
             <a:pPr>
               <a:spcAft>
-                <a:spcPts val="800"/>
+                <a:spcPts val="1000"/>
               </a:spcAft>
-              <a:defRPr sz="2000">
+              <a:defRPr sz="2000" b="0">
                 <a:solidFill>
                   <a:srgbClr val="1A1A1A"/>
                 </a:solidFill>
+                <a:latin typeface="Segoe UI"/>
               </a:defRPr>
             </a:pPr>
             <a:r>
-              <a:t>• Which corpus to confirm the timing result on: a new one (Bach10), a disclosed re-use, or both?</a:t>
+              <a:t>•  Which corpus to confirm the timing result on: a new one (Bach10), a disclosed re-use, or both?</a:t>
             </a:r>
           </a:p>
           <a:p>
             <a:pPr>
               <a:spcAft>
-                <a:spcPts val="800"/>
+                <a:spcPts val="1000"/>
               </a:spcAft>
-              <a:defRPr sz="2000">
+              <a:defRPr sz="2000" b="0">
                 <a:solidFill>
                   <a:srgbClr val="1A1A1A"/>
                 </a:solidFill>
+                <a:latin typeface="Segoe UI"/>
               </a:defRPr>
             </a:pPr>
             <a:r>
-              <a:t>• Keep the channels as three scalars per note, or move them to curve level (the prototype's direction)?</a:t>
+              <a:t>•  Keep the channels as three scalars per note, or move them to curve level (the prototype's direction)?</a:t>
             </a:r>
           </a:p>
           <a:p>
             <a:pPr>
               <a:spcAft>
-                <a:spcPts val="800"/>
+                <a:spcPts val="1000"/>
               </a:spcAft>
-              <a:defRPr sz="2000">
+              <a:defRPr sz="2000" b="0">
                 <a:solidFill>
                   <a:srgbClr val="1A1A1A"/>
                 </a:solidFill>
+                <a:latin typeface="Segoe UI"/>
               </a:defRPr>
             </a:pPr>
             <a:r>
-              <a:t>• Should the new robustness options become defaults?</a:t>
+              <a:t>•  Should the new robustness options become defaults?</a:t>
             </a:r>
           </a:p>
         </p:txBody>
@@ -7140,8 +8479,8 @@
         </p:nvSpPr>
         <p:spPr>
           <a:xfrm>
-            <a:off x="411480" y="228600"/>
-            <a:ext cx="11338560" cy="685800"/>
+            <a:off x="11430000" y="6446520"/>
+            <a:ext cx="640080" cy="320040"/>
           </a:xfrm>
           <a:prstGeom prst="rect">
             <a:avLst/>
@@ -7155,14 +8494,15 @@
           <a:lstStyle/>
           <a:p>
             <a:pPr>
-              <a:defRPr sz="2800" b="1">
-                <a:solidFill>
-                  <a:srgbClr val="1A1A1A"/>
-                </a:solidFill>
+              <a:defRPr sz="1200" b="0">
+                <a:solidFill>
+                  <a:srgbClr val="6B7280"/>
+                </a:solidFill>
+                <a:latin typeface="Segoe UI"/>
               </a:defRPr>
             </a:pPr>
             <a:r>
-              <a:t>The thesis, and the three problems</a:t>
+              <a:t>3</a:t>
             </a:r>
           </a:p>
         </p:txBody>
@@ -7175,6 +8515,86 @@
         </p:nvSpPr>
         <p:spPr>
           <a:xfrm>
+            <a:off x="411480" y="228600"/>
+            <a:ext cx="11338560" cy="685800"/>
+          </a:xfrm>
+          <a:prstGeom prst="rect">
+            <a:avLst/>
+          </a:prstGeom>
+          <a:noFill/>
+        </p:spPr>
+        <p:txBody>
+          <a:bodyPr wrap="none">
+            <a:spAutoFit/>
+          </a:bodyPr>
+          <a:lstStyle/>
+          <a:p>
+            <a:pPr>
+              <a:defRPr sz="2800" b="1">
+                <a:solidFill>
+                  <a:srgbClr val="1A1A1A"/>
+                </a:solidFill>
+                <a:latin typeface="Segoe UI"/>
+              </a:defRPr>
+            </a:pPr>
+            <a:r>
+              <a:t>The thesis, and the three problems</a:t>
+            </a:r>
+          </a:p>
+        </p:txBody>
+      </p:sp>
+      <p:sp>
+        <p:nvSpPr>
+          <p:cNvPr id="4" name="Rectangle 3"/>
+          <p:cNvSpPr/>
+          <p:nvPr/>
+        </p:nvSpPr>
+        <p:spPr>
+          <a:xfrm>
+            <a:off x="457200" y="896112"/>
+            <a:ext cx="11247120" cy="27940"/>
+          </a:xfrm>
+          <a:prstGeom prst="rect">
+            <a:avLst/>
+          </a:prstGeom>
+          <a:solidFill>
+            <a:srgbClr val="0072B2"/>
+          </a:solidFill>
+          <a:ln>
+            <a:noFill/>
+          </a:ln>
+          <a:effectLst/>
+        </p:spPr>
+        <p:style>
+          <a:lnRef idx="1">
+            <a:schemeClr val="accent1"/>
+          </a:lnRef>
+          <a:fillRef idx="3">
+            <a:schemeClr val="accent1"/>
+          </a:fillRef>
+          <a:effectRef idx="2">
+            <a:schemeClr val="accent1"/>
+          </a:effectRef>
+          <a:fontRef idx="minor">
+            <a:schemeClr val="lt1"/>
+          </a:fontRef>
+        </p:style>
+        <p:txBody>
+          <a:bodyPr rtlCol="0" anchor="ctr"/>
+          <a:lstStyle/>
+          <a:p>
+            <a:pPr algn="ctr"/>
+          </a:p>
+        </p:txBody>
+      </p:sp>
+      <p:sp>
+        <p:nvSpPr>
+          <p:cNvPr id="5" name="TextBox 4"/>
+          <p:cNvSpPr txBox="1"/>
+          <p:nvPr/>
+        </p:nvSpPr>
+        <p:spPr>
+          <a:xfrm>
             <a:off x="822960" y="1097280"/>
             <a:ext cx="10607040" cy="4389120"/>
           </a:xfrm>
@@ -7191,61 +8611,65 @@
           <a:p>
             <a:pPr>
               <a:spcAft>
-                <a:spcPts val="800"/>
+                <a:spcPts val="1000"/>
               </a:spcAft>
-              <a:defRPr sz="2000">
+              <a:defRPr sz="2000" b="0">
                 <a:solidFill>
                   <a:srgbClr val="1A1A1A"/>
                 </a:solidFill>
+                <a:latin typeface="Segoe UI"/>
               </a:defRPr>
             </a:pPr>
             <a:r>
-              <a:t>• Thesis: one Gaussian process on the score graph turns a known score and a performance into per-note expressive variables, each with an error bar you can trust.</a:t>
+              <a:t>•  Thesis: one Gaussian process on the score graph turns a known score and a performance into per-note expressive variables, each with an error bar you can trust.</a:t>
             </a:r>
           </a:p>
           <a:p>
             <a:pPr>
               <a:spcAft>
-                <a:spcPts val="800"/>
+                <a:spcPts val="1000"/>
               </a:spcAft>
-              <a:defRPr sz="2000">
+              <a:defRPr sz="2000" b="0">
                 <a:solidFill>
                   <a:srgbClr val="1A1A1A"/>
                 </a:solidFill>
+                <a:latin typeface="Segoe UI"/>
               </a:defRPr>
             </a:pPr>
             <a:r>
-              <a:t>• Piano: timing, articulation, velocity, read directly from aligned MIDI. Are the error bars calibrated?</a:t>
+              <a:t>•  Piano: timing, articulation, velocity, read directly from aligned MIDI. Are the error bars calibrated?</a:t>
             </a:r>
           </a:p>
           <a:p>
             <a:pPr>
               <a:spcAft>
-                <a:spcPts val="800"/>
+                <a:spcPts val="1000"/>
               </a:spcAft>
-              <a:defRPr sz="2000">
+              <a:defRPr sz="2000" b="0">
                 <a:solidFill>
                   <a:srgbClr val="1A1A1A"/>
                 </a:solidFill>
+                <a:latin typeface="Segoe UI"/>
               </a:defRPr>
             </a:pPr>
             <a:r>
-              <a:t>• Strings and winds: six variables, now with intonation and vibrato, estimated from audio, noisily. Does the same prior still work?</a:t>
+              <a:t>•  Strings and winds: six variables, now with intonation and vibrato, estimated from audio, noisily. Does the same prior still work?</a:t>
             </a:r>
           </a:p>
           <a:p>
             <a:pPr>
               <a:spcAft>
-                <a:spcPts val="800"/>
+                <a:spcPts val="1000"/>
               </a:spcAft>
-              <a:defRPr sz="2000">
+              <a:defRPr sz="2000" b="0">
                 <a:solidFill>
                   <a:srgbClr val="1A1A1A"/>
                 </a:solidFill>
+                <a:latin typeface="Segoe UI"/>
               </a:defRPr>
             </a:pPr>
             <a:r>
-              <a:t>• Audio directly: no pitch tracker at all. Can the waveform itself be the observation?</a:t>
+              <a:t>•  Audio directly: no pitch tracker at all. Can the waveform itself be the observation?</a:t>
             </a:r>
           </a:p>
         </p:txBody>
@@ -7276,8 +8700,8 @@
         </p:nvSpPr>
         <p:spPr>
           <a:xfrm>
-            <a:off x="411480" y="228600"/>
-            <a:ext cx="11338560" cy="685800"/>
+            <a:off x="11430000" y="6446520"/>
+            <a:ext cx="640080" cy="320040"/>
           </a:xfrm>
           <a:prstGeom prst="rect">
             <a:avLst/>
@@ -7291,14 +8715,15 @@
           <a:lstStyle/>
           <a:p>
             <a:pPr>
-              <a:defRPr sz="2800" b="1">
-                <a:solidFill>
-                  <a:srgbClr val="1A1A1A"/>
-                </a:solidFill>
+              <a:defRPr sz="1200" b="0">
+                <a:solidFill>
+                  <a:srgbClr val="6B7280"/>
+                </a:solidFill>
+                <a:latin typeface="Segoe UI"/>
               </a:defRPr>
             </a:pPr>
             <a:r>
-              <a:t>Approach: one prior, three kinds of observation</a:t>
+              <a:t>4</a:t>
             </a:r>
           </a:p>
         </p:txBody>
@@ -7311,6 +8736,86 @@
         </p:nvSpPr>
         <p:spPr>
           <a:xfrm>
+            <a:off x="411480" y="228600"/>
+            <a:ext cx="11338560" cy="685800"/>
+          </a:xfrm>
+          <a:prstGeom prst="rect">
+            <a:avLst/>
+          </a:prstGeom>
+          <a:noFill/>
+        </p:spPr>
+        <p:txBody>
+          <a:bodyPr wrap="none">
+            <a:spAutoFit/>
+          </a:bodyPr>
+          <a:lstStyle/>
+          <a:p>
+            <a:pPr>
+              <a:defRPr sz="2800" b="1">
+                <a:solidFill>
+                  <a:srgbClr val="1A1A1A"/>
+                </a:solidFill>
+                <a:latin typeface="Segoe UI"/>
+              </a:defRPr>
+            </a:pPr>
+            <a:r>
+              <a:t>Approach: one prior, three kinds of observation</a:t>
+            </a:r>
+          </a:p>
+        </p:txBody>
+      </p:sp>
+      <p:sp>
+        <p:nvSpPr>
+          <p:cNvPr id="4" name="Rectangle 3"/>
+          <p:cNvSpPr/>
+          <p:nvPr/>
+        </p:nvSpPr>
+        <p:spPr>
+          <a:xfrm>
+            <a:off x="457200" y="896112"/>
+            <a:ext cx="11247120" cy="27940"/>
+          </a:xfrm>
+          <a:prstGeom prst="rect">
+            <a:avLst/>
+          </a:prstGeom>
+          <a:solidFill>
+            <a:srgbClr val="0072B2"/>
+          </a:solidFill>
+          <a:ln>
+            <a:noFill/>
+          </a:ln>
+          <a:effectLst/>
+        </p:spPr>
+        <p:style>
+          <a:lnRef idx="1">
+            <a:schemeClr val="accent1"/>
+          </a:lnRef>
+          <a:fillRef idx="3">
+            <a:schemeClr val="accent1"/>
+          </a:fillRef>
+          <a:effectRef idx="2">
+            <a:schemeClr val="accent1"/>
+          </a:effectRef>
+          <a:fontRef idx="minor">
+            <a:schemeClr val="lt1"/>
+          </a:fontRef>
+        </p:style>
+        <p:txBody>
+          <a:bodyPr rtlCol="0" anchor="ctr"/>
+          <a:lstStyle/>
+          <a:p>
+            <a:pPr algn="ctr"/>
+          </a:p>
+        </p:txBody>
+      </p:sp>
+      <p:sp>
+        <p:nvSpPr>
+          <p:cNvPr id="5" name="TextBox 4"/>
+          <p:cNvSpPr txBox="1"/>
+          <p:nvPr/>
+        </p:nvSpPr>
+        <p:spPr>
+          <a:xfrm>
             <a:off x="822960" y="1097280"/>
             <a:ext cx="10607040" cy="4389120"/>
           </a:xfrm>
@@ -7327,23 +8832,24 @@
           <a:p>
             <a:pPr>
               <a:spcAft>
-                <a:spcPts val="800"/>
+                <a:spcPts val="1000"/>
               </a:spcAft>
-              <a:defRPr sz="2000">
+              <a:defRPr sz="2000" b="0">
                 <a:solidFill>
                   <a:srgbClr val="1A1A1A"/>
                 </a:solidFill>
+                <a:latin typeface="Segoe UI"/>
               </a:defRPr>
             </a:pPr>
             <a:r>
-              <a:t>• One GP prior over per-note expressive fields, on a graph built from the score. Only the observation changes per phase: MIDI, f0 targets, or the waveform.</a:t>
+              <a:t>•  One GP prior over per-note expressive fields, on a graph built from the score. Only the observation changes per phase: MIDI, f0 targets, or the waveform.</a:t>
             </a:r>
           </a:p>
         </p:txBody>
       </p:sp>
       <p:pic>
         <p:nvPicPr>
-          <p:cNvPr id="4" name="Picture 3" descr="deck_programme.png"/>
+          <p:cNvPr id="6" name="Picture 5" descr="deck_programme.png"/>
           <p:cNvPicPr>
             <a:picLocks noChangeAspect="1"/>
           </p:cNvPicPr>
@@ -7391,8 +8897,8 @@
         </p:nvSpPr>
         <p:spPr>
           <a:xfrm>
-            <a:off x="411480" y="228600"/>
-            <a:ext cx="11338560" cy="685800"/>
+            <a:off x="11430000" y="6446520"/>
+            <a:ext cx="640080" cy="320040"/>
           </a:xfrm>
           <a:prstGeom prst="rect">
             <a:avLst/>
@@ -7406,14 +8912,15 @@
           <a:lstStyle/>
           <a:p>
             <a:pPr>
-              <a:defRPr sz="2800" b="1">
-                <a:solidFill>
-                  <a:srgbClr val="1A1A1A"/>
-                </a:solidFill>
+              <a:defRPr sz="1200" b="0">
+                <a:solidFill>
+                  <a:srgbClr val="6B7280"/>
+                </a:solidFill>
+                <a:latin typeface="Segoe UI"/>
               </a:defRPr>
             </a:pPr>
             <a:r>
-              <a:t>The model (1): the score graph</a:t>
+              <a:t>5</a:t>
             </a:r>
           </a:p>
         </p:txBody>
@@ -7426,8 +8933,8 @@
         </p:nvSpPr>
         <p:spPr>
           <a:xfrm>
-            <a:off x="822960" y="1097280"/>
-            <a:ext cx="10515600" cy="640080"/>
+            <a:off x="411480" y="228600"/>
+            <a:ext cx="11338560" cy="685800"/>
           </a:xfrm>
           <a:prstGeom prst="rect">
             <a:avLst/>
@@ -7441,10 +8948,91 @@
           <a:lstStyle/>
           <a:p>
             <a:pPr>
-              <a:defRPr sz="2000">
+              <a:defRPr sz="2800" b="1">
+                <a:solidFill>
+                  <a:srgbClr val="1A1A1A"/>
+                </a:solidFill>
+                <a:latin typeface="Segoe UI"/>
+              </a:defRPr>
+            </a:pPr>
+            <a:r>
+              <a:t>The model (1): the score graph</a:t>
+            </a:r>
+          </a:p>
+        </p:txBody>
+      </p:sp>
+      <p:sp>
+        <p:nvSpPr>
+          <p:cNvPr id="4" name="Rectangle 3"/>
+          <p:cNvSpPr/>
+          <p:nvPr/>
+        </p:nvSpPr>
+        <p:spPr>
+          <a:xfrm>
+            <a:off x="457200" y="896112"/>
+            <a:ext cx="11247120" cy="27940"/>
+          </a:xfrm>
+          <a:prstGeom prst="rect">
+            <a:avLst/>
+          </a:prstGeom>
+          <a:solidFill>
+            <a:srgbClr val="0072B2"/>
+          </a:solidFill>
+          <a:ln>
+            <a:noFill/>
+          </a:ln>
+          <a:effectLst/>
+        </p:spPr>
+        <p:style>
+          <a:lnRef idx="1">
+            <a:schemeClr val="accent1"/>
+          </a:lnRef>
+          <a:fillRef idx="3">
+            <a:schemeClr val="accent1"/>
+          </a:fillRef>
+          <a:effectRef idx="2">
+            <a:schemeClr val="accent1"/>
+          </a:effectRef>
+          <a:fontRef idx="minor">
+            <a:schemeClr val="lt1"/>
+          </a:fontRef>
+        </p:style>
+        <p:txBody>
+          <a:bodyPr rtlCol="0" anchor="ctr"/>
+          <a:lstStyle/>
+          <a:p>
+            <a:pPr algn="ctr"/>
+          </a:p>
+        </p:txBody>
+      </p:sp>
+      <p:sp>
+        <p:nvSpPr>
+          <p:cNvPr id="5" name="TextBox 4"/>
+          <p:cNvSpPr txBox="1"/>
+          <p:nvPr/>
+        </p:nvSpPr>
+        <p:spPr>
+          <a:xfrm>
+            <a:off x="822960" y="1097280"/>
+            <a:ext cx="10515600" cy="640080"/>
+          </a:xfrm>
+          <a:prstGeom prst="rect">
+            <a:avLst/>
+          </a:prstGeom>
+          <a:noFill/>
+        </p:spPr>
+        <p:txBody>
+          <a:bodyPr wrap="none">
+            <a:spAutoFit/>
+          </a:bodyPr>
+          <a:lstStyle/>
+          <a:p>
+            <a:pPr>
+              <a:defRPr sz="2000" b="0">
                 <a:solidFill>
                   <a:srgbClr val="0072B2"/>
                 </a:solidFill>
+                <a:latin typeface="Segoe UI"/>
               </a:defRPr>
             </a:pPr>
             <a:r>
@@ -7455,7 +9043,7 @@
       </p:sp>
       <p:sp>
         <p:nvSpPr>
-          <p:cNvPr id="4" name="TextBox 3"/>
+          <p:cNvPr id="6" name="TextBox 5"/>
           <p:cNvSpPr txBox="1"/>
           <p:nvPr/>
         </p:nvSpPr>
@@ -7477,38 +9065,40 @@
           <a:p>
             <a:pPr>
               <a:spcAft>
-                <a:spcPts val="800"/>
+                <a:spcPts val="1000"/>
               </a:spcAft>
-              <a:defRPr sz="2000">
+              <a:defRPr sz="2000" b="0">
                 <a:solidFill>
                   <a:srgbClr val="1A1A1A"/>
                 </a:solidFill>
+                <a:latin typeface="Segoe UI"/>
               </a:defRPr>
             </a:pPr>
             <a:r>
-              <a:t>• Nodes: the written notes (pitch, beat onset, duration).</a:t>
+              <a:t>•  Nodes: the written notes (pitch, beat onset, duration).</a:t>
             </a:r>
           </a:p>
           <a:p>
             <a:pPr>
               <a:spcAft>
-                <a:spcPts val="800"/>
+                <a:spcPts val="1000"/>
               </a:spcAft>
-              <a:defRPr sz="2000">
+              <a:defRPr sz="2000" b="0">
                 <a:solidFill>
                   <a:srgbClr val="1A1A1A"/>
                 </a:solidFill>
+                <a:latin typeface="Segoe UI"/>
               </a:defRPr>
             </a:pPr>
             <a:r>
-              <a:t>• Edges: close in score time and pitch — neighbours are played similarly.</a:t>
+              <a:t>•  Edges: close in score time and pitch — neighbours are played similarly.</a:t>
             </a:r>
           </a:p>
         </p:txBody>
       </p:sp>
       <p:pic>
         <p:nvPicPr>
-          <p:cNvPr id="5" name="Picture 4" descr="deck_scoregraph.png"/>
+          <p:cNvPr id="7" name="Picture 6" descr="deck_scoregraph.png"/>
           <p:cNvPicPr>
             <a:picLocks noChangeAspect="1"/>
           </p:cNvPicPr>
@@ -7556,8 +9146,8 @@
         </p:nvSpPr>
         <p:spPr>
           <a:xfrm>
-            <a:off x="411480" y="228600"/>
-            <a:ext cx="11338560" cy="685800"/>
+            <a:off x="11430000" y="6446520"/>
+            <a:ext cx="640080" cy="320040"/>
           </a:xfrm>
           <a:prstGeom prst="rect">
             <a:avLst/>
@@ -7571,14 +9161,15 @@
           <a:lstStyle/>
           <a:p>
             <a:pPr>
-              <a:defRPr sz="2800" b="1">
-                <a:solidFill>
-                  <a:srgbClr val="1A1A1A"/>
-                </a:solidFill>
+              <a:defRPr sz="1200" b="0">
+                <a:solidFill>
+                  <a:srgbClr val="6B7280"/>
+                </a:solidFill>
+                <a:latin typeface="Segoe UI"/>
               </a:defRPr>
             </a:pPr>
             <a:r>
-              <a:t>The model (2): a GP on the graph, channels coupled</a:t>
+              <a:t>6</a:t>
             </a:r>
           </a:p>
         </p:txBody>
@@ -7591,8 +9182,8 @@
         </p:nvSpPr>
         <p:spPr>
           <a:xfrm>
-            <a:off x="822960" y="1097280"/>
-            <a:ext cx="10515600" cy="640080"/>
+            <a:off x="411480" y="228600"/>
+            <a:ext cx="11338560" cy="685800"/>
           </a:xfrm>
           <a:prstGeom prst="rect">
             <a:avLst/>
@@ -7606,10 +9197,91 @@
           <a:lstStyle/>
           <a:p>
             <a:pPr>
-              <a:defRPr sz="2000">
+              <a:defRPr sz="2800" b="1">
+                <a:solidFill>
+                  <a:srgbClr val="1A1A1A"/>
+                </a:solidFill>
+                <a:latin typeface="Segoe UI"/>
+              </a:defRPr>
+            </a:pPr>
+            <a:r>
+              <a:t>The model (2): a GP on the graph, channels coupled</a:t>
+            </a:r>
+          </a:p>
+        </p:txBody>
+      </p:sp>
+      <p:sp>
+        <p:nvSpPr>
+          <p:cNvPr id="4" name="Rectangle 3"/>
+          <p:cNvSpPr/>
+          <p:nvPr/>
+        </p:nvSpPr>
+        <p:spPr>
+          <a:xfrm>
+            <a:off x="457200" y="896112"/>
+            <a:ext cx="11247120" cy="27940"/>
+          </a:xfrm>
+          <a:prstGeom prst="rect">
+            <a:avLst/>
+          </a:prstGeom>
+          <a:solidFill>
+            <a:srgbClr val="0072B2"/>
+          </a:solidFill>
+          <a:ln>
+            <a:noFill/>
+          </a:ln>
+          <a:effectLst/>
+        </p:spPr>
+        <p:style>
+          <a:lnRef idx="1">
+            <a:schemeClr val="accent1"/>
+          </a:lnRef>
+          <a:fillRef idx="3">
+            <a:schemeClr val="accent1"/>
+          </a:fillRef>
+          <a:effectRef idx="2">
+            <a:schemeClr val="accent1"/>
+          </a:effectRef>
+          <a:fontRef idx="minor">
+            <a:schemeClr val="lt1"/>
+          </a:fontRef>
+        </p:style>
+        <p:txBody>
+          <a:bodyPr rtlCol="0" anchor="ctr"/>
+          <a:lstStyle/>
+          <a:p>
+            <a:pPr algn="ctr"/>
+          </a:p>
+        </p:txBody>
+      </p:sp>
+      <p:sp>
+        <p:nvSpPr>
+          <p:cNvPr id="5" name="TextBox 4"/>
+          <p:cNvSpPr txBox="1"/>
+          <p:nvPr/>
+        </p:nvSpPr>
+        <p:spPr>
+          <a:xfrm>
+            <a:off x="822960" y="1097280"/>
+            <a:ext cx="10515600" cy="640080"/>
+          </a:xfrm>
+          <a:prstGeom prst="rect">
+            <a:avLst/>
+          </a:prstGeom>
+          <a:noFill/>
+        </p:spPr>
+        <p:txBody>
+          <a:bodyPr wrap="none">
+            <a:spAutoFit/>
+          </a:bodyPr>
+          <a:lstStyle/>
+          <a:p>
+            <a:pPr>
+              <a:defRPr sz="2000" b="0">
                 <a:solidFill>
                   <a:srgbClr val="0072B2"/>
                 </a:solidFill>
+                <a:latin typeface="Segoe UI"/>
               </a:defRPr>
             </a:pPr>
             <a:r>
@@ -7620,7 +9292,7 @@
       </p:sp>
       <p:sp>
         <p:nvSpPr>
-          <p:cNvPr id="4" name="TextBox 3"/>
+          <p:cNvPr id="6" name="TextBox 5"/>
           <p:cNvSpPr txBox="1"/>
           <p:nvPr/>
         </p:nvSpPr>
@@ -7642,31 +9314,33 @@
           <a:p>
             <a:pPr>
               <a:spcAft>
-                <a:spcPts val="800"/>
+                <a:spcPts val="1000"/>
               </a:spcAft>
-              <a:defRPr sz="2000">
+              <a:defRPr sz="2000" b="0">
                 <a:solidFill>
                   <a:srgbClr val="1A1A1A"/>
                 </a:solidFill>
+                <a:latin typeface="Segoe UI"/>
               </a:defRPr>
             </a:pPr>
             <a:r>
-              <a:t>• Shape the Laplacian spectrum with one parameter s: smooth-on-the-graph patterns keep their variance, rough ones are shrunk (graph Matérn).</a:t>
+              <a:t>•  Shape the Laplacian spectrum with one parameter s: smooth-on-the-graph patterns keep their variance, rough ones are shrunk (graph Matérn).</a:t>
             </a:r>
           </a:p>
           <a:p>
             <a:pPr>
               <a:spcAft>
-                <a:spcPts val="800"/>
+                <a:spcPts val="1000"/>
               </a:spcAft>
-              <a:defRPr sz="2000">
+              <a:defRPr sz="2000" b="0">
                 <a:solidFill>
                   <a:srgbClr val="1A1A1A"/>
                 </a:solidFill>
+                <a:latin typeface="Segoe UI"/>
               </a:defRPr>
             </a:pPr>
             <a:r>
-              <a:t>• The channels are correlated: a learned coupling matrix B shares the graph, so an observed channel at one note informs the others at neighbouring notes.</a:t>
+              <a:t>•  The channels are correlated: a learned coupling matrix B shares the graph, so an observed channel at one note informs the others at neighbouring notes.</a:t>
             </a:r>
           </a:p>
         </p:txBody>
@@ -7697,8 +9371,8 @@
         </p:nvSpPr>
         <p:spPr>
           <a:xfrm>
-            <a:off x="411480" y="228600"/>
-            <a:ext cx="11338560" cy="685800"/>
+            <a:off x="11430000" y="6446520"/>
+            <a:ext cx="640080" cy="320040"/>
           </a:xfrm>
           <a:prstGeom prst="rect">
             <a:avLst/>
@@ -7712,14 +9386,15 @@
           <a:lstStyle/>
           <a:p>
             <a:pPr>
-              <a:defRPr sz="2800" b="1">
-                <a:solidFill>
-                  <a:srgbClr val="1A1A1A"/>
-                </a:solidFill>
+              <a:defRPr sz="1200" b="0">
+                <a:solidFill>
+                  <a:srgbClr val="6B7280"/>
+                </a:solidFill>
+                <a:latin typeface="Segoe UI"/>
               </a:defRPr>
             </a:pPr>
             <a:r>
-              <a:t>The model (3): the covariance of one performance</a:t>
+              <a:t>7</a:t>
             </a:r>
           </a:p>
         </p:txBody>
@@ -7732,8 +9407,8 @@
         </p:nvSpPr>
         <p:spPr>
           <a:xfrm>
-            <a:off x="822960" y="1097280"/>
-            <a:ext cx="10515600" cy="640080"/>
+            <a:off x="411480" y="228600"/>
+            <a:ext cx="11338560" cy="685800"/>
           </a:xfrm>
           <a:prstGeom prst="rect">
             <a:avLst/>
@@ -7747,10 +9422,91 @@
           <a:lstStyle/>
           <a:p>
             <a:pPr>
-              <a:defRPr sz="2000">
+              <a:defRPr sz="2800" b="1">
+                <a:solidFill>
+                  <a:srgbClr val="1A1A1A"/>
+                </a:solidFill>
+                <a:latin typeface="Segoe UI"/>
+              </a:defRPr>
+            </a:pPr>
+            <a:r>
+              <a:t>The model (3): the covariance of one performance</a:t>
+            </a:r>
+          </a:p>
+        </p:txBody>
+      </p:sp>
+      <p:sp>
+        <p:nvSpPr>
+          <p:cNvPr id="4" name="Rectangle 3"/>
+          <p:cNvSpPr/>
+          <p:nvPr/>
+        </p:nvSpPr>
+        <p:spPr>
+          <a:xfrm>
+            <a:off x="457200" y="896112"/>
+            <a:ext cx="11247120" cy="27940"/>
+          </a:xfrm>
+          <a:prstGeom prst="rect">
+            <a:avLst/>
+          </a:prstGeom>
+          <a:solidFill>
+            <a:srgbClr val="0072B2"/>
+          </a:solidFill>
+          <a:ln>
+            <a:noFill/>
+          </a:ln>
+          <a:effectLst/>
+        </p:spPr>
+        <p:style>
+          <a:lnRef idx="1">
+            <a:schemeClr val="accent1"/>
+          </a:lnRef>
+          <a:fillRef idx="3">
+            <a:schemeClr val="accent1"/>
+          </a:fillRef>
+          <a:effectRef idx="2">
+            <a:schemeClr val="accent1"/>
+          </a:effectRef>
+          <a:fontRef idx="minor">
+            <a:schemeClr val="lt1"/>
+          </a:fontRef>
+        </p:style>
+        <p:txBody>
+          <a:bodyPr rtlCol="0" anchor="ctr"/>
+          <a:lstStyle/>
+          <a:p>
+            <a:pPr algn="ctr"/>
+          </a:p>
+        </p:txBody>
+      </p:sp>
+      <p:sp>
+        <p:nvSpPr>
+          <p:cNvPr id="5" name="TextBox 4"/>
+          <p:cNvSpPr txBox="1"/>
+          <p:nvPr/>
+        </p:nvSpPr>
+        <p:spPr>
+          <a:xfrm>
+            <a:off x="822960" y="1097280"/>
+            <a:ext cx="10515600" cy="640080"/>
+          </a:xfrm>
+          <a:prstGeom prst="rect">
+            <a:avLst/>
+          </a:prstGeom>
+          <a:noFill/>
+        </p:spPr>
+        <p:txBody>
+          <a:bodyPr wrap="none">
+            <a:spAutoFit/>
+          </a:bodyPr>
+          <a:lstStyle/>
+          <a:p>
+            <a:pPr>
+              <a:defRPr sz="2000" b="0">
                 <a:solidFill>
                   <a:srgbClr val="0072B2"/>
                 </a:solidFill>
+                <a:latin typeface="Segoe UI"/>
               </a:defRPr>
             </a:pPr>
             <a:r>
@@ -7761,7 +9517,7 @@
       </p:sp>
       <p:sp>
         <p:nvSpPr>
-          <p:cNvPr id="4" name="TextBox 3"/>
+          <p:cNvPr id="6" name="TextBox 5"/>
           <p:cNvSpPr txBox="1"/>
           <p:nvPr/>
         </p:nvSpPr>
@@ -7783,46 +9539,49 @@
           <a:p>
             <a:pPr>
               <a:spcAft>
-                <a:spcPts val="800"/>
+                <a:spcPts val="1000"/>
               </a:spcAft>
-              <a:defRPr sz="2000">
+              <a:defRPr sz="2000" b="0">
                 <a:solidFill>
                   <a:srgbClr val="1A1A1A"/>
                 </a:solidFill>
+                <a:latin typeface="Segoe UI"/>
               </a:defRPr>
             </a:pPr>
             <a:r>
-              <a:t>• Graph term + side-information terms + noise: the whole model is one per-piece covariance matrix.</a:t>
+              <a:t>•  Graph term + side-information terms + noise: the whole model is one per-piece covariance matrix.</a:t>
             </a:r>
           </a:p>
           <a:p>
             <a:pPr>
               <a:spcAft>
-                <a:spcPts val="800"/>
+                <a:spcPts val="1000"/>
               </a:spcAft>
-              <a:defRPr sz="2000">
+              <a:defRPr sz="2000" b="0">
                 <a:solidFill>
                   <a:srgbClr val="1A1A1A"/>
                 </a:solidFill>
+                <a:latin typeface="Segoe UI"/>
               </a:defRPr>
             </a:pPr>
             <a:r>
-              <a:t>• Feature weights are re-inferred for every piece — the measured source of the accuracy gain.</a:t>
+              <a:t>•  Feature weights are re-inferred for every piece — the measured source of the accuracy gain.</a:t>
             </a:r>
           </a:p>
           <a:p>
             <a:pPr>
               <a:spcAft>
-                <a:spcPts val="800"/>
+                <a:spcPts val="1000"/>
               </a:spcAft>
-              <a:defRPr sz="2000">
+              <a:defRPr sz="2000" b="0">
                 <a:solidFill>
                   <a:srgbClr val="1A1A1A"/>
                 </a:solidFill>
+                <a:latin typeface="Segoe UI"/>
               </a:defRPr>
             </a:pPr>
             <a:r>
-              <a:t>• Sixteen numbers per piece, fit by exact evidence; prediction is conjugate, closed form.</a:t>
+              <a:t>•  Sixteen numbers per piece, fit by exact evidence; prediction is conjugate, closed form.</a:t>
             </a:r>
           </a:p>
         </p:txBody>
@@ -7853,8 +9612,8 @@
         </p:nvSpPr>
         <p:spPr>
           <a:xfrm>
-            <a:off x="411480" y="228600"/>
-            <a:ext cx="11338560" cy="685800"/>
+            <a:off x="11430000" y="6446520"/>
+            <a:ext cx="640080" cy="320040"/>
           </a:xfrm>
           <a:prstGeom prst="rect">
             <a:avLst/>
@@ -7868,21 +9627,102 @@
           <a:lstStyle/>
           <a:p>
             <a:pPr>
+              <a:defRPr sz="1200" b="0">
+                <a:solidFill>
+                  <a:srgbClr val="6B7280"/>
+                </a:solidFill>
+                <a:latin typeface="Segoe UI"/>
+              </a:defRPr>
+            </a:pPr>
+            <a:r>
+              <a:t>8</a:t>
+            </a:r>
+          </a:p>
+        </p:txBody>
+      </p:sp>
+      <p:sp>
+        <p:nvSpPr>
+          <p:cNvPr id="3" name="TextBox 2"/>
+          <p:cNvSpPr txBox="1"/>
+          <p:nvPr/>
+        </p:nvSpPr>
+        <p:spPr>
+          <a:xfrm>
+            <a:off x="411480" y="228600"/>
+            <a:ext cx="11338560" cy="685800"/>
+          </a:xfrm>
+          <a:prstGeom prst="rect">
+            <a:avLst/>
+          </a:prstGeom>
+          <a:noFill/>
+        </p:spPr>
+        <p:txBody>
+          <a:bodyPr wrap="none">
+            <a:spAutoFit/>
+          </a:bodyPr>
+          <a:lstStyle/>
+          <a:p>
+            <a:pPr>
               <a:defRPr sz="2800" b="1">
                 <a:solidFill>
                   <a:srgbClr val="1A1A1A"/>
                 </a:solidFill>
+                <a:latin typeface="Segoe UI"/>
               </a:defRPr>
             </a:pPr>
             <a:r>
               <a:t>The model, in one picture</a:t>
             </a:r>
+          </a:p>
+        </p:txBody>
+      </p:sp>
+      <p:sp>
+        <p:nvSpPr>
+          <p:cNvPr id="4" name="Rectangle 3"/>
+          <p:cNvSpPr/>
+          <p:nvPr/>
+        </p:nvSpPr>
+        <p:spPr>
+          <a:xfrm>
+            <a:off x="457200" y="896112"/>
+            <a:ext cx="11247120" cy="27940"/>
+          </a:xfrm>
+          <a:prstGeom prst="rect">
+            <a:avLst/>
+          </a:prstGeom>
+          <a:solidFill>
+            <a:srgbClr val="0072B2"/>
+          </a:solidFill>
+          <a:ln>
+            <a:noFill/>
+          </a:ln>
+          <a:effectLst/>
+        </p:spPr>
+        <p:style>
+          <a:lnRef idx="1">
+            <a:schemeClr val="accent1"/>
+          </a:lnRef>
+          <a:fillRef idx="3">
+            <a:schemeClr val="accent1"/>
+          </a:fillRef>
+          <a:effectRef idx="2">
+            <a:schemeClr val="accent1"/>
+          </a:effectRef>
+          <a:fontRef idx="minor">
+            <a:schemeClr val="lt1"/>
+          </a:fontRef>
+        </p:style>
+        <p:txBody>
+          <a:bodyPr rtlCol="0" anchor="ctr"/>
+          <a:lstStyle/>
+          <a:p>
+            <a:pPr algn="ctr"/>
           </a:p>
         </p:txBody>
       </p:sp>
       <p:pic>
         <p:nvPicPr>
-          <p:cNvPr id="3" name="Picture 2" descr="arch_phase1_deck.png"/>
+          <p:cNvPr id="5" name="Picture 4" descr="arch_phase1_deck.png"/>
           <p:cNvPicPr>
             <a:picLocks noChangeAspect="1"/>
           </p:cNvPicPr>
@@ -7906,7 +9746,7 @@
       </p:pic>
       <p:sp>
         <p:nvSpPr>
-          <p:cNvPr id="4" name="TextBox 3"/>
+          <p:cNvPr id="6" name="TextBox 5"/>
           <p:cNvSpPr txBox="1"/>
           <p:nvPr/>
         </p:nvSpPr>
@@ -7927,10 +9767,11 @@
           <a:lstStyle/>
           <a:p>
             <a:pPr>
-              <a:defRPr sz="1300">
+              <a:defRPr sz="1300" b="0">
                 <a:solidFill>
                   <a:srgbClr val="6B7280"/>
                 </a:solidFill>
+                <a:latin typeface="Segoe UI"/>
               </a:defRPr>
             </a:pPr>
             <a:r>
@@ -7965,8 +9806,8 @@
         </p:nvSpPr>
         <p:spPr>
           <a:xfrm>
-            <a:off x="411480" y="228600"/>
-            <a:ext cx="11338560" cy="685800"/>
+            <a:off x="11430000" y="6446520"/>
+            <a:ext cx="640080" cy="320040"/>
           </a:xfrm>
           <a:prstGeom prst="rect">
             <a:avLst/>
@@ -7980,14 +9821,15 @@
           <a:lstStyle/>
           <a:p>
             <a:pPr>
-              <a:defRPr sz="2800" b="1">
-                <a:solidFill>
-                  <a:srgbClr val="1A1A1A"/>
-                </a:solidFill>
+              <a:defRPr sz="1200" b="0">
+                <a:solidFill>
+                  <a:srgbClr val="6B7280"/>
+                </a:solidFill>
+                <a:latin typeface="Segoe UI"/>
               </a:defRPr>
             </a:pPr>
             <a:r>
-              <a:t>Phase 1: the setting (piano, aligned MIDI)</a:t>
+              <a:t>9</a:t>
             </a:r>
           </a:p>
         </p:txBody>
@@ -8000,8 +9842,8 @@
         </p:nvSpPr>
         <p:spPr>
           <a:xfrm>
-            <a:off x="822960" y="1097280"/>
-            <a:ext cx="10515600" cy="640080"/>
+            <a:off x="411480" y="228600"/>
+            <a:ext cx="11338560" cy="685800"/>
           </a:xfrm>
           <a:prstGeom prst="rect">
             <a:avLst/>
@@ -8015,10 +9857,91 @@
           <a:lstStyle/>
           <a:p>
             <a:pPr>
-              <a:defRPr sz="2000">
+              <a:defRPr sz="2800" b="1">
+                <a:solidFill>
+                  <a:srgbClr val="1A1A1A"/>
+                </a:solidFill>
+                <a:latin typeface="Segoe UI"/>
+              </a:defRPr>
+            </a:pPr>
+            <a:r>
+              <a:t>Phase 1: the setting (piano, aligned MIDI)</a:t>
+            </a:r>
+          </a:p>
+        </p:txBody>
+      </p:sp>
+      <p:sp>
+        <p:nvSpPr>
+          <p:cNvPr id="4" name="Rectangle 3"/>
+          <p:cNvSpPr/>
+          <p:nvPr/>
+        </p:nvSpPr>
+        <p:spPr>
+          <a:xfrm>
+            <a:off x="457200" y="896112"/>
+            <a:ext cx="11247120" cy="27940"/>
+          </a:xfrm>
+          <a:prstGeom prst="rect">
+            <a:avLst/>
+          </a:prstGeom>
+          <a:solidFill>
+            <a:srgbClr val="0072B2"/>
+          </a:solidFill>
+          <a:ln>
+            <a:noFill/>
+          </a:ln>
+          <a:effectLst/>
+        </p:spPr>
+        <p:style>
+          <a:lnRef idx="1">
+            <a:schemeClr val="accent1"/>
+          </a:lnRef>
+          <a:fillRef idx="3">
+            <a:schemeClr val="accent1"/>
+          </a:fillRef>
+          <a:effectRef idx="2">
+            <a:schemeClr val="accent1"/>
+          </a:effectRef>
+          <a:fontRef idx="minor">
+            <a:schemeClr val="lt1"/>
+          </a:fontRef>
+        </p:style>
+        <p:txBody>
+          <a:bodyPr rtlCol="0" anchor="ctr"/>
+          <a:lstStyle/>
+          <a:p>
+            <a:pPr algn="ctr"/>
+          </a:p>
+        </p:txBody>
+      </p:sp>
+      <p:sp>
+        <p:nvSpPr>
+          <p:cNvPr id="5" name="TextBox 4"/>
+          <p:cNvSpPr txBox="1"/>
+          <p:nvPr/>
+        </p:nvSpPr>
+        <p:spPr>
+          <a:xfrm>
+            <a:off x="822960" y="1097280"/>
+            <a:ext cx="10515600" cy="640080"/>
+          </a:xfrm>
+          <a:prstGeom prst="rect">
+            <a:avLst/>
+          </a:prstGeom>
+          <a:noFill/>
+        </p:spPr>
+        <p:txBody>
+          <a:bodyPr wrap="none">
+            <a:spAutoFit/>
+          </a:bodyPr>
+          <a:lstStyle/>
+          <a:p>
+            <a:pPr>
+              <a:defRPr sz="2000" b="0">
                 <a:solidFill>
                   <a:srgbClr val="0072B2"/>
                 </a:solidFill>
+                <a:latin typeface="Segoe UI"/>
               </a:defRPr>
             </a:pPr>
             <a:r>
@@ -8029,7 +9952,7 @@
       </p:sp>
       <p:sp>
         <p:nvSpPr>
-          <p:cNvPr id="4" name="TextBox 3"/>
+          <p:cNvPr id="6" name="TextBox 5"/>
           <p:cNvSpPr txBox="1"/>
           <p:nvPr/>
         </p:nvSpPr>
@@ -8051,31 +9974,33 @@
           <a:p>
             <a:pPr>
               <a:spcAft>
-                <a:spcPts val="800"/>
+                <a:spcPts val="1000"/>
               </a:spcAft>
-              <a:defRPr sz="2000">
+              <a:defRPr sz="2000" b="0">
                 <a:solidFill>
                   <a:srgbClr val="1A1A1A"/>
                 </a:solidFill>
+                <a:latin typeface="Segoe UI"/>
               </a:defRPr>
             </a:pPr>
             <a:r>
-              <a:t>• A Disklavier records exactly what the pianist controlled: three variables per note, read directly, no estimation.</a:t>
+              <a:t>•  A Disklavier records exactly what the pianist controlled: three variables per note, read directly, no estimation.</a:t>
             </a:r>
           </a:p>
           <a:p>
             <a:pPr>
               <a:spcAft>
-                <a:spcPts val="800"/>
+                <a:spcPts val="1000"/>
               </a:spcAft>
-              <a:defRPr sz="2000">
+              <a:defRPr sz="2000" b="0">
                 <a:solidFill>
                   <a:srgbClr val="1A1A1A"/>
                 </a:solidFill>
+                <a:latin typeface="Segoe UI"/>
               </a:defRPr>
             </a:pPr>
             <a:r>
-              <a:t>• The question: on held-out notes, how good are the estimates, and can the error bars be trusted?</a:t>
+              <a:t>•  The question: on held-out notes, how good are the estimates, and can the error bars be trusted?</a:t>
             </a:r>
           </a:p>
         </p:txBody>
